--- a/output/wordlabs-part-3day.pptx
+++ b/output/wordlabs-part-3day.pptx
@@ -4240,7 +4240,7 @@
                 <a:ea typeface="Calibri" pitchFamily="34" charset="-122"/>
                 <a:cs typeface="Calibri" pitchFamily="34" charset="-120"/>
               </a:rPr>
-              <a:t>"piece, share, divide"</a:t>
+              <a:t>"a piece of something; a section"</a:t>
             </a:r>
             <a:endParaRPr lang="en-US" sz="2200" dirty="0"/>
           </a:p>
@@ -4279,7 +4279,7 @@
                 <a:ea typeface="Calibri" pitchFamily="34" charset="-122"/>
                 <a:cs typeface="Calibri" pitchFamily="34" charset="-120"/>
               </a:rPr>
-              <a:t>Origin: Latin: pars</a:t>
+              <a:t>Origin: Anglo-Saxon (Old English) root</a:t>
             </a:r>
             <a:endParaRPr lang="en-US" sz="1300" dirty="0"/>
           </a:p>
@@ -5288,7 +5288,7 @@
                 <a:ea typeface="Calibri" pitchFamily="34" charset="-122"/>
                 <a:cs typeface="Calibri" pitchFamily="34" charset="-120"/>
               </a:rPr>
-              <a:t>Word Labs  •  wordlabs.app  •  Root: 'part' = piece, share, divide</a:t>
+              <a:t>Word Labs  •  wordlabs.app  •  Root: 'part' = a piece of something; a section</a:t>
             </a:r>
             <a:endParaRPr lang="en-US" sz="800" dirty="0"/>
           </a:p>
@@ -5622,7 +5622,7 @@
                 <a:ea typeface="Trebuchet MS" pitchFamily="34" charset="-122"/>
                 <a:cs typeface="Trebuchet MS" pitchFamily="34" charset="-120"/>
               </a:rPr>
-              <a:t>1</a:t>
+              <a:t>0</a:t>
             </a:r>
             <a:pPr algn="ctr" indent="0" marL="0">
               <a:buNone/>
@@ -5928,7 +5928,7 @@
                 <a:ea typeface="Calibri" pitchFamily="34" charset="-122"/>
                 <a:cs typeface="Calibri" pitchFamily="34" charset="-120"/>
               </a:rPr>
-              <a:t>Word Labs  •  wordlabs.app  •  Root: 'part' = piece, share, divide</a:t>
+              <a:t>Word Labs  •  wordlabs.app  •  Root: 'part' = a piece of something; a section</a:t>
             </a:r>
             <a:endParaRPr lang="en-US" sz="800" dirty="0"/>
           </a:p>
@@ -6040,7 +6040,7 @@
                 <a:ea typeface="Calibri" pitchFamily="34" charset="-122"/>
                 <a:cs typeface="Calibri" pitchFamily="34" charset="-120"/>
               </a:rPr>
-              <a:t>The class was </a:t>
+              <a:t>The office used a </a:t>
             </a:r>
             <a:pPr algn="l" indent="0" marL="0">
               <a:buNone/>
@@ -6057,7 +6057,7 @@
                 <a:ea typeface="Calibri" pitchFamily="34" charset="-122"/>
                 <a:cs typeface="Calibri" pitchFamily="34" charset="-120"/>
               </a:rPr>
-              <a:t>impartial</a:t>
+              <a:t>partition</a:t>
             </a:r>
             <a:pPr algn="l" indent="0" marL="0">
               <a:buNone/>
@@ -6071,7 +6071,7 @@
                 <a:ea typeface="Calibri" pitchFamily="34" charset="-122"/>
                 <a:cs typeface="Calibri" pitchFamily="34" charset="-120"/>
               </a:rPr>
-              <a:t> when choosing </a:t>
+              <a:t> to separate the meeting area from the desks. He kept his tools in a small </a:t>
             </a:r>
             <a:pPr algn="l" indent="0" marL="0">
               <a:buNone/>
@@ -6088,7 +6088,7 @@
                 <a:ea typeface="Calibri" pitchFamily="34" charset="-122"/>
                 <a:cs typeface="Calibri" pitchFamily="34" charset="-120"/>
               </a:rPr>
-              <a:t>partners</a:t>
+              <a:t>compartment</a:t>
             </a:r>
             <a:pPr algn="l" indent="0" marL="0">
               <a:buNone/>
@@ -6102,7 +6102,7 @@
                 <a:ea typeface="Calibri" pitchFamily="34" charset="-122"/>
                 <a:cs typeface="Calibri" pitchFamily="34" charset="-120"/>
               </a:rPr>
-              <a:t>, so everyone felt it was fair.</a:t>
+              <a:t> under the seat.</a:t>
             </a:r>
             <a:endParaRPr lang="en-US" sz="1800" dirty="0"/>
           </a:p>
@@ -6257,7 +6257,7 @@
                 <a:ea typeface="Trebuchet MS" pitchFamily="34" charset="-122"/>
                 <a:cs typeface="Trebuchet MS" pitchFamily="34" charset="-120"/>
               </a:rPr>
-              <a:t>impartial</a:t>
+              <a:t>partition</a:t>
             </a:r>
             <a:endParaRPr lang="en-US" sz="1400" dirty="0"/>
           </a:p>
@@ -6385,7 +6385,7 @@
                 <a:ea typeface="Trebuchet MS" pitchFamily="34" charset="-122"/>
                 <a:cs typeface="Trebuchet MS" pitchFamily="34" charset="-120"/>
               </a:rPr>
-              <a:t>partners</a:t>
+              <a:t>compartment</a:t>
             </a:r>
             <a:endParaRPr lang="en-US" sz="1400" dirty="0"/>
           </a:p>
@@ -6716,7 +6716,7 @@
                 <a:ea typeface="Calibri" pitchFamily="34" charset="-122"/>
                 <a:cs typeface="Calibri" pitchFamily="34" charset="-120"/>
               </a:rPr>
-              <a:t>Word Labs  •  wordlabs.app  •  Root: 'part' = piece, share, divide</a:t>
+              <a:t>Word Labs  •  wordlabs.app  •  Root: 'part' = a piece of something; a section</a:t>
             </a:r>
             <a:endParaRPr lang="en-US" sz="800" dirty="0"/>
           </a:p>
@@ -6855,7 +6855,7 @@
                 <a:ea typeface="Trebuchet MS" pitchFamily="34" charset="-122"/>
                 <a:cs typeface="Trebuchet MS" pitchFamily="34" charset="-120"/>
               </a:rPr>
-              <a:t>impartial</a:t>
+              <a:t>partition</a:t>
             </a:r>
             <a:endParaRPr lang="en-US" sz="2800" dirty="0"/>
           </a:p>
@@ -7543,7 +7543,7 @@
                 <a:ea typeface="Calibri" pitchFamily="34" charset="-122"/>
                 <a:cs typeface="Calibri" pitchFamily="34" charset="-120"/>
               </a:rPr>
-              <a:t>Word Labs  •  wordlabs.app  •  Root: 'part' = piece, share, divide</a:t>
+              <a:t>Word Labs  •  wordlabs.app  •  Root: 'part' = a piece of something; a section</a:t>
             </a:r>
             <a:endParaRPr lang="en-US" sz="800" dirty="0"/>
           </a:p>
@@ -7682,7 +7682,7 @@
                 <a:ea typeface="Trebuchet MS" pitchFamily="34" charset="-122"/>
                 <a:cs typeface="Trebuchet MS" pitchFamily="34" charset="-120"/>
               </a:rPr>
-              <a:t>impartial</a:t>
+              <a:t>partition</a:t>
             </a:r>
             <a:endParaRPr lang="en-US" sz="2800" dirty="0"/>
           </a:p>
@@ -7771,11 +7771,11 @@
             </a:avLst>
           </a:prstGeom>
           <a:solidFill>
-            <a:srgbClr val="DDD6FE"/>
+            <a:srgbClr val="CCFBF1"/>
           </a:solidFill>
           <a:ln w="19050">
             <a:solidFill>
-              <a:srgbClr val="7C3AED"/>
+              <a:srgbClr val="0D9488"/>
             </a:solidFill>
             <a:prstDash val="solid"/>
           </a:ln>
@@ -7815,13 +7815,13 @@
             <a:r>
               <a:rPr lang="en-US" sz="1300" b="1" dirty="0">
                 <a:solidFill>
-                  <a:srgbClr val="4C1D95"/>
+                  <a:srgbClr val="0F766E"/>
                 </a:solidFill>
                 <a:latin typeface="Trebuchet MS" pitchFamily="34" charset="0"/>
                 <a:ea typeface="Trebuchet MS" pitchFamily="34" charset="-122"/>
                 <a:cs typeface="Trebuchet MS" pitchFamily="34" charset="-120"/>
               </a:rPr>
-              <a:t>im</a:t>
+              <a:t>part</a:t>
             </a:r>
             <a:endParaRPr lang="en-US" sz="1300" dirty="0"/>
           </a:p>
@@ -7860,7 +7860,7 @@
                 <a:ea typeface="Calibri" pitchFamily="34" charset="-122"/>
                 <a:cs typeface="Calibri" pitchFamily="34" charset="-120"/>
               </a:rPr>
-              <a:t>not</a:t>
+              <a:t>a piece of something; a section</a:t>
             </a:r>
             <a:endParaRPr lang="en-US" sz="850" dirty="0"/>
           </a:p>
@@ -7883,11 +7883,11 @@
             </a:avLst>
           </a:prstGeom>
           <a:solidFill>
-            <a:srgbClr val="CCFBF1"/>
+            <a:srgbClr val="FCE7F3"/>
           </a:solidFill>
           <a:ln w="19050">
             <a:solidFill>
-              <a:srgbClr val="0D9488"/>
+              <a:srgbClr val="DB2777"/>
             </a:solidFill>
             <a:prstDash val="solid"/>
           </a:ln>
@@ -7927,13 +7927,13 @@
             <a:r>
               <a:rPr lang="en-US" sz="1300" b="1" dirty="0">
                 <a:solidFill>
-                  <a:srgbClr val="0F766E"/>
+                  <a:srgbClr val="9D174D"/>
                 </a:solidFill>
                 <a:latin typeface="Trebuchet MS" pitchFamily="34" charset="0"/>
                 <a:ea typeface="Trebuchet MS" pitchFamily="34" charset="-122"/>
                 <a:cs typeface="Trebuchet MS" pitchFamily="34" charset="-120"/>
               </a:rPr>
-              <a:t>part</a:t>
+              <a:t>y</a:t>
             </a:r>
             <a:endParaRPr lang="en-US" sz="1300" dirty="0"/>
           </a:p>
@@ -7972,7 +7972,7 @@
                 <a:ea typeface="Calibri" pitchFamily="34" charset="-122"/>
                 <a:cs typeface="Calibri" pitchFamily="34" charset="-120"/>
               </a:rPr>
-              <a:t>piece, share</a:t>
+              <a:t>characterised by</a:t>
             </a:r>
             <a:endParaRPr lang="en-US" sz="850" dirty="0"/>
           </a:p>
@@ -8045,7 +8045,7 @@
                 <a:ea typeface="Trebuchet MS" pitchFamily="34" charset="-122"/>
                 <a:cs typeface="Trebuchet MS" pitchFamily="34" charset="-120"/>
               </a:rPr>
-              <a:t>ial</a:t>
+              <a:t>tion</a:t>
             </a:r>
             <a:endParaRPr lang="en-US" sz="1300" dirty="0"/>
           </a:p>
@@ -8084,7 +8084,7 @@
                 <a:ea typeface="Calibri" pitchFamily="34" charset="-122"/>
                 <a:cs typeface="Calibri" pitchFamily="34" charset="-120"/>
               </a:rPr>
-              <a:t>relating to</a:t>
+              <a:t>act or process of</a:t>
             </a:r>
             <a:endParaRPr lang="en-US" sz="850" dirty="0"/>
           </a:p>
@@ -8640,7 +8640,7 @@
                 <a:ea typeface="Calibri" pitchFamily="34" charset="-122"/>
                 <a:cs typeface="Calibri" pitchFamily="34" charset="-120"/>
               </a:rPr>
-              <a:t>Word Labs  •  wordlabs.app  •  Root: 'part' = piece, share, divide</a:t>
+              <a:t>Word Labs  •  wordlabs.app  •  Root: 'part' = a piece of something; a section</a:t>
             </a:r>
             <a:endParaRPr lang="en-US" sz="800" dirty="0"/>
           </a:p>
@@ -8779,7 +8779,7 @@
                 <a:ea typeface="Trebuchet MS" pitchFamily="34" charset="-122"/>
                 <a:cs typeface="Trebuchet MS" pitchFamily="34" charset="-120"/>
               </a:rPr>
-              <a:t>impartial</a:t>
+              <a:t>partition</a:t>
             </a:r>
             <a:endParaRPr lang="en-US" sz="2800" dirty="0"/>
           </a:p>
@@ -8868,11 +8868,11 @@
             </a:avLst>
           </a:prstGeom>
           <a:solidFill>
-            <a:srgbClr val="DDD6FE"/>
+            <a:srgbClr val="CCFBF1"/>
           </a:solidFill>
           <a:ln w="19050">
             <a:solidFill>
-              <a:srgbClr val="7C3AED"/>
+              <a:srgbClr val="0D9488"/>
             </a:solidFill>
             <a:prstDash val="solid"/>
           </a:ln>
@@ -8912,13 +8912,13 @@
             <a:r>
               <a:rPr lang="en-US" sz="1300" b="1" dirty="0">
                 <a:solidFill>
-                  <a:srgbClr val="4C1D95"/>
+                  <a:srgbClr val="0F766E"/>
                 </a:solidFill>
                 <a:latin typeface="Trebuchet MS" pitchFamily="34" charset="0"/>
                 <a:ea typeface="Trebuchet MS" pitchFamily="34" charset="-122"/>
                 <a:cs typeface="Trebuchet MS" pitchFamily="34" charset="-120"/>
               </a:rPr>
-              <a:t>im</a:t>
+              <a:t>part</a:t>
             </a:r>
             <a:endParaRPr lang="en-US" sz="1300" dirty="0"/>
           </a:p>
@@ -8957,7 +8957,7 @@
                 <a:ea typeface="Calibri" pitchFamily="34" charset="-122"/>
                 <a:cs typeface="Calibri" pitchFamily="34" charset="-120"/>
               </a:rPr>
-              <a:t>not</a:t>
+              <a:t>a piece of something; a section</a:t>
             </a:r>
             <a:endParaRPr lang="en-US" sz="850" dirty="0"/>
           </a:p>
@@ -8980,11 +8980,11 @@
             </a:avLst>
           </a:prstGeom>
           <a:solidFill>
-            <a:srgbClr val="CCFBF1"/>
+            <a:srgbClr val="FCE7F3"/>
           </a:solidFill>
           <a:ln w="19050">
             <a:solidFill>
-              <a:srgbClr val="0D9488"/>
+              <a:srgbClr val="DB2777"/>
             </a:solidFill>
             <a:prstDash val="solid"/>
           </a:ln>
@@ -9024,13 +9024,13 @@
             <a:r>
               <a:rPr lang="en-US" sz="1300" b="1" dirty="0">
                 <a:solidFill>
-                  <a:srgbClr val="0F766E"/>
+                  <a:srgbClr val="9D174D"/>
                 </a:solidFill>
                 <a:latin typeface="Trebuchet MS" pitchFamily="34" charset="0"/>
                 <a:ea typeface="Trebuchet MS" pitchFamily="34" charset="-122"/>
                 <a:cs typeface="Trebuchet MS" pitchFamily="34" charset="-120"/>
               </a:rPr>
-              <a:t>part</a:t>
+              <a:t>y</a:t>
             </a:r>
             <a:endParaRPr lang="en-US" sz="1300" dirty="0"/>
           </a:p>
@@ -9069,7 +9069,7 @@
                 <a:ea typeface="Calibri" pitchFamily="34" charset="-122"/>
                 <a:cs typeface="Calibri" pitchFamily="34" charset="-120"/>
               </a:rPr>
-              <a:t>piece, share</a:t>
+              <a:t>characterised by</a:t>
             </a:r>
             <a:endParaRPr lang="en-US" sz="850" dirty="0"/>
           </a:p>
@@ -9142,7 +9142,7 @@
                 <a:ea typeface="Trebuchet MS" pitchFamily="34" charset="-122"/>
                 <a:cs typeface="Trebuchet MS" pitchFamily="34" charset="-120"/>
               </a:rPr>
-              <a:t>ial</a:t>
+              <a:t>tion</a:t>
             </a:r>
             <a:endParaRPr lang="en-US" sz="1300" dirty="0"/>
           </a:p>
@@ -9181,7 +9181,7 @@
                 <a:ea typeface="Calibri" pitchFamily="34" charset="-122"/>
                 <a:cs typeface="Calibri" pitchFamily="34" charset="-120"/>
               </a:rPr>
-              <a:t>relating to</a:t>
+              <a:t>act or process of</a:t>
             </a:r>
             <a:endParaRPr lang="en-US" sz="850" dirty="0"/>
           </a:p>
@@ -9340,7 +9340,7 @@
                 <a:ea typeface="Trebuchet MS" pitchFamily="34" charset="-122"/>
                 <a:cs typeface="Trebuchet MS" pitchFamily="34" charset="-120"/>
               </a:rPr>
-              <a:t>im</a:t>
+              <a:t>par</a:t>
             </a:r>
             <a:endParaRPr lang="en-US" sz="1400" dirty="0"/>
           </a:p>
@@ -9445,7 +9445,7 @@
                 <a:ea typeface="Trebuchet MS" pitchFamily="34" charset="-122"/>
                 <a:cs typeface="Trebuchet MS" pitchFamily="34" charset="-120"/>
               </a:rPr>
-              <a:t>par</a:t>
+              <a:t>ti</a:t>
             </a:r>
             <a:endParaRPr lang="en-US" sz="1400" dirty="0"/>
           </a:p>
@@ -9550,7 +9550,7 @@
                 <a:ea typeface="Trebuchet MS" pitchFamily="34" charset="-122"/>
                 <a:cs typeface="Trebuchet MS" pitchFamily="34" charset="-120"/>
               </a:rPr>
-              <a:t>tial</a:t>
+              <a:t>tion</a:t>
             </a:r>
             <a:endParaRPr lang="en-US" sz="1400" dirty="0"/>
           </a:p>
@@ -9974,7 +9974,7 @@
                 <a:ea typeface="Calibri" pitchFamily="34" charset="-122"/>
                 <a:cs typeface="Calibri" pitchFamily="34" charset="-120"/>
               </a:rPr>
-              <a:t>Word Labs  •  wordlabs.app  •  Root: 'part' = piece, share, divide</a:t>
+              <a:t>Word Labs  •  wordlabs.app  •  Root: 'part' = a piece of something; a section</a:t>
             </a:r>
             <a:endParaRPr lang="en-US" sz="800" dirty="0"/>
           </a:p>
@@ -10113,7 +10113,7 @@
                 <a:ea typeface="Trebuchet MS" pitchFamily="34" charset="-122"/>
                 <a:cs typeface="Trebuchet MS" pitchFamily="34" charset="-120"/>
               </a:rPr>
-              <a:t>impartial</a:t>
+              <a:t>partition</a:t>
             </a:r>
             <a:endParaRPr lang="en-US" sz="2800" dirty="0"/>
           </a:p>
@@ -10202,11 +10202,11 @@
             </a:avLst>
           </a:prstGeom>
           <a:solidFill>
-            <a:srgbClr val="DDD6FE"/>
+            <a:srgbClr val="CCFBF1"/>
           </a:solidFill>
           <a:ln w="19050">
             <a:solidFill>
-              <a:srgbClr val="7C3AED"/>
+              <a:srgbClr val="0D9488"/>
             </a:solidFill>
             <a:prstDash val="solid"/>
           </a:ln>
@@ -10246,13 +10246,13 @@
             <a:r>
               <a:rPr lang="en-US" sz="1300" b="1" dirty="0">
                 <a:solidFill>
-                  <a:srgbClr val="4C1D95"/>
+                  <a:srgbClr val="0F766E"/>
                 </a:solidFill>
                 <a:latin typeface="Trebuchet MS" pitchFamily="34" charset="0"/>
                 <a:ea typeface="Trebuchet MS" pitchFamily="34" charset="-122"/>
                 <a:cs typeface="Trebuchet MS" pitchFamily="34" charset="-120"/>
               </a:rPr>
-              <a:t>im</a:t>
+              <a:t>part</a:t>
             </a:r>
             <a:endParaRPr lang="en-US" sz="1300" dirty="0"/>
           </a:p>
@@ -10291,7 +10291,7 @@
                 <a:ea typeface="Calibri" pitchFamily="34" charset="-122"/>
                 <a:cs typeface="Calibri" pitchFamily="34" charset="-120"/>
               </a:rPr>
-              <a:t>not</a:t>
+              <a:t>a piece of something; a section</a:t>
             </a:r>
             <a:endParaRPr lang="en-US" sz="850" dirty="0"/>
           </a:p>
@@ -10314,11 +10314,11 @@
             </a:avLst>
           </a:prstGeom>
           <a:solidFill>
-            <a:srgbClr val="CCFBF1"/>
+            <a:srgbClr val="FCE7F3"/>
           </a:solidFill>
           <a:ln w="19050">
             <a:solidFill>
-              <a:srgbClr val="0D9488"/>
+              <a:srgbClr val="DB2777"/>
             </a:solidFill>
             <a:prstDash val="solid"/>
           </a:ln>
@@ -10358,13 +10358,13 @@
             <a:r>
               <a:rPr lang="en-US" sz="1300" b="1" dirty="0">
                 <a:solidFill>
-                  <a:srgbClr val="0F766E"/>
+                  <a:srgbClr val="9D174D"/>
                 </a:solidFill>
                 <a:latin typeface="Trebuchet MS" pitchFamily="34" charset="0"/>
                 <a:ea typeface="Trebuchet MS" pitchFamily="34" charset="-122"/>
                 <a:cs typeface="Trebuchet MS" pitchFamily="34" charset="-120"/>
               </a:rPr>
-              <a:t>part</a:t>
+              <a:t>y</a:t>
             </a:r>
             <a:endParaRPr lang="en-US" sz="1300" dirty="0"/>
           </a:p>
@@ -10403,7 +10403,7 @@
                 <a:ea typeface="Calibri" pitchFamily="34" charset="-122"/>
                 <a:cs typeface="Calibri" pitchFamily="34" charset="-120"/>
               </a:rPr>
-              <a:t>piece, share</a:t>
+              <a:t>characterised by</a:t>
             </a:r>
             <a:endParaRPr lang="en-US" sz="850" dirty="0"/>
           </a:p>
@@ -10476,7 +10476,7 @@
                 <a:ea typeface="Trebuchet MS" pitchFamily="34" charset="-122"/>
                 <a:cs typeface="Trebuchet MS" pitchFamily="34" charset="-120"/>
               </a:rPr>
-              <a:t>ial</a:t>
+              <a:t>tion</a:t>
             </a:r>
             <a:endParaRPr lang="en-US" sz="1300" dirty="0"/>
           </a:p>
@@ -10515,7 +10515,7 @@
                 <a:ea typeface="Calibri" pitchFamily="34" charset="-122"/>
                 <a:cs typeface="Calibri" pitchFamily="34" charset="-120"/>
               </a:rPr>
-              <a:t>relating to</a:t>
+              <a:t>act or process of</a:t>
             </a:r>
             <a:endParaRPr lang="en-US" sz="850" dirty="0"/>
           </a:p>
@@ -10674,7 +10674,7 @@
                 <a:ea typeface="Trebuchet MS" pitchFamily="34" charset="-122"/>
                 <a:cs typeface="Trebuchet MS" pitchFamily="34" charset="-120"/>
               </a:rPr>
-              <a:t>im</a:t>
+              <a:t>par</a:t>
             </a:r>
             <a:endParaRPr lang="en-US" sz="1400" dirty="0"/>
           </a:p>
@@ -10779,7 +10779,7 @@
                 <a:ea typeface="Trebuchet MS" pitchFamily="34" charset="-122"/>
                 <a:cs typeface="Trebuchet MS" pitchFamily="34" charset="-120"/>
               </a:rPr>
-              <a:t>par</a:t>
+              <a:t>ti</a:t>
             </a:r>
             <a:endParaRPr lang="en-US" sz="1400" dirty="0"/>
           </a:p>
@@ -10884,7 +10884,7 @@
                 <a:ea typeface="Trebuchet MS" pitchFamily="34" charset="-122"/>
                 <a:cs typeface="Trebuchet MS" pitchFamily="34" charset="-120"/>
               </a:rPr>
-              <a:t>tial</a:t>
+              <a:t>tion</a:t>
             </a:r>
             <a:endParaRPr lang="en-US" sz="1400" dirty="0"/>
           </a:p>
@@ -10965,11 +10965,11 @@
         <p:spPr>
           <a:xfrm>
             <a:off x="1874520" y="4096512"/>
-            <a:ext cx="6903720" cy="804672"/>
+            <a:ext cx="6903720" cy="658368"/>
           </a:xfrm>
           <a:prstGeom prst="rect">
             <a:avLst>
-              <a:gd name="adj" fmla="val 6818"/>
+              <a:gd name="adj" fmla="val 8333"/>
             </a:avLst>
           </a:prstGeom>
           <a:solidFill>
@@ -10992,11 +10992,11 @@
         <p:spPr>
           <a:xfrm>
             <a:off x="2124837" y="4169664"/>
-            <a:ext cx="685800" cy="384048"/>
+            <a:ext cx="685800" cy="475488"/>
           </a:xfrm>
           <a:prstGeom prst="rect">
             <a:avLst>
-              <a:gd name="adj" fmla="val 9524"/>
+              <a:gd name="adj" fmla="val 7692"/>
             </a:avLst>
           </a:prstGeom>
           <a:solidFill>
@@ -11019,7 +11019,7 @@
         <p:spPr>
           <a:xfrm>
             <a:off x="2124837" y="4169664"/>
-            <a:ext cx="685800" cy="384048"/>
+            <a:ext cx="685800" cy="475488"/>
           </a:xfrm>
           <a:prstGeom prst="rect">
             <a:avLst/>
@@ -11043,7 +11043,7 @@
                 <a:ea typeface="Trebuchet MS" pitchFamily="34" charset="-122"/>
                 <a:cs typeface="Trebuchet MS" pitchFamily="34" charset="-120"/>
               </a:rPr>
-              <a:t>i</a:t>
+              <a:t>p</a:t>
             </a:r>
             <a:endParaRPr lang="en-US" sz="900" dirty="0"/>
           </a:p>
@@ -11058,11 +11058,11 @@
         <p:spPr>
           <a:xfrm>
             <a:off x="3033522" y="4169664"/>
-            <a:ext cx="685800" cy="384048"/>
+            <a:ext cx="685800" cy="475488"/>
           </a:xfrm>
           <a:prstGeom prst="rect">
             <a:avLst>
-              <a:gd name="adj" fmla="val 9524"/>
+              <a:gd name="adj" fmla="val 7692"/>
             </a:avLst>
           </a:prstGeom>
           <a:solidFill>
@@ -11085,7 +11085,7 @@
         <p:spPr>
           <a:xfrm>
             <a:off x="3033522" y="4169664"/>
-            <a:ext cx="685800" cy="384048"/>
+            <a:ext cx="685800" cy="475488"/>
           </a:xfrm>
           <a:prstGeom prst="rect">
             <a:avLst/>
@@ -11109,7 +11109,7 @@
                 <a:ea typeface="Trebuchet MS" pitchFamily="34" charset="-122"/>
                 <a:cs typeface="Trebuchet MS" pitchFamily="34" charset="-120"/>
               </a:rPr>
-              <a:t>m</a:t>
+              <a:t>ar</a:t>
             </a:r>
             <a:endParaRPr lang="en-US" sz="900" dirty="0"/>
           </a:p>
@@ -11124,11 +11124,11 @@
         <p:spPr>
           <a:xfrm>
             <a:off x="3942207" y="4169664"/>
-            <a:ext cx="685800" cy="384048"/>
+            <a:ext cx="685800" cy="475488"/>
           </a:xfrm>
           <a:prstGeom prst="rect">
             <a:avLst>
-              <a:gd name="adj" fmla="val 9524"/>
+              <a:gd name="adj" fmla="val 7692"/>
             </a:avLst>
           </a:prstGeom>
           <a:solidFill>
@@ -11151,7 +11151,7 @@
         <p:spPr>
           <a:xfrm>
             <a:off x="3942207" y="4169664"/>
-            <a:ext cx="685800" cy="384048"/>
+            <a:ext cx="685800" cy="475488"/>
           </a:xfrm>
           <a:prstGeom prst="rect">
             <a:avLst/>
@@ -11175,7 +11175,7 @@
                 <a:ea typeface="Trebuchet MS" pitchFamily="34" charset="-122"/>
                 <a:cs typeface="Trebuchet MS" pitchFamily="34" charset="-120"/>
               </a:rPr>
-              <a:t>p</a:t>
+              <a:t>t</a:t>
             </a:r>
             <a:endParaRPr lang="en-US" sz="900" dirty="0"/>
           </a:p>
@@ -11190,11 +11190,11 @@
         <p:spPr>
           <a:xfrm>
             <a:off x="4850892" y="4169664"/>
-            <a:ext cx="685800" cy="384048"/>
+            <a:ext cx="685800" cy="475488"/>
           </a:xfrm>
           <a:prstGeom prst="rect">
             <a:avLst>
-              <a:gd name="adj" fmla="val 9524"/>
+              <a:gd name="adj" fmla="val 7692"/>
             </a:avLst>
           </a:prstGeom>
           <a:solidFill>
@@ -11217,7 +11217,7 @@
         <p:spPr>
           <a:xfrm>
             <a:off x="4850892" y="4169664"/>
-            <a:ext cx="685800" cy="384048"/>
+            <a:ext cx="685800" cy="475488"/>
           </a:xfrm>
           <a:prstGeom prst="rect">
             <a:avLst/>
@@ -11241,7 +11241,7 @@
                 <a:ea typeface="Trebuchet MS" pitchFamily="34" charset="-122"/>
                 <a:cs typeface="Trebuchet MS" pitchFamily="34" charset="-120"/>
               </a:rPr>
-              <a:t>ar</a:t>
+              <a:t>i</a:t>
             </a:r>
             <a:endParaRPr lang="en-US" sz="900" dirty="0"/>
           </a:p>
@@ -11256,11 +11256,11 @@
         <p:spPr>
           <a:xfrm>
             <a:off x="5759577" y="4169664"/>
-            <a:ext cx="685800" cy="384048"/>
+            <a:ext cx="685800" cy="475488"/>
           </a:xfrm>
           <a:prstGeom prst="rect">
             <a:avLst>
-              <a:gd name="adj" fmla="val 9524"/>
+              <a:gd name="adj" fmla="val 7692"/>
             </a:avLst>
           </a:prstGeom>
           <a:solidFill>
@@ -11283,7 +11283,7 @@
         <p:spPr>
           <a:xfrm>
             <a:off x="5759577" y="4169664"/>
-            <a:ext cx="685800" cy="384048"/>
+            <a:ext cx="685800" cy="475488"/>
           </a:xfrm>
           <a:prstGeom prst="rect">
             <a:avLst/>
@@ -11307,7 +11307,7 @@
                 <a:ea typeface="Trebuchet MS" pitchFamily="34" charset="-122"/>
                 <a:cs typeface="Trebuchet MS" pitchFamily="34" charset="-120"/>
               </a:rPr>
-              <a:t>t</a:t>
+              <a:t>ti</a:t>
             </a:r>
             <a:endParaRPr lang="en-US" sz="900" dirty="0"/>
           </a:p>
@@ -11322,11 +11322,11 @@
         <p:spPr>
           <a:xfrm>
             <a:off x="6668262" y="4169664"/>
-            <a:ext cx="685800" cy="384048"/>
+            <a:ext cx="685800" cy="475488"/>
           </a:xfrm>
           <a:prstGeom prst="rect">
             <a:avLst>
-              <a:gd name="adj" fmla="val 9524"/>
+              <a:gd name="adj" fmla="val 7692"/>
             </a:avLst>
           </a:prstGeom>
           <a:solidFill>
@@ -11349,7 +11349,7 @@
         <p:spPr>
           <a:xfrm>
             <a:off x="6668262" y="4169664"/>
-            <a:ext cx="685800" cy="384048"/>
+            <a:ext cx="685800" cy="475488"/>
           </a:xfrm>
           <a:prstGeom prst="rect">
             <a:avLst/>
@@ -11373,7 +11373,7 @@
                 <a:ea typeface="Trebuchet MS" pitchFamily="34" charset="-122"/>
                 <a:cs typeface="Trebuchet MS" pitchFamily="34" charset="-120"/>
               </a:rPr>
-              <a:t>ia</a:t>
+              <a:t>o</a:t>
             </a:r>
             <a:endParaRPr lang="en-US" sz="900" dirty="0"/>
           </a:p>
@@ -11381,57 +11381,18 @@
       </p:sp>
       <p:sp>
         <p:nvSpPr>
-          <p:cNvPr id="51" name="Text 49"/>
-          <p:cNvSpPr/>
-          <p:nvPr/>
-        </p:nvSpPr>
-        <p:spPr>
-          <a:xfrm>
-            <a:off x="6668262" y="4572000"/>
-            <a:ext cx="685800" cy="219456"/>
-          </a:xfrm>
-          <a:prstGeom prst="rect">
-            <a:avLst/>
-          </a:prstGeom>
-          <a:noFill/>
-          <a:ln/>
-        </p:spPr>
-        <p:txBody>
-          <a:bodyPr wrap="square" lIns="0" tIns="0" rIns="0" bIns="0" rtlCol="0" anchor="t"/>
-          <a:lstStyle/>
-          <a:p>
-            <a:pPr algn="ctr" indent="0" marL="0">
-              <a:buNone/>
-            </a:pPr>
-            <a:r>
-              <a:rPr lang="en-US" sz="750" i="1" dirty="0">
-                <a:solidFill>
-                  <a:srgbClr val="94A3B8"/>
-                </a:solidFill>
-                <a:latin typeface="Calibri" pitchFamily="34" charset="0"/>
-                <a:ea typeface="Calibri" pitchFamily="34" charset="-122"/>
-                <a:cs typeface="Calibri" pitchFamily="34" charset="-120"/>
-              </a:rPr>
-              <a:t>/sh/</a:t>
-            </a:r>
-            <a:endParaRPr lang="en-US" sz="750" dirty="0"/>
-          </a:p>
-        </p:txBody>
-      </p:sp>
-      <p:sp>
-        <p:nvSpPr>
-          <p:cNvPr id="52" name="Shape 50"/>
+          <p:cNvPr id="51" name="Shape 49"/>
           <p:cNvSpPr/>
           <p:nvPr/>
         </p:nvSpPr>
         <p:spPr>
           <a:xfrm>
             <a:off x="7576947" y="4169664"/>
-            <a:ext cx="685800" cy="384048"/>
+            <a:ext cx="685800" cy="475488"/>
           </a:xfrm>
           <a:prstGeom prst="rect">
             <a:avLst>
-              <a:gd name="adj" fmla="val 9524"/>
+              <a:gd name="adj" fmla="val 7692"/>
             </a:avLst>
           </a:prstGeom>
           <a:solidFill>
@@ -11447,14 +11408,14 @@
       </p:sp>
       <p:sp>
         <p:nvSpPr>
-          <p:cNvPr id="53" name="Text 51"/>
+          <p:cNvPr id="52" name="Text 50"/>
           <p:cNvSpPr/>
           <p:nvPr/>
         </p:nvSpPr>
         <p:spPr>
           <a:xfrm>
             <a:off x="7576947" y="4169664"/>
-            <a:ext cx="685800" cy="384048"/>
+            <a:ext cx="685800" cy="475488"/>
           </a:xfrm>
           <a:prstGeom prst="rect">
             <a:avLst/>
@@ -11478,7 +11439,7 @@
                 <a:ea typeface="Trebuchet MS" pitchFamily="34" charset="-122"/>
                 <a:cs typeface="Trebuchet MS" pitchFamily="34" charset="-120"/>
               </a:rPr>
-              <a:t>l</a:t>
+              <a:t>n</a:t>
             </a:r>
             <a:endParaRPr lang="en-US" sz="900" dirty="0"/>
           </a:p>
@@ -11770,7 +11731,7 @@
                 <a:ea typeface="Calibri" pitchFamily="34" charset="-122"/>
                 <a:cs typeface="Calibri" pitchFamily="34" charset="-120"/>
               </a:rPr>
-              <a:t>Word Labs  •  wordlabs.app  •  Root: 'part' = piece, share, divide</a:t>
+              <a:t>Word Labs  •  wordlabs.app  •  Root: 'part' = a piece of something; a section</a:t>
             </a:r>
             <a:endParaRPr lang="en-US" sz="800" dirty="0"/>
           </a:p>
@@ -11909,7 +11870,7 @@
                 <a:ea typeface="Trebuchet MS" pitchFamily="34" charset="-122"/>
                 <a:cs typeface="Trebuchet MS" pitchFamily="34" charset="-120"/>
               </a:rPr>
-              <a:t>partners</a:t>
+              <a:t>compartment</a:t>
             </a:r>
             <a:endParaRPr lang="en-US" sz="2800" dirty="0"/>
           </a:p>
@@ -12597,7 +12558,7 @@
                 <a:ea typeface="Calibri" pitchFamily="34" charset="-122"/>
                 <a:cs typeface="Calibri" pitchFamily="34" charset="-120"/>
               </a:rPr>
-              <a:t>Word Labs  •  wordlabs.app  •  Root: 'part' = piece, share, divide</a:t>
+              <a:t>Word Labs  •  wordlabs.app  •  Root: 'part' = a piece of something; a section</a:t>
             </a:r>
             <a:endParaRPr lang="en-US" sz="800" dirty="0"/>
           </a:p>
@@ -12736,7 +12697,7 @@
                 <a:ea typeface="Trebuchet MS" pitchFamily="34" charset="-122"/>
                 <a:cs typeface="Trebuchet MS" pitchFamily="34" charset="-120"/>
               </a:rPr>
-              <a:t>partners</a:t>
+              <a:t>compartment</a:t>
             </a:r>
             <a:endParaRPr lang="en-US" sz="2800" dirty="0"/>
           </a:p>
@@ -12825,11 +12786,11 @@
             </a:avLst>
           </a:prstGeom>
           <a:solidFill>
-            <a:srgbClr val="CCFBF1"/>
+            <a:srgbClr val="DDD6FE"/>
           </a:solidFill>
           <a:ln w="19050">
             <a:solidFill>
-              <a:srgbClr val="0D9488"/>
+              <a:srgbClr val="7C3AED"/>
             </a:solidFill>
             <a:prstDash val="solid"/>
           </a:ln>
@@ -12869,13 +12830,13 @@
             <a:r>
               <a:rPr lang="en-US" sz="1300" b="1" dirty="0">
                 <a:solidFill>
-                  <a:srgbClr val="0F766E"/>
+                  <a:srgbClr val="4C1D95"/>
                 </a:solidFill>
                 <a:latin typeface="Trebuchet MS" pitchFamily="34" charset="0"/>
                 <a:ea typeface="Trebuchet MS" pitchFamily="34" charset="-122"/>
                 <a:cs typeface="Trebuchet MS" pitchFamily="34" charset="-120"/>
               </a:rPr>
-              <a:t>part</a:t>
+              <a:t>con</a:t>
             </a:r>
             <a:endParaRPr lang="en-US" sz="1300" dirty="0"/>
           </a:p>
@@ -12914,7 +12875,7 @@
                 <a:ea typeface="Calibri" pitchFamily="34" charset="-122"/>
                 <a:cs typeface="Calibri" pitchFamily="34" charset="-120"/>
               </a:rPr>
-              <a:t>piece, share</a:t>
+              <a:t>with or together</a:t>
             </a:r>
             <a:endParaRPr lang="en-US" sz="850" dirty="0"/>
           </a:p>
@@ -12937,11 +12898,11 @@
             </a:avLst>
           </a:prstGeom>
           <a:solidFill>
-            <a:srgbClr val="FCE7F3"/>
+            <a:srgbClr val="CCFBF1"/>
           </a:solidFill>
           <a:ln w="19050">
             <a:solidFill>
-              <a:srgbClr val="DB2777"/>
+              <a:srgbClr val="0D9488"/>
             </a:solidFill>
             <a:prstDash val="solid"/>
           </a:ln>
@@ -12981,13 +12942,13 @@
             <a:r>
               <a:rPr lang="en-US" sz="1300" b="1" dirty="0">
                 <a:solidFill>
-                  <a:srgbClr val="9D174D"/>
+                  <a:srgbClr val="0F766E"/>
                 </a:solidFill>
                 <a:latin typeface="Trebuchet MS" pitchFamily="34" charset="0"/>
                 <a:ea typeface="Trebuchet MS" pitchFamily="34" charset="-122"/>
                 <a:cs typeface="Trebuchet MS" pitchFamily="34" charset="-120"/>
               </a:rPr>
-              <a:t>ner</a:t>
+              <a:t>part</a:t>
             </a:r>
             <a:endParaRPr lang="en-US" sz="1300" dirty="0"/>
           </a:p>
@@ -13026,7 +12987,7 @@
                 <a:ea typeface="Calibri" pitchFamily="34" charset="-122"/>
                 <a:cs typeface="Calibri" pitchFamily="34" charset="-120"/>
               </a:rPr>
-              <a:t>one who shares</a:t>
+              <a:t>a piece of something; a section</a:t>
             </a:r>
             <a:endParaRPr lang="en-US" sz="850" dirty="0"/>
           </a:p>
@@ -13099,7 +13060,7 @@
                 <a:ea typeface="Trebuchet MS" pitchFamily="34" charset="-122"/>
                 <a:cs typeface="Trebuchet MS" pitchFamily="34" charset="-120"/>
               </a:rPr>
-              <a:t>s</a:t>
+              <a:t>ment</a:t>
             </a:r>
             <a:endParaRPr lang="en-US" sz="1300" dirty="0"/>
           </a:p>
@@ -13138,7 +13099,7 @@
                 <a:ea typeface="Calibri" pitchFamily="34" charset="-122"/>
                 <a:cs typeface="Calibri" pitchFamily="34" charset="-120"/>
               </a:rPr>
-              <a:t>more than one</a:t>
+              <a:t>result of action</a:t>
             </a:r>
             <a:endParaRPr lang="en-US" sz="850" dirty="0"/>
           </a:p>
@@ -13694,7 +13655,7 @@
                 <a:ea typeface="Calibri" pitchFamily="34" charset="-122"/>
                 <a:cs typeface="Calibri" pitchFamily="34" charset="-120"/>
               </a:rPr>
-              <a:t>Word Labs  •  wordlabs.app  •  Root: 'part' = piece, share, divide</a:t>
+              <a:t>Word Labs  •  wordlabs.app  •  Root: 'part' = a piece of something; a section</a:t>
             </a:r>
             <a:endParaRPr lang="en-US" sz="800" dirty="0"/>
           </a:p>
@@ -13833,7 +13794,7 @@
                 <a:ea typeface="Trebuchet MS" pitchFamily="34" charset="-122"/>
                 <a:cs typeface="Trebuchet MS" pitchFamily="34" charset="-120"/>
               </a:rPr>
-              <a:t>partners</a:t>
+              <a:t>compartment</a:t>
             </a:r>
             <a:endParaRPr lang="en-US" sz="2800" dirty="0"/>
           </a:p>
@@ -13922,11 +13883,11 @@
             </a:avLst>
           </a:prstGeom>
           <a:solidFill>
-            <a:srgbClr val="CCFBF1"/>
+            <a:srgbClr val="DDD6FE"/>
           </a:solidFill>
           <a:ln w="19050">
             <a:solidFill>
-              <a:srgbClr val="0D9488"/>
+              <a:srgbClr val="7C3AED"/>
             </a:solidFill>
             <a:prstDash val="solid"/>
           </a:ln>
@@ -13966,13 +13927,13 @@
             <a:r>
               <a:rPr lang="en-US" sz="1300" b="1" dirty="0">
                 <a:solidFill>
-                  <a:srgbClr val="0F766E"/>
+                  <a:srgbClr val="4C1D95"/>
                 </a:solidFill>
                 <a:latin typeface="Trebuchet MS" pitchFamily="34" charset="0"/>
                 <a:ea typeface="Trebuchet MS" pitchFamily="34" charset="-122"/>
                 <a:cs typeface="Trebuchet MS" pitchFamily="34" charset="-120"/>
               </a:rPr>
-              <a:t>part</a:t>
+              <a:t>con</a:t>
             </a:r>
             <a:endParaRPr lang="en-US" sz="1300" dirty="0"/>
           </a:p>
@@ -14011,7 +13972,7 @@
                 <a:ea typeface="Calibri" pitchFamily="34" charset="-122"/>
                 <a:cs typeface="Calibri" pitchFamily="34" charset="-120"/>
               </a:rPr>
-              <a:t>piece, share</a:t>
+              <a:t>with or together</a:t>
             </a:r>
             <a:endParaRPr lang="en-US" sz="850" dirty="0"/>
           </a:p>
@@ -14034,11 +13995,11 @@
             </a:avLst>
           </a:prstGeom>
           <a:solidFill>
-            <a:srgbClr val="FCE7F3"/>
+            <a:srgbClr val="CCFBF1"/>
           </a:solidFill>
           <a:ln w="19050">
             <a:solidFill>
-              <a:srgbClr val="DB2777"/>
+              <a:srgbClr val="0D9488"/>
             </a:solidFill>
             <a:prstDash val="solid"/>
           </a:ln>
@@ -14078,13 +14039,13 @@
             <a:r>
               <a:rPr lang="en-US" sz="1300" b="1" dirty="0">
                 <a:solidFill>
-                  <a:srgbClr val="9D174D"/>
+                  <a:srgbClr val="0F766E"/>
                 </a:solidFill>
                 <a:latin typeface="Trebuchet MS" pitchFamily="34" charset="0"/>
                 <a:ea typeface="Trebuchet MS" pitchFamily="34" charset="-122"/>
                 <a:cs typeface="Trebuchet MS" pitchFamily="34" charset="-120"/>
               </a:rPr>
-              <a:t>ner</a:t>
+              <a:t>part</a:t>
             </a:r>
             <a:endParaRPr lang="en-US" sz="1300" dirty="0"/>
           </a:p>
@@ -14123,7 +14084,7 @@
                 <a:ea typeface="Calibri" pitchFamily="34" charset="-122"/>
                 <a:cs typeface="Calibri" pitchFamily="34" charset="-120"/>
               </a:rPr>
-              <a:t>one who shares</a:t>
+              <a:t>a piece of something; a section</a:t>
             </a:r>
             <a:endParaRPr lang="en-US" sz="850" dirty="0"/>
           </a:p>
@@ -14196,7 +14157,7 @@
                 <a:ea typeface="Trebuchet MS" pitchFamily="34" charset="-122"/>
                 <a:cs typeface="Trebuchet MS" pitchFamily="34" charset="-120"/>
               </a:rPr>
-              <a:t>s</a:t>
+              <a:t>ment</a:t>
             </a:r>
             <a:endParaRPr lang="en-US" sz="1300" dirty="0"/>
           </a:p>
@@ -14235,7 +14196,7 @@
                 <a:ea typeface="Calibri" pitchFamily="34" charset="-122"/>
                 <a:cs typeface="Calibri" pitchFamily="34" charset="-120"/>
               </a:rPr>
-              <a:t>more than one</a:t>
+              <a:t>result of action</a:t>
             </a:r>
             <a:endParaRPr lang="en-US" sz="850" dirty="0"/>
           </a:p>
@@ -14342,7 +14303,7 @@
         </p:nvSpPr>
         <p:spPr>
           <a:xfrm>
-            <a:off x="2999232" y="3364992"/>
+            <a:off x="2313432" y="3364992"/>
             <a:ext cx="1645920" cy="475488"/>
           </a:xfrm>
           <a:prstGeom prst="rect">
@@ -14369,7 +14330,7 @@
         </p:nvSpPr>
         <p:spPr>
           <a:xfrm>
-            <a:off x="2999232" y="3364992"/>
+            <a:off x="2313432" y="3364992"/>
             <a:ext cx="1645920" cy="475488"/>
           </a:xfrm>
           <a:prstGeom prst="rect">
@@ -14394,7 +14355,7 @@
                 <a:ea typeface="Trebuchet MS" pitchFamily="34" charset="-122"/>
                 <a:cs typeface="Trebuchet MS" pitchFamily="34" charset="-120"/>
               </a:rPr>
-              <a:t>part</a:t>
+              <a:t>com</a:t>
             </a:r>
             <a:endParaRPr lang="en-US" sz="1400" dirty="0"/>
           </a:p>
@@ -14408,8 +14369,8 @@
         </p:nvSpPr>
         <p:spPr>
           <a:xfrm>
-            <a:off x="4645152" y="3364992"/>
-            <a:ext cx="1097280" cy="475488"/>
+            <a:off x="3959352" y="3364992"/>
+            <a:ext cx="411480" cy="475488"/>
           </a:xfrm>
           <a:prstGeom prst="rect">
             <a:avLst/>
@@ -14447,7 +14408,7 @@
         </p:nvSpPr>
         <p:spPr>
           <a:xfrm>
-            <a:off x="5742432" y="3364992"/>
+            <a:off x="4370832" y="3364992"/>
             <a:ext cx="1645920" cy="475488"/>
           </a:xfrm>
           <a:prstGeom prst="rect">
@@ -14474,7 +14435,7 @@
         </p:nvSpPr>
         <p:spPr>
           <a:xfrm>
-            <a:off x="5742432" y="3364992"/>
+            <a:off x="4370832" y="3364992"/>
             <a:ext cx="1645920" cy="475488"/>
           </a:xfrm>
           <a:prstGeom prst="rect">
@@ -14499,7 +14460,7 @@
                 <a:ea typeface="Trebuchet MS" pitchFamily="34" charset="-122"/>
                 <a:cs typeface="Trebuchet MS" pitchFamily="34" charset="-120"/>
               </a:rPr>
-              <a:t>ners</a:t>
+              <a:t>part</a:t>
             </a:r>
             <a:endParaRPr lang="en-US" sz="1400" dirty="0"/>
           </a:p>
@@ -14507,7 +14468,112 @@
       </p:sp>
       <p:sp>
         <p:nvSpPr>
-          <p:cNvPr id="33" name="Shape 31"/>
+          <p:cNvPr id="33" name="Text 31"/>
+          <p:cNvSpPr/>
+          <p:nvPr/>
+        </p:nvSpPr>
+        <p:spPr>
+          <a:xfrm>
+            <a:off x="6016752" y="3364992"/>
+            <a:ext cx="411480" cy="475488"/>
+          </a:xfrm>
+          <a:prstGeom prst="rect">
+            <a:avLst/>
+          </a:prstGeom>
+          <a:noFill/>
+          <a:ln/>
+        </p:spPr>
+        <p:txBody>
+          <a:bodyPr wrap="square" lIns="0" tIns="0" rIns="0" bIns="0" rtlCol="0" anchor="ctr"/>
+          <a:lstStyle/>
+          <a:p>
+            <a:pPr algn="ctr" indent="0" marL="0">
+              <a:buNone/>
+            </a:pPr>
+            <a:r>
+              <a:rPr lang="en-US" sz="1600" b="1" dirty="0">
+                <a:solidFill>
+                  <a:srgbClr val="0D9488"/>
+                </a:solidFill>
+                <a:latin typeface="Trebuchet MS" pitchFamily="34" charset="0"/>
+                <a:ea typeface="Trebuchet MS" pitchFamily="34" charset="-122"/>
+                <a:cs typeface="Trebuchet MS" pitchFamily="34" charset="-120"/>
+              </a:rPr>
+              <a:t>·</a:t>
+            </a:r>
+            <a:endParaRPr lang="en-US" sz="1600" dirty="0"/>
+          </a:p>
+        </p:txBody>
+      </p:sp>
+      <p:sp>
+        <p:nvSpPr>
+          <p:cNvPr id="34" name="Shape 32"/>
+          <p:cNvSpPr/>
+          <p:nvPr/>
+        </p:nvSpPr>
+        <p:spPr>
+          <a:xfrm>
+            <a:off x="6428232" y="3364992"/>
+            <a:ext cx="1645920" cy="475488"/>
+          </a:xfrm>
+          <a:prstGeom prst="rect">
+            <a:avLst>
+              <a:gd name="adj" fmla="val 9615"/>
+            </a:avLst>
+          </a:prstGeom>
+          <a:solidFill>
+            <a:srgbClr val="FFFFFF"/>
+          </a:solidFill>
+          <a:ln w="12700">
+            <a:solidFill>
+              <a:srgbClr val="0D9488"/>
+            </a:solidFill>
+            <a:prstDash val="solid"/>
+          </a:ln>
+        </p:spPr>
+      </p:sp>
+      <p:sp>
+        <p:nvSpPr>
+          <p:cNvPr id="35" name="Text 33"/>
+          <p:cNvSpPr/>
+          <p:nvPr/>
+        </p:nvSpPr>
+        <p:spPr>
+          <a:xfrm>
+            <a:off x="6428232" y="3364992"/>
+            <a:ext cx="1645920" cy="475488"/>
+          </a:xfrm>
+          <a:prstGeom prst="rect">
+            <a:avLst/>
+          </a:prstGeom>
+          <a:noFill/>
+          <a:ln/>
+        </p:spPr>
+        <p:txBody>
+          <a:bodyPr wrap="square" lIns="0" tIns="0" rIns="0" bIns="0" rtlCol="0" anchor="ctr"/>
+          <a:lstStyle/>
+          <a:p>
+            <a:pPr algn="ctr" indent="0" marL="0">
+              <a:buNone/>
+            </a:pPr>
+            <a:r>
+              <a:rPr lang="en-US" sz="1400" b="1" dirty="0">
+                <a:solidFill>
+                  <a:srgbClr val="0D9488"/>
+                </a:solidFill>
+                <a:latin typeface="Trebuchet MS" pitchFamily="34" charset="0"/>
+                <a:ea typeface="Trebuchet MS" pitchFamily="34" charset="-122"/>
+                <a:cs typeface="Trebuchet MS" pitchFamily="34" charset="-120"/>
+              </a:rPr>
+              <a:t>ment</a:t>
+            </a:r>
+            <a:endParaRPr lang="en-US" sz="1400" dirty="0"/>
+          </a:p>
+        </p:txBody>
+      </p:sp>
+      <p:sp>
+        <p:nvSpPr>
+          <p:cNvPr id="36" name="Shape 34"/>
           <p:cNvSpPr/>
           <p:nvPr/>
         </p:nvSpPr>
@@ -14534,7 +14600,7 @@
       </p:sp>
       <p:sp>
         <p:nvSpPr>
-          <p:cNvPr id="34" name="Text 32"/>
+          <p:cNvPr id="37" name="Text 35"/>
           <p:cNvSpPr/>
           <p:nvPr/>
         </p:nvSpPr>
@@ -14573,7 +14639,7 @@
       </p:sp>
       <p:sp>
         <p:nvSpPr>
-          <p:cNvPr id="35" name="Shape 33"/>
+          <p:cNvPr id="38" name="Shape 36"/>
           <p:cNvSpPr/>
           <p:nvPr/>
         </p:nvSpPr>
@@ -14600,7 +14666,7 @@
       </p:sp>
       <p:sp>
         <p:nvSpPr>
-          <p:cNvPr id="36" name="Text 34"/>
+          <p:cNvPr id="39" name="Text 37"/>
           <p:cNvSpPr/>
           <p:nvPr/>
         </p:nvSpPr>
@@ -14832,7 +14898,7 @@
                 <a:ea typeface="Calibri" pitchFamily="34" charset="-122"/>
                 <a:cs typeface="Calibri" pitchFamily="34" charset="-120"/>
               </a:rPr>
-              <a:t>Root 'part' — piece, share, divide</a:t>
+              <a:t>Root 'part' — a piece of something; a section</a:t>
             </a:r>
             <a:endParaRPr lang="en-US" sz="1600" dirty="0"/>
           </a:p>
@@ -15188,7 +15254,7 @@
                 <a:ea typeface="Calibri" pitchFamily="34" charset="-122"/>
                 <a:cs typeface="Calibri" pitchFamily="34" charset="-120"/>
               </a:rPr>
-              <a:t>Word Labs  •  wordlabs.app  •  Root: 'part' = piece, share, divide</a:t>
+              <a:t>Word Labs  •  wordlabs.app  •  Root: 'part' = a piece of something; a section</a:t>
             </a:r>
             <a:endParaRPr lang="en-US" sz="800" dirty="0"/>
           </a:p>
@@ -15327,7 +15393,7 @@
                 <a:ea typeface="Trebuchet MS" pitchFamily="34" charset="-122"/>
                 <a:cs typeface="Trebuchet MS" pitchFamily="34" charset="-120"/>
               </a:rPr>
-              <a:t>partners</a:t>
+              <a:t>compartment</a:t>
             </a:r>
             <a:endParaRPr lang="en-US" sz="2800" dirty="0"/>
           </a:p>
@@ -15416,11 +15482,11 @@
             </a:avLst>
           </a:prstGeom>
           <a:solidFill>
-            <a:srgbClr val="CCFBF1"/>
+            <a:srgbClr val="DDD6FE"/>
           </a:solidFill>
           <a:ln w="19050">
             <a:solidFill>
-              <a:srgbClr val="0D9488"/>
+              <a:srgbClr val="7C3AED"/>
             </a:solidFill>
             <a:prstDash val="solid"/>
           </a:ln>
@@ -15460,13 +15526,13 @@
             <a:r>
               <a:rPr lang="en-US" sz="1300" b="1" dirty="0">
                 <a:solidFill>
-                  <a:srgbClr val="0F766E"/>
+                  <a:srgbClr val="4C1D95"/>
                 </a:solidFill>
                 <a:latin typeface="Trebuchet MS" pitchFamily="34" charset="0"/>
                 <a:ea typeface="Trebuchet MS" pitchFamily="34" charset="-122"/>
                 <a:cs typeface="Trebuchet MS" pitchFamily="34" charset="-120"/>
               </a:rPr>
-              <a:t>part</a:t>
+              <a:t>con</a:t>
             </a:r>
             <a:endParaRPr lang="en-US" sz="1300" dirty="0"/>
           </a:p>
@@ -15505,7 +15571,7 @@
                 <a:ea typeface="Calibri" pitchFamily="34" charset="-122"/>
                 <a:cs typeface="Calibri" pitchFamily="34" charset="-120"/>
               </a:rPr>
-              <a:t>piece, share</a:t>
+              <a:t>with or together</a:t>
             </a:r>
             <a:endParaRPr lang="en-US" sz="850" dirty="0"/>
           </a:p>
@@ -15528,11 +15594,11 @@
             </a:avLst>
           </a:prstGeom>
           <a:solidFill>
-            <a:srgbClr val="FCE7F3"/>
+            <a:srgbClr val="CCFBF1"/>
           </a:solidFill>
           <a:ln w="19050">
             <a:solidFill>
-              <a:srgbClr val="DB2777"/>
+              <a:srgbClr val="0D9488"/>
             </a:solidFill>
             <a:prstDash val="solid"/>
           </a:ln>
@@ -15572,13 +15638,13 @@
             <a:r>
               <a:rPr lang="en-US" sz="1300" b="1" dirty="0">
                 <a:solidFill>
-                  <a:srgbClr val="9D174D"/>
+                  <a:srgbClr val="0F766E"/>
                 </a:solidFill>
                 <a:latin typeface="Trebuchet MS" pitchFamily="34" charset="0"/>
                 <a:ea typeface="Trebuchet MS" pitchFamily="34" charset="-122"/>
                 <a:cs typeface="Trebuchet MS" pitchFamily="34" charset="-120"/>
               </a:rPr>
-              <a:t>ner</a:t>
+              <a:t>part</a:t>
             </a:r>
             <a:endParaRPr lang="en-US" sz="1300" dirty="0"/>
           </a:p>
@@ -15617,7 +15683,7 @@
                 <a:ea typeface="Calibri" pitchFamily="34" charset="-122"/>
                 <a:cs typeface="Calibri" pitchFamily="34" charset="-120"/>
               </a:rPr>
-              <a:t>one who shares</a:t>
+              <a:t>a piece of something; a section</a:t>
             </a:r>
             <a:endParaRPr lang="en-US" sz="850" dirty="0"/>
           </a:p>
@@ -15690,7 +15756,7 @@
                 <a:ea typeface="Trebuchet MS" pitchFamily="34" charset="-122"/>
                 <a:cs typeface="Trebuchet MS" pitchFamily="34" charset="-120"/>
               </a:rPr>
-              <a:t>s</a:t>
+              <a:t>ment</a:t>
             </a:r>
             <a:endParaRPr lang="en-US" sz="1300" dirty="0"/>
           </a:p>
@@ -15729,7 +15795,7 @@
                 <a:ea typeface="Calibri" pitchFamily="34" charset="-122"/>
                 <a:cs typeface="Calibri" pitchFamily="34" charset="-120"/>
               </a:rPr>
-              <a:t>more than one</a:t>
+              <a:t>result of action</a:t>
             </a:r>
             <a:endParaRPr lang="en-US" sz="850" dirty="0"/>
           </a:p>
@@ -15836,7 +15902,7 @@
         </p:nvSpPr>
         <p:spPr>
           <a:xfrm>
-            <a:off x="2999232" y="3364992"/>
+            <a:off x="2313432" y="3364992"/>
             <a:ext cx="1645920" cy="475488"/>
           </a:xfrm>
           <a:prstGeom prst="rect">
@@ -15863,7 +15929,7 @@
         </p:nvSpPr>
         <p:spPr>
           <a:xfrm>
-            <a:off x="2999232" y="3364992"/>
+            <a:off x="2313432" y="3364992"/>
             <a:ext cx="1645920" cy="475488"/>
           </a:xfrm>
           <a:prstGeom prst="rect">
@@ -15888,7 +15954,7 @@
                 <a:ea typeface="Trebuchet MS" pitchFamily="34" charset="-122"/>
                 <a:cs typeface="Trebuchet MS" pitchFamily="34" charset="-120"/>
               </a:rPr>
-              <a:t>part</a:t>
+              <a:t>com</a:t>
             </a:r>
             <a:endParaRPr lang="en-US" sz="1400" dirty="0"/>
           </a:p>
@@ -15902,8 +15968,8 @@
         </p:nvSpPr>
         <p:spPr>
           <a:xfrm>
-            <a:off x="4645152" y="3364992"/>
-            <a:ext cx="1097280" cy="475488"/>
+            <a:off x="3959352" y="3364992"/>
+            <a:ext cx="411480" cy="475488"/>
           </a:xfrm>
           <a:prstGeom prst="rect">
             <a:avLst/>
@@ -15941,7 +16007,7 @@
         </p:nvSpPr>
         <p:spPr>
           <a:xfrm>
-            <a:off x="5742432" y="3364992"/>
+            <a:off x="4370832" y="3364992"/>
             <a:ext cx="1645920" cy="475488"/>
           </a:xfrm>
           <a:prstGeom prst="rect">
@@ -15968,7 +16034,7 @@
         </p:nvSpPr>
         <p:spPr>
           <a:xfrm>
-            <a:off x="5742432" y="3364992"/>
+            <a:off x="4370832" y="3364992"/>
             <a:ext cx="1645920" cy="475488"/>
           </a:xfrm>
           <a:prstGeom prst="rect">
@@ -15993,7 +16059,7 @@
                 <a:ea typeface="Trebuchet MS" pitchFamily="34" charset="-122"/>
                 <a:cs typeface="Trebuchet MS" pitchFamily="34" charset="-120"/>
               </a:rPr>
-              <a:t>ners</a:t>
+              <a:t>part</a:t>
             </a:r>
             <a:endParaRPr lang="en-US" sz="1400" dirty="0"/>
           </a:p>
@@ -16001,7 +16067,112 @@
       </p:sp>
       <p:sp>
         <p:nvSpPr>
-          <p:cNvPr id="33" name="Shape 31"/>
+          <p:cNvPr id="33" name="Text 31"/>
+          <p:cNvSpPr/>
+          <p:nvPr/>
+        </p:nvSpPr>
+        <p:spPr>
+          <a:xfrm>
+            <a:off x="6016752" y="3364992"/>
+            <a:ext cx="411480" cy="475488"/>
+          </a:xfrm>
+          <a:prstGeom prst="rect">
+            <a:avLst/>
+          </a:prstGeom>
+          <a:noFill/>
+          <a:ln/>
+        </p:spPr>
+        <p:txBody>
+          <a:bodyPr wrap="square" lIns="0" tIns="0" rIns="0" bIns="0" rtlCol="0" anchor="ctr"/>
+          <a:lstStyle/>
+          <a:p>
+            <a:pPr algn="ctr" indent="0" marL="0">
+              <a:buNone/>
+            </a:pPr>
+            <a:r>
+              <a:rPr lang="en-US" sz="1600" b="1" dirty="0">
+                <a:solidFill>
+                  <a:srgbClr val="0D9488"/>
+                </a:solidFill>
+                <a:latin typeface="Trebuchet MS" pitchFamily="34" charset="0"/>
+                <a:ea typeface="Trebuchet MS" pitchFamily="34" charset="-122"/>
+                <a:cs typeface="Trebuchet MS" pitchFamily="34" charset="-120"/>
+              </a:rPr>
+              <a:t>·</a:t>
+            </a:r>
+            <a:endParaRPr lang="en-US" sz="1600" dirty="0"/>
+          </a:p>
+        </p:txBody>
+      </p:sp>
+      <p:sp>
+        <p:nvSpPr>
+          <p:cNvPr id="34" name="Shape 32"/>
+          <p:cNvSpPr/>
+          <p:nvPr/>
+        </p:nvSpPr>
+        <p:spPr>
+          <a:xfrm>
+            <a:off x="6428232" y="3364992"/>
+            <a:ext cx="1645920" cy="475488"/>
+          </a:xfrm>
+          <a:prstGeom prst="rect">
+            <a:avLst>
+              <a:gd name="adj" fmla="val 9615"/>
+            </a:avLst>
+          </a:prstGeom>
+          <a:solidFill>
+            <a:srgbClr val="FFFFFF"/>
+          </a:solidFill>
+          <a:ln w="12700">
+            <a:solidFill>
+              <a:srgbClr val="0D9488"/>
+            </a:solidFill>
+            <a:prstDash val="solid"/>
+          </a:ln>
+        </p:spPr>
+      </p:sp>
+      <p:sp>
+        <p:nvSpPr>
+          <p:cNvPr id="35" name="Text 33"/>
+          <p:cNvSpPr/>
+          <p:nvPr/>
+        </p:nvSpPr>
+        <p:spPr>
+          <a:xfrm>
+            <a:off x="6428232" y="3364992"/>
+            <a:ext cx="1645920" cy="475488"/>
+          </a:xfrm>
+          <a:prstGeom prst="rect">
+            <a:avLst/>
+          </a:prstGeom>
+          <a:noFill/>
+          <a:ln/>
+        </p:spPr>
+        <p:txBody>
+          <a:bodyPr wrap="square" lIns="0" tIns="0" rIns="0" bIns="0" rtlCol="0" anchor="ctr"/>
+          <a:lstStyle/>
+          <a:p>
+            <a:pPr algn="ctr" indent="0" marL="0">
+              <a:buNone/>
+            </a:pPr>
+            <a:r>
+              <a:rPr lang="en-US" sz="1400" b="1" dirty="0">
+                <a:solidFill>
+                  <a:srgbClr val="0D9488"/>
+                </a:solidFill>
+                <a:latin typeface="Trebuchet MS" pitchFamily="34" charset="0"/>
+                <a:ea typeface="Trebuchet MS" pitchFamily="34" charset="-122"/>
+                <a:cs typeface="Trebuchet MS" pitchFamily="34" charset="-120"/>
+              </a:rPr>
+              <a:t>ment</a:t>
+            </a:r>
+            <a:endParaRPr lang="en-US" sz="1400" dirty="0"/>
+          </a:p>
+        </p:txBody>
+      </p:sp>
+      <p:sp>
+        <p:nvSpPr>
+          <p:cNvPr id="36" name="Shape 34"/>
           <p:cNvSpPr/>
           <p:nvPr/>
         </p:nvSpPr>
@@ -16028,7 +16199,7 @@
       </p:sp>
       <p:sp>
         <p:nvSpPr>
-          <p:cNvPr id="34" name="Text 32"/>
+          <p:cNvPr id="37" name="Text 35"/>
           <p:cNvSpPr/>
           <p:nvPr/>
         </p:nvSpPr>
@@ -16067,7 +16238,7 @@
       </p:sp>
       <p:sp>
         <p:nvSpPr>
-          <p:cNvPr id="35" name="Shape 33"/>
+          <p:cNvPr id="38" name="Shape 36"/>
           <p:cNvSpPr/>
           <p:nvPr/>
         </p:nvSpPr>
@@ -16094,14 +16265,14 @@
       </p:sp>
       <p:sp>
         <p:nvSpPr>
-          <p:cNvPr id="36" name="Shape 34"/>
-          <p:cNvSpPr/>
-          <p:nvPr/>
-        </p:nvSpPr>
-        <p:spPr>
-          <a:xfrm>
-            <a:off x="2254649" y="4169664"/>
-            <a:ext cx="685800" cy="475488"/>
+          <p:cNvPr id="39" name="Shape 37"/>
+          <p:cNvSpPr/>
+          <p:nvPr/>
+        </p:nvSpPr>
+        <p:spPr>
+          <a:xfrm>
+            <a:off x="1951828" y="4169664"/>
+            <a:ext cx="603504" cy="475488"/>
           </a:xfrm>
           <a:prstGeom prst="rect">
             <a:avLst>
@@ -16121,14 +16292,14 @@
       </p:sp>
       <p:sp>
         <p:nvSpPr>
-          <p:cNvPr id="37" name="Text 35"/>
-          <p:cNvSpPr/>
-          <p:nvPr/>
-        </p:nvSpPr>
-        <p:spPr>
-          <a:xfrm>
-            <a:off x="2254649" y="4169664"/>
-            <a:ext cx="685800" cy="475488"/>
+          <p:cNvPr id="40" name="Text 38"/>
+          <p:cNvSpPr/>
+          <p:nvPr/>
+        </p:nvSpPr>
+        <p:spPr>
+          <a:xfrm>
+            <a:off x="1951828" y="4169664"/>
+            <a:ext cx="603504" cy="475488"/>
           </a:xfrm>
           <a:prstGeom prst="rect">
             <a:avLst/>
@@ -16152,7 +16323,7 @@
                 <a:ea typeface="Trebuchet MS" pitchFamily="34" charset="-122"/>
                 <a:cs typeface="Trebuchet MS" pitchFamily="34" charset="-120"/>
               </a:rPr>
-              <a:t>p</a:t>
+              <a:t>c</a:t>
             </a:r>
             <a:endParaRPr lang="en-US" sz="900" dirty="0"/>
           </a:p>
@@ -16160,14 +16331,14 @@
       </p:sp>
       <p:sp>
         <p:nvSpPr>
-          <p:cNvPr id="38" name="Shape 36"/>
-          <p:cNvSpPr/>
-          <p:nvPr/>
-        </p:nvSpPr>
-        <p:spPr>
-          <a:xfrm>
-            <a:off x="3293146" y="4169664"/>
-            <a:ext cx="685800" cy="475488"/>
+          <p:cNvPr id="41" name="Shape 39"/>
+          <p:cNvSpPr/>
+          <p:nvPr/>
+        </p:nvSpPr>
+        <p:spPr>
+          <a:xfrm>
+            <a:off x="2605209" y="4169664"/>
+            <a:ext cx="603504" cy="475488"/>
           </a:xfrm>
           <a:prstGeom prst="rect">
             <a:avLst>
@@ -16187,14 +16358,14 @@
       </p:sp>
       <p:sp>
         <p:nvSpPr>
-          <p:cNvPr id="39" name="Text 37"/>
-          <p:cNvSpPr/>
-          <p:nvPr/>
-        </p:nvSpPr>
-        <p:spPr>
-          <a:xfrm>
-            <a:off x="3293146" y="4169664"/>
-            <a:ext cx="685800" cy="475488"/>
+          <p:cNvPr id="42" name="Text 40"/>
+          <p:cNvSpPr/>
+          <p:nvPr/>
+        </p:nvSpPr>
+        <p:spPr>
+          <a:xfrm>
+            <a:off x="2605209" y="4169664"/>
+            <a:ext cx="603504" cy="475488"/>
           </a:xfrm>
           <a:prstGeom prst="rect">
             <a:avLst/>
@@ -16218,7 +16389,7 @@
                 <a:ea typeface="Trebuchet MS" pitchFamily="34" charset="-122"/>
                 <a:cs typeface="Trebuchet MS" pitchFamily="34" charset="-120"/>
               </a:rPr>
-              <a:t>ar</a:t>
+              <a:t>o</a:t>
             </a:r>
             <a:endParaRPr lang="en-US" sz="900" dirty="0"/>
           </a:p>
@@ -16226,14 +16397,14 @@
       </p:sp>
       <p:sp>
         <p:nvSpPr>
-          <p:cNvPr id="40" name="Shape 38"/>
-          <p:cNvSpPr/>
-          <p:nvPr/>
-        </p:nvSpPr>
-        <p:spPr>
-          <a:xfrm>
-            <a:off x="4331643" y="4169664"/>
-            <a:ext cx="685800" cy="475488"/>
+          <p:cNvPr id="43" name="Shape 41"/>
+          <p:cNvSpPr/>
+          <p:nvPr/>
+        </p:nvSpPr>
+        <p:spPr>
+          <a:xfrm>
+            <a:off x="3258589" y="4169664"/>
+            <a:ext cx="603504" cy="475488"/>
           </a:xfrm>
           <a:prstGeom prst="rect">
             <a:avLst>
@@ -16253,14 +16424,14 @@
       </p:sp>
       <p:sp>
         <p:nvSpPr>
-          <p:cNvPr id="41" name="Text 39"/>
-          <p:cNvSpPr/>
-          <p:nvPr/>
-        </p:nvSpPr>
-        <p:spPr>
-          <a:xfrm>
-            <a:off x="4331643" y="4169664"/>
-            <a:ext cx="685800" cy="475488"/>
+          <p:cNvPr id="44" name="Text 42"/>
+          <p:cNvSpPr/>
+          <p:nvPr/>
+        </p:nvSpPr>
+        <p:spPr>
+          <a:xfrm>
+            <a:off x="3258589" y="4169664"/>
+            <a:ext cx="603504" cy="475488"/>
           </a:xfrm>
           <a:prstGeom prst="rect">
             <a:avLst/>
@@ -16284,7 +16455,7 @@
                 <a:ea typeface="Trebuchet MS" pitchFamily="34" charset="-122"/>
                 <a:cs typeface="Trebuchet MS" pitchFamily="34" charset="-120"/>
               </a:rPr>
-              <a:t>t</a:t>
+              <a:t>m</a:t>
             </a:r>
             <a:endParaRPr lang="en-US" sz="900" dirty="0"/>
           </a:p>
@@ -16292,14 +16463,14 @@
       </p:sp>
       <p:sp>
         <p:nvSpPr>
-          <p:cNvPr id="42" name="Shape 40"/>
-          <p:cNvSpPr/>
-          <p:nvPr/>
-        </p:nvSpPr>
-        <p:spPr>
-          <a:xfrm>
-            <a:off x="5370141" y="4169664"/>
-            <a:ext cx="685800" cy="475488"/>
+          <p:cNvPr id="45" name="Shape 43"/>
+          <p:cNvSpPr/>
+          <p:nvPr/>
+        </p:nvSpPr>
+        <p:spPr>
+          <a:xfrm>
+            <a:off x="3911969" y="4169664"/>
+            <a:ext cx="603504" cy="475488"/>
           </a:xfrm>
           <a:prstGeom prst="rect">
             <a:avLst>
@@ -16319,14 +16490,14 @@
       </p:sp>
       <p:sp>
         <p:nvSpPr>
-          <p:cNvPr id="43" name="Text 41"/>
-          <p:cNvSpPr/>
-          <p:nvPr/>
-        </p:nvSpPr>
-        <p:spPr>
-          <a:xfrm>
-            <a:off x="5370141" y="4169664"/>
-            <a:ext cx="685800" cy="475488"/>
+          <p:cNvPr id="46" name="Text 44"/>
+          <p:cNvSpPr/>
+          <p:nvPr/>
+        </p:nvSpPr>
+        <p:spPr>
+          <a:xfrm>
+            <a:off x="3911969" y="4169664"/>
+            <a:ext cx="603504" cy="475488"/>
           </a:xfrm>
           <a:prstGeom prst="rect">
             <a:avLst/>
@@ -16350,7 +16521,7 @@
                 <a:ea typeface="Trebuchet MS" pitchFamily="34" charset="-122"/>
                 <a:cs typeface="Trebuchet MS" pitchFamily="34" charset="-120"/>
               </a:rPr>
-              <a:t>n</a:t>
+              <a:t>p</a:t>
             </a:r>
             <a:endParaRPr lang="en-US" sz="900" dirty="0"/>
           </a:p>
@@ -16358,14 +16529,14 @@
       </p:sp>
       <p:sp>
         <p:nvSpPr>
-          <p:cNvPr id="44" name="Shape 42"/>
-          <p:cNvSpPr/>
-          <p:nvPr/>
-        </p:nvSpPr>
-        <p:spPr>
-          <a:xfrm>
-            <a:off x="6408638" y="4169664"/>
-            <a:ext cx="685800" cy="475488"/>
+          <p:cNvPr id="47" name="Shape 45"/>
+          <p:cNvSpPr/>
+          <p:nvPr/>
+        </p:nvSpPr>
+        <p:spPr>
+          <a:xfrm>
+            <a:off x="4565350" y="4169664"/>
+            <a:ext cx="603504" cy="475488"/>
           </a:xfrm>
           <a:prstGeom prst="rect">
             <a:avLst>
@@ -16385,14 +16556,14 @@
       </p:sp>
       <p:sp>
         <p:nvSpPr>
-          <p:cNvPr id="45" name="Text 43"/>
-          <p:cNvSpPr/>
-          <p:nvPr/>
-        </p:nvSpPr>
-        <p:spPr>
-          <a:xfrm>
-            <a:off x="6408638" y="4169664"/>
-            <a:ext cx="685800" cy="475488"/>
+          <p:cNvPr id="48" name="Text 46"/>
+          <p:cNvSpPr/>
+          <p:nvPr/>
+        </p:nvSpPr>
+        <p:spPr>
+          <a:xfrm>
+            <a:off x="4565350" y="4169664"/>
+            <a:ext cx="603504" cy="475488"/>
           </a:xfrm>
           <a:prstGeom prst="rect">
             <a:avLst/>
@@ -16416,7 +16587,7 @@
                 <a:ea typeface="Trebuchet MS" pitchFamily="34" charset="-122"/>
                 <a:cs typeface="Trebuchet MS" pitchFamily="34" charset="-120"/>
               </a:rPr>
-              <a:t>er</a:t>
+              <a:t>ar</a:t>
             </a:r>
             <a:endParaRPr lang="en-US" sz="900" dirty="0"/>
           </a:p>
@@ -16424,14 +16595,14 @@
       </p:sp>
       <p:sp>
         <p:nvSpPr>
-          <p:cNvPr id="46" name="Shape 44"/>
-          <p:cNvSpPr/>
-          <p:nvPr/>
-        </p:nvSpPr>
-        <p:spPr>
-          <a:xfrm>
-            <a:off x="7447135" y="4169664"/>
-            <a:ext cx="685800" cy="475488"/>
+          <p:cNvPr id="49" name="Shape 47"/>
+          <p:cNvSpPr/>
+          <p:nvPr/>
+        </p:nvSpPr>
+        <p:spPr>
+          <a:xfrm>
+            <a:off x="5218730" y="4169664"/>
+            <a:ext cx="603504" cy="475488"/>
           </a:xfrm>
           <a:prstGeom prst="rect">
             <a:avLst>
@@ -16451,14 +16622,14 @@
       </p:sp>
       <p:sp>
         <p:nvSpPr>
-          <p:cNvPr id="47" name="Text 45"/>
-          <p:cNvSpPr/>
-          <p:nvPr/>
-        </p:nvSpPr>
-        <p:spPr>
-          <a:xfrm>
-            <a:off x="7447135" y="4169664"/>
-            <a:ext cx="685800" cy="475488"/>
+          <p:cNvPr id="50" name="Text 48"/>
+          <p:cNvSpPr/>
+          <p:nvPr/>
+        </p:nvSpPr>
+        <p:spPr>
+          <a:xfrm>
+            <a:off x="5218730" y="4169664"/>
+            <a:ext cx="603504" cy="475488"/>
           </a:xfrm>
           <a:prstGeom prst="rect">
             <a:avLst/>
@@ -16482,7 +16653,271 @@
                 <a:ea typeface="Trebuchet MS" pitchFamily="34" charset="-122"/>
                 <a:cs typeface="Trebuchet MS" pitchFamily="34" charset="-120"/>
               </a:rPr>
-              <a:t>s</a:t>
+              <a:t>t</a:t>
+            </a:r>
+            <a:endParaRPr lang="en-US" sz="900" dirty="0"/>
+          </a:p>
+        </p:txBody>
+      </p:sp>
+      <p:sp>
+        <p:nvSpPr>
+          <p:cNvPr id="51" name="Shape 49"/>
+          <p:cNvSpPr/>
+          <p:nvPr/>
+        </p:nvSpPr>
+        <p:spPr>
+          <a:xfrm>
+            <a:off x="5872111" y="4169664"/>
+            <a:ext cx="603504" cy="475488"/>
+          </a:xfrm>
+          <a:prstGeom prst="rect">
+            <a:avLst>
+              <a:gd name="adj" fmla="val 7692"/>
+            </a:avLst>
+          </a:prstGeom>
+          <a:solidFill>
+            <a:srgbClr val="FFFFFF"/>
+          </a:solidFill>
+          <a:ln w="12700">
+            <a:solidFill>
+              <a:srgbClr val="DB2777"/>
+            </a:solidFill>
+            <a:prstDash val="solid"/>
+          </a:ln>
+        </p:spPr>
+      </p:sp>
+      <p:sp>
+        <p:nvSpPr>
+          <p:cNvPr id="52" name="Text 50"/>
+          <p:cNvSpPr/>
+          <p:nvPr/>
+        </p:nvSpPr>
+        <p:spPr>
+          <a:xfrm>
+            <a:off x="5872111" y="4169664"/>
+            <a:ext cx="603504" cy="475488"/>
+          </a:xfrm>
+          <a:prstGeom prst="rect">
+            <a:avLst/>
+          </a:prstGeom>
+          <a:noFill/>
+          <a:ln/>
+        </p:spPr>
+        <p:txBody>
+          <a:bodyPr wrap="square" lIns="0" tIns="0" rIns="0" bIns="0" rtlCol="0" anchor="ctr"/>
+          <a:lstStyle/>
+          <a:p>
+            <a:pPr algn="ctr" indent="0" marL="0">
+              <a:buNone/>
+            </a:pPr>
+            <a:r>
+              <a:rPr lang="en-US" sz="900" b="1" dirty="0">
+                <a:solidFill>
+                  <a:srgbClr val="9D174D"/>
+                </a:solidFill>
+                <a:latin typeface="Trebuchet MS" pitchFamily="34" charset="0"/>
+                <a:ea typeface="Trebuchet MS" pitchFamily="34" charset="-122"/>
+                <a:cs typeface="Trebuchet MS" pitchFamily="34" charset="-120"/>
+              </a:rPr>
+              <a:t>m</a:t>
+            </a:r>
+            <a:endParaRPr lang="en-US" sz="900" dirty="0"/>
+          </a:p>
+        </p:txBody>
+      </p:sp>
+      <p:sp>
+        <p:nvSpPr>
+          <p:cNvPr id="53" name="Shape 51"/>
+          <p:cNvSpPr/>
+          <p:nvPr/>
+        </p:nvSpPr>
+        <p:spPr>
+          <a:xfrm>
+            <a:off x="6525491" y="4169664"/>
+            <a:ext cx="603504" cy="475488"/>
+          </a:xfrm>
+          <a:prstGeom prst="rect">
+            <a:avLst>
+              <a:gd name="adj" fmla="val 7692"/>
+            </a:avLst>
+          </a:prstGeom>
+          <a:solidFill>
+            <a:srgbClr val="FFFFFF"/>
+          </a:solidFill>
+          <a:ln w="12700">
+            <a:solidFill>
+              <a:srgbClr val="DB2777"/>
+            </a:solidFill>
+            <a:prstDash val="solid"/>
+          </a:ln>
+        </p:spPr>
+      </p:sp>
+      <p:sp>
+        <p:nvSpPr>
+          <p:cNvPr id="54" name="Text 52"/>
+          <p:cNvSpPr/>
+          <p:nvPr/>
+        </p:nvSpPr>
+        <p:spPr>
+          <a:xfrm>
+            <a:off x="6525491" y="4169664"/>
+            <a:ext cx="603504" cy="475488"/>
+          </a:xfrm>
+          <a:prstGeom prst="rect">
+            <a:avLst/>
+          </a:prstGeom>
+          <a:noFill/>
+          <a:ln/>
+        </p:spPr>
+        <p:txBody>
+          <a:bodyPr wrap="square" lIns="0" tIns="0" rIns="0" bIns="0" rtlCol="0" anchor="ctr"/>
+          <a:lstStyle/>
+          <a:p>
+            <a:pPr algn="ctr" indent="0" marL="0">
+              <a:buNone/>
+            </a:pPr>
+            <a:r>
+              <a:rPr lang="en-US" sz="900" b="1" dirty="0">
+                <a:solidFill>
+                  <a:srgbClr val="9D174D"/>
+                </a:solidFill>
+                <a:latin typeface="Trebuchet MS" pitchFamily="34" charset="0"/>
+                <a:ea typeface="Trebuchet MS" pitchFamily="34" charset="-122"/>
+                <a:cs typeface="Trebuchet MS" pitchFamily="34" charset="-120"/>
+              </a:rPr>
+              <a:t>e</a:t>
+            </a:r>
+            <a:endParaRPr lang="en-US" sz="900" dirty="0"/>
+          </a:p>
+        </p:txBody>
+      </p:sp>
+      <p:sp>
+        <p:nvSpPr>
+          <p:cNvPr id="55" name="Shape 53"/>
+          <p:cNvSpPr/>
+          <p:nvPr/>
+        </p:nvSpPr>
+        <p:spPr>
+          <a:xfrm>
+            <a:off x="7178871" y="4169664"/>
+            <a:ext cx="603504" cy="475488"/>
+          </a:xfrm>
+          <a:prstGeom prst="rect">
+            <a:avLst>
+              <a:gd name="adj" fmla="val 7692"/>
+            </a:avLst>
+          </a:prstGeom>
+          <a:solidFill>
+            <a:srgbClr val="FFFFFF"/>
+          </a:solidFill>
+          <a:ln w="12700">
+            <a:solidFill>
+              <a:srgbClr val="DB2777"/>
+            </a:solidFill>
+            <a:prstDash val="solid"/>
+          </a:ln>
+        </p:spPr>
+      </p:sp>
+      <p:sp>
+        <p:nvSpPr>
+          <p:cNvPr id="56" name="Text 54"/>
+          <p:cNvSpPr/>
+          <p:nvPr/>
+        </p:nvSpPr>
+        <p:spPr>
+          <a:xfrm>
+            <a:off x="7178871" y="4169664"/>
+            <a:ext cx="603504" cy="475488"/>
+          </a:xfrm>
+          <a:prstGeom prst="rect">
+            <a:avLst/>
+          </a:prstGeom>
+          <a:noFill/>
+          <a:ln/>
+        </p:spPr>
+        <p:txBody>
+          <a:bodyPr wrap="square" lIns="0" tIns="0" rIns="0" bIns="0" rtlCol="0" anchor="ctr"/>
+          <a:lstStyle/>
+          <a:p>
+            <a:pPr algn="ctr" indent="0" marL="0">
+              <a:buNone/>
+            </a:pPr>
+            <a:r>
+              <a:rPr lang="en-US" sz="900" b="1" dirty="0">
+                <a:solidFill>
+                  <a:srgbClr val="9D174D"/>
+                </a:solidFill>
+                <a:latin typeface="Trebuchet MS" pitchFamily="34" charset="0"/>
+                <a:ea typeface="Trebuchet MS" pitchFamily="34" charset="-122"/>
+                <a:cs typeface="Trebuchet MS" pitchFamily="34" charset="-120"/>
+              </a:rPr>
+              <a:t>n</a:t>
+            </a:r>
+            <a:endParaRPr lang="en-US" sz="900" dirty="0"/>
+          </a:p>
+        </p:txBody>
+      </p:sp>
+      <p:sp>
+        <p:nvSpPr>
+          <p:cNvPr id="57" name="Shape 55"/>
+          <p:cNvSpPr/>
+          <p:nvPr/>
+        </p:nvSpPr>
+        <p:spPr>
+          <a:xfrm>
+            <a:off x="7832252" y="4169664"/>
+            <a:ext cx="603504" cy="475488"/>
+          </a:xfrm>
+          <a:prstGeom prst="rect">
+            <a:avLst>
+              <a:gd name="adj" fmla="val 7692"/>
+            </a:avLst>
+          </a:prstGeom>
+          <a:solidFill>
+            <a:srgbClr val="FFFFFF"/>
+          </a:solidFill>
+          <a:ln w="12700">
+            <a:solidFill>
+              <a:srgbClr val="DB2777"/>
+            </a:solidFill>
+            <a:prstDash val="solid"/>
+          </a:ln>
+        </p:spPr>
+      </p:sp>
+      <p:sp>
+        <p:nvSpPr>
+          <p:cNvPr id="58" name="Text 56"/>
+          <p:cNvSpPr/>
+          <p:nvPr/>
+        </p:nvSpPr>
+        <p:spPr>
+          <a:xfrm>
+            <a:off x="7832252" y="4169664"/>
+            <a:ext cx="603504" cy="475488"/>
+          </a:xfrm>
+          <a:prstGeom prst="rect">
+            <a:avLst/>
+          </a:prstGeom>
+          <a:noFill/>
+          <a:ln/>
+        </p:spPr>
+        <p:txBody>
+          <a:bodyPr wrap="square" lIns="0" tIns="0" rIns="0" bIns="0" rtlCol="0" anchor="ctr"/>
+          <a:lstStyle/>
+          <a:p>
+            <a:pPr algn="ctr" indent="0" marL="0">
+              <a:buNone/>
+            </a:pPr>
+            <a:r>
+              <a:rPr lang="en-US" sz="900" b="1" dirty="0">
+                <a:solidFill>
+                  <a:srgbClr val="9D174D"/>
+                </a:solidFill>
+                <a:latin typeface="Trebuchet MS" pitchFamily="34" charset="0"/>
+                <a:ea typeface="Trebuchet MS" pitchFamily="34" charset="-122"/>
+                <a:cs typeface="Trebuchet MS" pitchFamily="34" charset="-120"/>
+              </a:rPr>
+              <a:t>t</a:t>
             </a:r>
             <a:endParaRPr lang="en-US" sz="900" dirty="0"/>
           </a:p>
@@ -17056,7 +17491,7 @@
                 <a:ea typeface="Calibri" pitchFamily="34" charset="-122"/>
                 <a:cs typeface="Calibri" pitchFamily="34" charset="-120"/>
               </a:rPr>
-              <a:t>Word Labs  •  wordlabs.app  •  Root: 'part' = piece, share, divide</a:t>
+              <a:t>Word Labs  •  wordlabs.app  •  Root: 'part' = a piece of something; a section</a:t>
             </a:r>
             <a:endParaRPr lang="en-US" sz="800" dirty="0"/>
           </a:p>
@@ -17390,7 +17825,7 @@
                 <a:ea typeface="Trebuchet MS" pitchFamily="34" charset="-122"/>
                 <a:cs typeface="Trebuchet MS" pitchFamily="34" charset="-120"/>
               </a:rPr>
-              <a:t>1</a:t>
+              <a:t>0</a:t>
             </a:r>
             <a:pPr algn="ctr" indent="0" marL="0">
               <a:buNone/>
@@ -17696,7 +18131,7 @@
                 <a:ea typeface="Calibri" pitchFamily="34" charset="-122"/>
                 <a:cs typeface="Calibri" pitchFamily="34" charset="-120"/>
               </a:rPr>
-              <a:t>Word Labs  •  wordlabs.app  •  Root: 'part' = piece, share, divide</a:t>
+              <a:t>Word Labs  •  wordlabs.app  •  Root: 'part' = a piece of something; a section</a:t>
             </a:r>
             <a:endParaRPr lang="en-US" sz="800" dirty="0"/>
           </a:p>
@@ -17808,7 +18243,7 @@
                 <a:ea typeface="Calibri" pitchFamily="34" charset="-122"/>
                 <a:cs typeface="Calibri" pitchFamily="34" charset="-120"/>
               </a:rPr>
-              <a:t>When our group had to </a:t>
+              <a:t>The two houses stood far </a:t>
             </a:r>
             <a:pPr algn="l" indent="0" marL="0">
               <a:buNone/>
@@ -17825,7 +18260,7 @@
                 <a:ea typeface="Calibri" pitchFamily="34" charset="-122"/>
                 <a:cs typeface="Calibri" pitchFamily="34" charset="-120"/>
               </a:rPr>
-              <a:t>depart</a:t>
+              <a:t>apart</a:t>
             </a:r>
             <a:pPr algn="l" indent="0" marL="0">
               <a:buNone/>
@@ -17839,7 +18274,7 @@
                 <a:ea typeface="Calibri" pitchFamily="34" charset="-122"/>
                 <a:cs typeface="Calibri" pitchFamily="34" charset="-120"/>
               </a:rPr>
-              <a:t>, each </a:t>
+              <a:t> on the hill. They rented an </a:t>
             </a:r>
             <a:pPr algn="l" indent="0" marL="0">
               <a:buNone/>
@@ -17856,7 +18291,7 @@
                 <a:ea typeface="Calibri" pitchFamily="34" charset="-122"/>
                 <a:cs typeface="Calibri" pitchFamily="34" charset="-120"/>
               </a:rPr>
-              <a:t>compartment</a:t>
+              <a:t>apartment</a:t>
             </a:r>
             <a:pPr algn="l" indent="0" marL="0">
               <a:buNone/>
@@ -17870,7 +18305,7 @@
                 <a:ea typeface="Calibri" pitchFamily="34" charset="-122"/>
                 <a:cs typeface="Calibri" pitchFamily="34" charset="-120"/>
               </a:rPr>
-              <a:t> of the bag held a different </a:t>
+              <a:t> on the fifth floor. The new building has forty </a:t>
             </a:r>
             <a:pPr algn="l" indent="0" marL="0">
               <a:buNone/>
@@ -17887,7 +18322,7 @@
                 <a:ea typeface="Calibri" pitchFamily="34" charset="-122"/>
                 <a:cs typeface="Calibri" pitchFamily="34" charset="-120"/>
               </a:rPr>
-              <a:t>particle</a:t>
+              <a:t>apartments</a:t>
             </a:r>
             <a:pPr algn="l" indent="0" marL="0">
               <a:buNone/>
@@ -17901,7 +18336,7 @@
                 <a:ea typeface="Calibri" pitchFamily="34" charset="-122"/>
                 <a:cs typeface="Calibri" pitchFamily="34" charset="-120"/>
               </a:rPr>
-              <a:t> of the experiment.</a:t>
+              <a:t> for rent.</a:t>
             </a:r>
             <a:endParaRPr lang="en-US" sz="1800" dirty="0"/>
           </a:p>
@@ -18056,7 +18491,7 @@
                 <a:ea typeface="Trebuchet MS" pitchFamily="34" charset="-122"/>
                 <a:cs typeface="Trebuchet MS" pitchFamily="34" charset="-120"/>
               </a:rPr>
-              <a:t>depart</a:t>
+              <a:t>apart</a:t>
             </a:r>
             <a:endParaRPr lang="en-US" sz="1400" dirty="0"/>
           </a:p>
@@ -18184,7 +18619,7 @@
                 <a:ea typeface="Trebuchet MS" pitchFamily="34" charset="-122"/>
                 <a:cs typeface="Trebuchet MS" pitchFamily="34" charset="-120"/>
               </a:rPr>
-              <a:t>compartment</a:t>
+              <a:t>apartment</a:t>
             </a:r>
             <a:endParaRPr lang="en-US" sz="1400" dirty="0"/>
           </a:p>
@@ -18312,7 +18747,7 @@
                 <a:ea typeface="Trebuchet MS" pitchFamily="34" charset="-122"/>
                 <a:cs typeface="Trebuchet MS" pitchFamily="34" charset="-120"/>
               </a:rPr>
-              <a:t>particle</a:t>
+              <a:t>apartments</a:t>
             </a:r>
             <a:endParaRPr lang="en-US" sz="1400" dirty="0"/>
           </a:p>
@@ -18643,7 +19078,7 @@
                 <a:ea typeface="Calibri" pitchFamily="34" charset="-122"/>
                 <a:cs typeface="Calibri" pitchFamily="34" charset="-120"/>
               </a:rPr>
-              <a:t>Word Labs  •  wordlabs.app  •  Root: 'part' = piece, share, divide</a:t>
+              <a:t>Word Labs  •  wordlabs.app  •  Root: 'part' = a piece of something; a section</a:t>
             </a:r>
             <a:endParaRPr lang="en-US" sz="800" dirty="0"/>
           </a:p>
@@ -18782,7 +19217,7 @@
                 <a:ea typeface="Trebuchet MS" pitchFamily="34" charset="-122"/>
                 <a:cs typeface="Trebuchet MS" pitchFamily="34" charset="-120"/>
               </a:rPr>
-              <a:t>depart</a:t>
+              <a:t>apart</a:t>
             </a:r>
             <a:endParaRPr lang="en-US" sz="2800" dirty="0"/>
           </a:p>
@@ -19470,7 +19905,7 @@
                 <a:ea typeface="Calibri" pitchFamily="34" charset="-122"/>
                 <a:cs typeface="Calibri" pitchFamily="34" charset="-120"/>
               </a:rPr>
-              <a:t>Word Labs  •  wordlabs.app  •  Root: 'part' = piece, share, divide</a:t>
+              <a:t>Word Labs  •  wordlabs.app  •  Root: 'part' = a piece of something; a section</a:t>
             </a:r>
             <a:endParaRPr lang="en-US" sz="800" dirty="0"/>
           </a:p>
@@ -19609,7 +20044,7 @@
                 <a:ea typeface="Trebuchet MS" pitchFamily="34" charset="-122"/>
                 <a:cs typeface="Trebuchet MS" pitchFamily="34" charset="-120"/>
               </a:rPr>
-              <a:t>depart</a:t>
+              <a:t>apart</a:t>
             </a:r>
             <a:endParaRPr lang="en-US" sz="2800" dirty="0"/>
           </a:p>
@@ -19748,7 +20183,7 @@
                 <a:ea typeface="Trebuchet MS" pitchFamily="34" charset="-122"/>
                 <a:cs typeface="Trebuchet MS" pitchFamily="34" charset="-120"/>
               </a:rPr>
-              <a:t>de</a:t>
+              <a:t>a</a:t>
             </a:r>
             <a:endParaRPr lang="en-US" sz="1300" dirty="0"/>
           </a:p>
@@ -19787,7 +20222,7 @@
                 <a:ea typeface="Calibri" pitchFamily="34" charset="-122"/>
                 <a:cs typeface="Calibri" pitchFamily="34" charset="-120"/>
               </a:rPr>
-              <a:t>away from</a:t>
+              <a:t>not; without</a:t>
             </a:r>
             <a:endParaRPr lang="en-US" sz="850" dirty="0"/>
           </a:p>
@@ -19899,7 +20334,7 @@
                 <a:ea typeface="Calibri" pitchFamily="34" charset="-122"/>
                 <a:cs typeface="Calibri" pitchFamily="34" charset="-120"/>
               </a:rPr>
-              <a:t>piece, share, divide</a:t>
+              <a:t>a piece of something; a section</a:t>
             </a:r>
             <a:endParaRPr lang="en-US" sz="850" dirty="0"/>
           </a:p>
@@ -20455,7 +20890,7 @@
                 <a:ea typeface="Calibri" pitchFamily="34" charset="-122"/>
                 <a:cs typeface="Calibri" pitchFamily="34" charset="-120"/>
               </a:rPr>
-              <a:t>Word Labs  •  wordlabs.app  •  Root: 'part' = piece, share, divide</a:t>
+              <a:t>Word Labs  •  wordlabs.app  •  Root: 'part' = a piece of something; a section</a:t>
             </a:r>
             <a:endParaRPr lang="en-US" sz="800" dirty="0"/>
           </a:p>
@@ -20594,7 +21029,7 @@
                 <a:ea typeface="Trebuchet MS" pitchFamily="34" charset="-122"/>
                 <a:cs typeface="Trebuchet MS" pitchFamily="34" charset="-120"/>
               </a:rPr>
-              <a:t>depart</a:t>
+              <a:t>apart</a:t>
             </a:r>
             <a:endParaRPr lang="en-US" sz="2800" dirty="0"/>
           </a:p>
@@ -20733,7 +21168,7 @@
                 <a:ea typeface="Trebuchet MS" pitchFamily="34" charset="-122"/>
                 <a:cs typeface="Trebuchet MS" pitchFamily="34" charset="-120"/>
               </a:rPr>
-              <a:t>de</a:t>
+              <a:t>a</a:t>
             </a:r>
             <a:endParaRPr lang="en-US" sz="1300" dirty="0"/>
           </a:p>
@@ -20772,7 +21207,7 @@
                 <a:ea typeface="Calibri" pitchFamily="34" charset="-122"/>
                 <a:cs typeface="Calibri" pitchFamily="34" charset="-120"/>
               </a:rPr>
-              <a:t>away from</a:t>
+              <a:t>not; without</a:t>
             </a:r>
             <a:endParaRPr lang="en-US" sz="850" dirty="0"/>
           </a:p>
@@ -20884,7 +21319,7 @@
                 <a:ea typeface="Calibri" pitchFamily="34" charset="-122"/>
                 <a:cs typeface="Calibri" pitchFamily="34" charset="-120"/>
               </a:rPr>
-              <a:t>piece, share, divide</a:t>
+              <a:t>a piece of something; a section</a:t>
             </a:r>
             <a:endParaRPr lang="en-US" sz="850" dirty="0"/>
           </a:p>
@@ -21043,7 +21478,7 @@
                 <a:ea typeface="Trebuchet MS" pitchFamily="34" charset="-122"/>
                 <a:cs typeface="Trebuchet MS" pitchFamily="34" charset="-120"/>
               </a:rPr>
-              <a:t>de</a:t>
+              <a:t>a</a:t>
             </a:r>
             <a:endParaRPr lang="en-US" sz="1400" dirty="0"/>
           </a:p>
@@ -21572,7 +22007,7 @@
                 <a:ea typeface="Calibri" pitchFamily="34" charset="-122"/>
                 <a:cs typeface="Calibri" pitchFamily="34" charset="-120"/>
               </a:rPr>
-              <a:t>Word Labs  •  wordlabs.app  •  Root: 'part' = piece, share, divide</a:t>
+              <a:t>Word Labs  •  wordlabs.app  •  Root: 'part' = a piece of something; a section</a:t>
             </a:r>
             <a:endParaRPr lang="en-US" sz="800" dirty="0"/>
           </a:p>
@@ -21711,7 +22146,7 @@
                 <a:ea typeface="Trebuchet MS" pitchFamily="34" charset="-122"/>
                 <a:cs typeface="Trebuchet MS" pitchFamily="34" charset="-120"/>
               </a:rPr>
-              <a:t>depart</a:t>
+              <a:t>apart</a:t>
             </a:r>
             <a:endParaRPr lang="en-US" sz="2800" dirty="0"/>
           </a:p>
@@ -21850,7 +22285,7 @@
                 <a:ea typeface="Trebuchet MS" pitchFamily="34" charset="-122"/>
                 <a:cs typeface="Trebuchet MS" pitchFamily="34" charset="-120"/>
               </a:rPr>
-              <a:t>de</a:t>
+              <a:t>a</a:t>
             </a:r>
             <a:endParaRPr lang="en-US" sz="1300" dirty="0"/>
           </a:p>
@@ -21889,7 +22324,7 @@
                 <a:ea typeface="Calibri" pitchFamily="34" charset="-122"/>
                 <a:cs typeface="Calibri" pitchFamily="34" charset="-120"/>
               </a:rPr>
-              <a:t>away from</a:t>
+              <a:t>not; without</a:t>
             </a:r>
             <a:endParaRPr lang="en-US" sz="850" dirty="0"/>
           </a:p>
@@ -22001,7 +22436,7 @@
                 <a:ea typeface="Calibri" pitchFamily="34" charset="-122"/>
                 <a:cs typeface="Calibri" pitchFamily="34" charset="-120"/>
               </a:rPr>
-              <a:t>piece, share, divide</a:t>
+              <a:t>a piece of something; a section</a:t>
             </a:r>
             <a:endParaRPr lang="en-US" sz="850" dirty="0"/>
           </a:p>
@@ -22160,7 +22595,7 @@
                 <a:ea typeface="Trebuchet MS" pitchFamily="34" charset="-122"/>
                 <a:cs typeface="Trebuchet MS" pitchFamily="34" charset="-120"/>
               </a:rPr>
-              <a:t>de</a:t>
+              <a:t>a</a:t>
             </a:r>
             <a:endParaRPr lang="en-US" sz="1400" dirty="0"/>
           </a:p>
@@ -22372,7 +22807,7 @@
         </p:nvSpPr>
         <p:spPr>
           <a:xfrm>
-            <a:off x="2427732" y="4169664"/>
+            <a:off x="2670048" y="4169664"/>
             <a:ext cx="685800" cy="475488"/>
           </a:xfrm>
           <a:prstGeom prst="rect">
@@ -22399,7 +22834,7 @@
         </p:nvSpPr>
         <p:spPr>
           <a:xfrm>
-            <a:off x="2427732" y="4169664"/>
+            <a:off x="2670048" y="4169664"/>
             <a:ext cx="685800" cy="475488"/>
           </a:xfrm>
           <a:prstGeom prst="rect">
@@ -22424,7 +22859,7 @@
                 <a:ea typeface="Trebuchet MS" pitchFamily="34" charset="-122"/>
                 <a:cs typeface="Trebuchet MS" pitchFamily="34" charset="-120"/>
               </a:rPr>
-              <a:t>d</a:t>
+              <a:t>a</a:t>
             </a:r>
             <a:endParaRPr lang="en-US" sz="900" dirty="0"/>
           </a:p>
@@ -22438,7 +22873,7 @@
         </p:nvSpPr>
         <p:spPr>
           <a:xfrm>
-            <a:off x="3639312" y="4169664"/>
+            <a:off x="4123944" y="4169664"/>
             <a:ext cx="685800" cy="475488"/>
           </a:xfrm>
           <a:prstGeom prst="rect">
@@ -22465,7 +22900,7 @@
         </p:nvSpPr>
         <p:spPr>
           <a:xfrm>
-            <a:off x="3639312" y="4169664"/>
+            <a:off x="4123944" y="4169664"/>
             <a:ext cx="685800" cy="475488"/>
           </a:xfrm>
           <a:prstGeom prst="rect">
@@ -22490,7 +22925,7 @@
                 <a:ea typeface="Trebuchet MS" pitchFamily="34" charset="-122"/>
                 <a:cs typeface="Trebuchet MS" pitchFamily="34" charset="-120"/>
               </a:rPr>
-              <a:t>e</a:t>
+              <a:t>p</a:t>
             </a:r>
             <a:endParaRPr lang="en-US" sz="900" dirty="0"/>
           </a:p>
@@ -22504,7 +22939,7 @@
         </p:nvSpPr>
         <p:spPr>
           <a:xfrm>
-            <a:off x="4850892" y="4169664"/>
+            <a:off x="5577840" y="4169664"/>
             <a:ext cx="685800" cy="475488"/>
           </a:xfrm>
           <a:prstGeom prst="rect">
@@ -22531,7 +22966,7 @@
         </p:nvSpPr>
         <p:spPr>
           <a:xfrm>
-            <a:off x="4850892" y="4169664"/>
+            <a:off x="5577840" y="4169664"/>
             <a:ext cx="685800" cy="475488"/>
           </a:xfrm>
           <a:prstGeom prst="rect">
@@ -22556,7 +22991,7 @@
                 <a:ea typeface="Trebuchet MS" pitchFamily="34" charset="-122"/>
                 <a:cs typeface="Trebuchet MS" pitchFamily="34" charset="-120"/>
               </a:rPr>
-              <a:t>p</a:t>
+              <a:t>ar</a:t>
             </a:r>
             <a:endParaRPr lang="en-US" sz="900" dirty="0"/>
           </a:p>
@@ -22570,7 +23005,7 @@
         </p:nvSpPr>
         <p:spPr>
           <a:xfrm>
-            <a:off x="6062472" y="4169664"/>
+            <a:off x="7031736" y="4169664"/>
             <a:ext cx="685800" cy="475488"/>
           </a:xfrm>
           <a:prstGeom prst="rect">
@@ -22597,73 +23032,7 @@
         </p:nvSpPr>
         <p:spPr>
           <a:xfrm>
-            <a:off x="6062472" y="4169664"/>
-            <a:ext cx="685800" cy="475488"/>
-          </a:xfrm>
-          <a:prstGeom prst="rect">
-            <a:avLst/>
-          </a:prstGeom>
-          <a:noFill/>
-          <a:ln/>
-        </p:spPr>
-        <p:txBody>
-          <a:bodyPr wrap="square" lIns="0" tIns="0" rIns="0" bIns="0" rtlCol="0" anchor="ctr"/>
-          <a:lstStyle/>
-          <a:p>
-            <a:pPr algn="ctr" indent="0" marL="0">
-              <a:buNone/>
-            </a:pPr>
-            <a:r>
-              <a:rPr lang="en-US" sz="900" b="1" dirty="0">
-                <a:solidFill>
-                  <a:srgbClr val="9D174D"/>
-                </a:solidFill>
-                <a:latin typeface="Trebuchet MS" pitchFamily="34" charset="0"/>
-                <a:ea typeface="Trebuchet MS" pitchFamily="34" charset="-122"/>
-                <a:cs typeface="Trebuchet MS" pitchFamily="34" charset="-120"/>
-              </a:rPr>
-              <a:t>ar</a:t>
-            </a:r>
-            <a:endParaRPr lang="en-US" sz="900" dirty="0"/>
-          </a:p>
-        </p:txBody>
-      </p:sp>
-      <p:sp>
-        <p:nvSpPr>
-          <p:cNvPr id="41" name="Shape 39"/>
-          <p:cNvSpPr/>
-          <p:nvPr/>
-        </p:nvSpPr>
-        <p:spPr>
-          <a:xfrm>
-            <a:off x="7274052" y="4169664"/>
-            <a:ext cx="685800" cy="475488"/>
-          </a:xfrm>
-          <a:prstGeom prst="rect">
-            <a:avLst>
-              <a:gd name="adj" fmla="val 7692"/>
-            </a:avLst>
-          </a:prstGeom>
-          <a:solidFill>
-            <a:srgbClr val="FFFFFF"/>
-          </a:solidFill>
-          <a:ln w="12700">
-            <a:solidFill>
-              <a:srgbClr val="DB2777"/>
-            </a:solidFill>
-            <a:prstDash val="solid"/>
-          </a:ln>
-        </p:spPr>
-      </p:sp>
-      <p:sp>
-        <p:nvSpPr>
-          <p:cNvPr id="42" name="Text 40"/>
-          <p:cNvSpPr/>
-          <p:nvPr/>
-        </p:nvSpPr>
-        <p:spPr>
-          <a:xfrm>
-            <a:off x="7274052" y="4169664"/>
+            <a:off x="7031736" y="4169664"/>
             <a:ext cx="685800" cy="475488"/>
           </a:xfrm>
           <a:prstGeom prst="rect">
@@ -22980,7 +23349,7 @@
                 <a:ea typeface="Calibri" pitchFamily="34" charset="-122"/>
                 <a:cs typeface="Calibri" pitchFamily="34" charset="-120"/>
               </a:rPr>
-              <a:t>Word Labs  •  wordlabs.app  •  Root: 'part' = piece, share, divide</a:t>
+              <a:t>Word Labs  •  wordlabs.app  •  Root: 'part' = a piece of something; a section</a:t>
             </a:r>
             <a:endParaRPr lang="en-US" sz="800" dirty="0"/>
           </a:p>
@@ -23119,7 +23488,7 @@
                 <a:ea typeface="Trebuchet MS" pitchFamily="34" charset="-122"/>
                 <a:cs typeface="Trebuchet MS" pitchFamily="34" charset="-120"/>
               </a:rPr>
-              <a:t>compartment</a:t>
+              <a:t>apartment</a:t>
             </a:r>
             <a:endParaRPr lang="en-US" sz="2800" dirty="0"/>
           </a:p>
@@ -23807,7 +24176,7 @@
                 <a:ea typeface="Calibri" pitchFamily="34" charset="-122"/>
                 <a:cs typeface="Calibri" pitchFamily="34" charset="-120"/>
               </a:rPr>
-              <a:t>Word Labs  •  wordlabs.app  •  Root: 'part' = piece, share, divide</a:t>
+              <a:t>Word Labs  •  wordlabs.app  •  Root: 'part' = a piece of something; a section</a:t>
             </a:r>
             <a:endParaRPr lang="en-US" sz="800" dirty="0"/>
           </a:p>
@@ -23946,7 +24315,7 @@
                 <a:ea typeface="Trebuchet MS" pitchFamily="34" charset="-122"/>
                 <a:cs typeface="Trebuchet MS" pitchFamily="34" charset="-120"/>
               </a:rPr>
-              <a:t>compartment</a:t>
+              <a:t>apartment</a:t>
             </a:r>
             <a:endParaRPr lang="en-US" sz="2800" dirty="0"/>
           </a:p>
@@ -24085,7 +24454,7 @@
                 <a:ea typeface="Trebuchet MS" pitchFamily="34" charset="-122"/>
                 <a:cs typeface="Trebuchet MS" pitchFamily="34" charset="-120"/>
               </a:rPr>
-              <a:t>com</a:t>
+              <a:t>a</a:t>
             </a:r>
             <a:endParaRPr lang="en-US" sz="1300" dirty="0"/>
           </a:p>
@@ -24124,7 +24493,7 @@
                 <a:ea typeface="Calibri" pitchFamily="34" charset="-122"/>
                 <a:cs typeface="Calibri" pitchFamily="34" charset="-120"/>
               </a:rPr>
-              <a:t>together, with</a:t>
+              <a:t>not; without</a:t>
             </a:r>
             <a:endParaRPr lang="en-US" sz="850" dirty="0"/>
           </a:p>
@@ -24236,7 +24605,7 @@
                 <a:ea typeface="Calibri" pitchFamily="34" charset="-122"/>
                 <a:cs typeface="Calibri" pitchFamily="34" charset="-120"/>
               </a:rPr>
-              <a:t>piece, share, divide</a:t>
+              <a:t>a piece of something; a section</a:t>
             </a:r>
             <a:endParaRPr lang="en-US" sz="850" dirty="0"/>
           </a:p>
@@ -24348,7 +24717,7 @@
                 <a:ea typeface="Calibri" pitchFamily="34" charset="-122"/>
                 <a:cs typeface="Calibri" pitchFamily="34" charset="-120"/>
               </a:rPr>
-              <a:t>result, state</a:t>
+              <a:t>result of action</a:t>
             </a:r>
             <a:endParaRPr lang="en-US" sz="850" dirty="0"/>
           </a:p>
@@ -24904,7 +25273,7 @@
                 <a:ea typeface="Calibri" pitchFamily="34" charset="-122"/>
                 <a:cs typeface="Calibri" pitchFamily="34" charset="-120"/>
               </a:rPr>
-              <a:t>Word Labs  •  wordlabs.app  •  Root: 'part' = piece, share, divide</a:t>
+              <a:t>Word Labs  •  wordlabs.app  •  Root: 'part' = a piece of something; a section</a:t>
             </a:r>
             <a:endParaRPr lang="en-US" sz="800" dirty="0"/>
           </a:p>
@@ -24977,7 +25346,7 @@
                 <a:ea typeface="Trebuchet MS" pitchFamily="34" charset="-122"/>
                 <a:cs typeface="Trebuchet MS" pitchFamily="34" charset="-120"/>
               </a:rPr>
-              <a:t>We are learning that the root 'part' means 'piece, share, divide'.</a:t>
+              <a:t>We are learning that the root 'part' means 'a piece of something; a section'.</a:t>
             </a:r>
             <a:endParaRPr lang="en-US" sz="2000" dirty="0"/>
           </a:p>
@@ -25623,7 +25992,7 @@
                 <a:ea typeface="Calibri" pitchFamily="34" charset="-122"/>
                 <a:cs typeface="Calibri" pitchFamily="34" charset="-120"/>
               </a:rPr>
-              <a:t>Word Labs  •  wordlabs.app  •  Root: 'part' = piece, share, divide</a:t>
+              <a:t>Word Labs  •  wordlabs.app  •  Root: 'part' = a piece of something; a section</a:t>
             </a:r>
             <a:endParaRPr lang="en-US" sz="800" dirty="0"/>
           </a:p>
@@ -25762,7 +26131,7 @@
                 <a:ea typeface="Trebuchet MS" pitchFamily="34" charset="-122"/>
                 <a:cs typeface="Trebuchet MS" pitchFamily="34" charset="-120"/>
               </a:rPr>
-              <a:t>compartment</a:t>
+              <a:t>apartment</a:t>
             </a:r>
             <a:endParaRPr lang="en-US" sz="2800" dirty="0"/>
           </a:p>
@@ -25901,7 +26270,7 @@
                 <a:ea typeface="Trebuchet MS" pitchFamily="34" charset="-122"/>
                 <a:cs typeface="Trebuchet MS" pitchFamily="34" charset="-120"/>
               </a:rPr>
-              <a:t>com</a:t>
+              <a:t>a</a:t>
             </a:r>
             <a:endParaRPr lang="en-US" sz="1300" dirty="0"/>
           </a:p>
@@ -25940,7 +26309,7 @@
                 <a:ea typeface="Calibri" pitchFamily="34" charset="-122"/>
                 <a:cs typeface="Calibri" pitchFamily="34" charset="-120"/>
               </a:rPr>
-              <a:t>together, with</a:t>
+              <a:t>not; without</a:t>
             </a:r>
             <a:endParaRPr lang="en-US" sz="850" dirty="0"/>
           </a:p>
@@ -26052,7 +26421,7 @@
                 <a:ea typeface="Calibri" pitchFamily="34" charset="-122"/>
                 <a:cs typeface="Calibri" pitchFamily="34" charset="-120"/>
               </a:rPr>
-              <a:t>piece, share, divide</a:t>
+              <a:t>a piece of something; a section</a:t>
             </a:r>
             <a:endParaRPr lang="en-US" sz="850" dirty="0"/>
           </a:p>
@@ -26164,7 +26533,7 @@
                 <a:ea typeface="Calibri" pitchFamily="34" charset="-122"/>
                 <a:cs typeface="Calibri" pitchFamily="34" charset="-120"/>
               </a:rPr>
-              <a:t>result, state</a:t>
+              <a:t>result of action</a:t>
             </a:r>
             <a:endParaRPr lang="en-US" sz="850" dirty="0"/>
           </a:p>
@@ -26323,7 +26692,7 @@
                 <a:ea typeface="Trebuchet MS" pitchFamily="34" charset="-122"/>
                 <a:cs typeface="Trebuchet MS" pitchFamily="34" charset="-120"/>
               </a:rPr>
-              <a:t>com</a:t>
+              <a:t>a</a:t>
             </a:r>
             <a:endParaRPr lang="en-US" sz="1400" dirty="0"/>
           </a:p>
@@ -26957,7 +27326,7 @@
                 <a:ea typeface="Calibri" pitchFamily="34" charset="-122"/>
                 <a:cs typeface="Calibri" pitchFamily="34" charset="-120"/>
               </a:rPr>
-              <a:t>Word Labs  •  wordlabs.app  •  Root: 'part' = piece, share, divide</a:t>
+              <a:t>Word Labs  •  wordlabs.app  •  Root: 'part' = a piece of something; a section</a:t>
             </a:r>
             <a:endParaRPr lang="en-US" sz="800" dirty="0"/>
           </a:p>
@@ -27096,7 +27465,7 @@
                 <a:ea typeface="Trebuchet MS" pitchFamily="34" charset="-122"/>
                 <a:cs typeface="Trebuchet MS" pitchFamily="34" charset="-120"/>
               </a:rPr>
-              <a:t>compartment</a:t>
+              <a:t>apartment</a:t>
             </a:r>
             <a:endParaRPr lang="en-US" sz="2800" dirty="0"/>
           </a:p>
@@ -27235,7 +27604,7 @@
                 <a:ea typeface="Trebuchet MS" pitchFamily="34" charset="-122"/>
                 <a:cs typeface="Trebuchet MS" pitchFamily="34" charset="-120"/>
               </a:rPr>
-              <a:t>com</a:t>
+              <a:t>a</a:t>
             </a:r>
             <a:endParaRPr lang="en-US" sz="1300" dirty="0"/>
           </a:p>
@@ -27274,7 +27643,7 @@
                 <a:ea typeface="Calibri" pitchFamily="34" charset="-122"/>
                 <a:cs typeface="Calibri" pitchFamily="34" charset="-120"/>
               </a:rPr>
-              <a:t>together, with</a:t>
+              <a:t>not; without</a:t>
             </a:r>
             <a:endParaRPr lang="en-US" sz="850" dirty="0"/>
           </a:p>
@@ -27386,7 +27755,7 @@
                 <a:ea typeface="Calibri" pitchFamily="34" charset="-122"/>
                 <a:cs typeface="Calibri" pitchFamily="34" charset="-120"/>
               </a:rPr>
-              <a:t>piece, share, divide</a:t>
+              <a:t>a piece of something; a section</a:t>
             </a:r>
             <a:endParaRPr lang="en-US" sz="850" dirty="0"/>
           </a:p>
@@ -27498,7 +27867,7 @@
                 <a:ea typeface="Calibri" pitchFamily="34" charset="-122"/>
                 <a:cs typeface="Calibri" pitchFamily="34" charset="-120"/>
               </a:rPr>
-              <a:t>result, state</a:t>
+              <a:t>result of action</a:t>
             </a:r>
             <a:endParaRPr lang="en-US" sz="850" dirty="0"/>
           </a:p>
@@ -27657,7 +28026,7 @@
                 <a:ea typeface="Trebuchet MS" pitchFamily="34" charset="-122"/>
                 <a:cs typeface="Trebuchet MS" pitchFamily="34" charset="-120"/>
               </a:rPr>
-              <a:t>com</a:t>
+              <a:t>a</a:t>
             </a:r>
             <a:endParaRPr lang="en-US" sz="1400" dirty="0"/>
           </a:p>
@@ -27948,11 +28317,11 @@
         <p:spPr>
           <a:xfrm>
             <a:off x="1874520" y="4096512"/>
-            <a:ext cx="6903720" cy="804672"/>
+            <a:ext cx="6903720" cy="658368"/>
           </a:xfrm>
           <a:prstGeom prst="rect">
             <a:avLst>
-              <a:gd name="adj" fmla="val 6818"/>
+              <a:gd name="adj" fmla="val 8333"/>
             </a:avLst>
           </a:prstGeom>
           <a:solidFill>
@@ -27974,12 +28343,12 @@
         </p:nvSpPr>
         <p:spPr>
           <a:xfrm>
-            <a:off x="1951828" y="4169664"/>
-            <a:ext cx="603504" cy="384048"/>
+            <a:off x="2023872" y="4169664"/>
+            <a:ext cx="685800" cy="475488"/>
           </a:xfrm>
           <a:prstGeom prst="rect">
             <a:avLst>
-              <a:gd name="adj" fmla="val 9524"/>
+              <a:gd name="adj" fmla="val 7692"/>
             </a:avLst>
           </a:prstGeom>
           <a:solidFill>
@@ -28001,8 +28370,8 @@
         </p:nvSpPr>
         <p:spPr>
           <a:xfrm>
-            <a:off x="1951828" y="4169664"/>
-            <a:ext cx="603504" cy="384048"/>
+            <a:off x="2023872" y="4169664"/>
+            <a:ext cx="685800" cy="475488"/>
           </a:xfrm>
           <a:prstGeom prst="rect">
             <a:avLst/>
@@ -28026,7 +28395,7 @@
                 <a:ea typeface="Trebuchet MS" pitchFamily="34" charset="-122"/>
                 <a:cs typeface="Trebuchet MS" pitchFamily="34" charset="-120"/>
               </a:rPr>
-              <a:t>c</a:t>
+              <a:t>a</a:t>
             </a:r>
             <a:endParaRPr lang="en-US" sz="900" dirty="0"/>
           </a:p>
@@ -28034,57 +28403,18 @@
       </p:sp>
       <p:sp>
         <p:nvSpPr>
-          <p:cNvPr id="41" name="Text 39"/>
-          <p:cNvSpPr/>
-          <p:nvPr/>
-        </p:nvSpPr>
-        <p:spPr>
-          <a:xfrm>
-            <a:off x="1951828" y="4572000"/>
-            <a:ext cx="603504" cy="219456"/>
-          </a:xfrm>
-          <a:prstGeom prst="rect">
-            <a:avLst/>
-          </a:prstGeom>
-          <a:noFill/>
-          <a:ln/>
-        </p:spPr>
-        <p:txBody>
-          <a:bodyPr wrap="square" lIns="0" tIns="0" rIns="0" bIns="0" rtlCol="0" anchor="t"/>
-          <a:lstStyle/>
-          <a:p>
-            <a:pPr algn="ctr" indent="0" marL="0">
-              <a:buNone/>
-            </a:pPr>
-            <a:r>
-              <a:rPr lang="en-US" sz="750" i="1" dirty="0">
-                <a:solidFill>
-                  <a:srgbClr val="94A3B8"/>
-                </a:solidFill>
-                <a:latin typeface="Calibri" pitchFamily="34" charset="0"/>
-                <a:ea typeface="Calibri" pitchFamily="34" charset="-122"/>
-                <a:cs typeface="Calibri" pitchFamily="34" charset="-120"/>
-              </a:rPr>
-              <a:t>/k/</a:t>
-            </a:r>
-            <a:endParaRPr lang="en-US" sz="750" dirty="0"/>
-          </a:p>
-        </p:txBody>
-      </p:sp>
-      <p:sp>
-        <p:nvSpPr>
-          <p:cNvPr id="42" name="Shape 40"/>
-          <p:cNvSpPr/>
-          <p:nvPr/>
-        </p:nvSpPr>
-        <p:spPr>
-          <a:xfrm>
-            <a:off x="2605209" y="4169664"/>
-            <a:ext cx="603504" cy="384048"/>
+          <p:cNvPr id="41" name="Shape 39"/>
+          <p:cNvSpPr/>
+          <p:nvPr/>
+        </p:nvSpPr>
+        <p:spPr>
+          <a:xfrm>
+            <a:off x="2831592" y="4169664"/>
+            <a:ext cx="685800" cy="475488"/>
           </a:xfrm>
           <a:prstGeom prst="rect">
             <a:avLst>
-              <a:gd name="adj" fmla="val 9524"/>
+              <a:gd name="adj" fmla="val 7692"/>
             </a:avLst>
           </a:prstGeom>
           <a:solidFill>
@@ -28100,14 +28430,14 @@
       </p:sp>
       <p:sp>
         <p:nvSpPr>
-          <p:cNvPr id="43" name="Text 41"/>
-          <p:cNvSpPr/>
-          <p:nvPr/>
-        </p:nvSpPr>
-        <p:spPr>
-          <a:xfrm>
-            <a:off x="2605209" y="4169664"/>
-            <a:ext cx="603504" cy="384048"/>
+          <p:cNvPr id="42" name="Text 40"/>
+          <p:cNvSpPr/>
+          <p:nvPr/>
+        </p:nvSpPr>
+        <p:spPr>
+          <a:xfrm>
+            <a:off x="2831592" y="4169664"/>
+            <a:ext cx="685800" cy="475488"/>
           </a:xfrm>
           <a:prstGeom prst="rect">
             <a:avLst/>
@@ -28131,7 +28461,7 @@
                 <a:ea typeface="Trebuchet MS" pitchFamily="34" charset="-122"/>
                 <a:cs typeface="Trebuchet MS" pitchFamily="34" charset="-120"/>
               </a:rPr>
-              <a:t>o</a:t>
+              <a:t>p</a:t>
             </a:r>
             <a:endParaRPr lang="en-US" sz="900" dirty="0"/>
           </a:p>
@@ -28139,18 +28469,18 @@
       </p:sp>
       <p:sp>
         <p:nvSpPr>
-          <p:cNvPr id="44" name="Shape 42"/>
-          <p:cNvSpPr/>
-          <p:nvPr/>
-        </p:nvSpPr>
-        <p:spPr>
-          <a:xfrm>
-            <a:off x="3258589" y="4169664"/>
-            <a:ext cx="603504" cy="384048"/>
+          <p:cNvPr id="43" name="Shape 41"/>
+          <p:cNvSpPr/>
+          <p:nvPr/>
+        </p:nvSpPr>
+        <p:spPr>
+          <a:xfrm>
+            <a:off x="3639312" y="4169664"/>
+            <a:ext cx="685800" cy="475488"/>
           </a:xfrm>
           <a:prstGeom prst="rect">
             <a:avLst>
-              <a:gd name="adj" fmla="val 9524"/>
+              <a:gd name="adj" fmla="val 7692"/>
             </a:avLst>
           </a:prstGeom>
           <a:solidFill>
@@ -28166,14 +28496,14 @@
       </p:sp>
       <p:sp>
         <p:nvSpPr>
-          <p:cNvPr id="45" name="Text 43"/>
-          <p:cNvSpPr/>
-          <p:nvPr/>
-        </p:nvSpPr>
-        <p:spPr>
-          <a:xfrm>
-            <a:off x="3258589" y="4169664"/>
-            <a:ext cx="603504" cy="384048"/>
+          <p:cNvPr id="44" name="Text 42"/>
+          <p:cNvSpPr/>
+          <p:nvPr/>
+        </p:nvSpPr>
+        <p:spPr>
+          <a:xfrm>
+            <a:off x="3639312" y="4169664"/>
+            <a:ext cx="685800" cy="475488"/>
           </a:xfrm>
           <a:prstGeom prst="rect">
             <a:avLst/>
@@ -28197,7 +28527,7 @@
                 <a:ea typeface="Trebuchet MS" pitchFamily="34" charset="-122"/>
                 <a:cs typeface="Trebuchet MS" pitchFamily="34" charset="-120"/>
               </a:rPr>
-              <a:t>m</a:t>
+              <a:t>ar</a:t>
             </a:r>
             <a:endParaRPr lang="en-US" sz="900" dirty="0"/>
           </a:p>
@@ -28205,18 +28535,18 @@
       </p:sp>
       <p:sp>
         <p:nvSpPr>
-          <p:cNvPr id="46" name="Shape 44"/>
-          <p:cNvSpPr/>
-          <p:nvPr/>
-        </p:nvSpPr>
-        <p:spPr>
-          <a:xfrm>
-            <a:off x="3911969" y="4169664"/>
-            <a:ext cx="603504" cy="384048"/>
+          <p:cNvPr id="45" name="Shape 43"/>
+          <p:cNvSpPr/>
+          <p:nvPr/>
+        </p:nvSpPr>
+        <p:spPr>
+          <a:xfrm>
+            <a:off x="4447032" y="4169664"/>
+            <a:ext cx="685800" cy="475488"/>
           </a:xfrm>
           <a:prstGeom prst="rect">
             <a:avLst>
-              <a:gd name="adj" fmla="val 9524"/>
+              <a:gd name="adj" fmla="val 7692"/>
             </a:avLst>
           </a:prstGeom>
           <a:solidFill>
@@ -28232,14 +28562,14 @@
       </p:sp>
       <p:sp>
         <p:nvSpPr>
-          <p:cNvPr id="47" name="Text 45"/>
-          <p:cNvSpPr/>
-          <p:nvPr/>
-        </p:nvSpPr>
-        <p:spPr>
-          <a:xfrm>
-            <a:off x="3911969" y="4169664"/>
-            <a:ext cx="603504" cy="384048"/>
+          <p:cNvPr id="46" name="Text 44"/>
+          <p:cNvSpPr/>
+          <p:nvPr/>
+        </p:nvSpPr>
+        <p:spPr>
+          <a:xfrm>
+            <a:off x="4447032" y="4169664"/>
+            <a:ext cx="685800" cy="475488"/>
           </a:xfrm>
           <a:prstGeom prst="rect">
             <a:avLst/>
@@ -28263,7 +28593,7 @@
                 <a:ea typeface="Trebuchet MS" pitchFamily="34" charset="-122"/>
                 <a:cs typeface="Trebuchet MS" pitchFamily="34" charset="-120"/>
               </a:rPr>
-              <a:t>p</a:t>
+              <a:t>t</a:t>
             </a:r>
             <a:endParaRPr lang="en-US" sz="900" dirty="0"/>
           </a:p>
@@ -28271,18 +28601,18 @@
       </p:sp>
       <p:sp>
         <p:nvSpPr>
-          <p:cNvPr id="48" name="Shape 46"/>
-          <p:cNvSpPr/>
-          <p:nvPr/>
-        </p:nvSpPr>
-        <p:spPr>
-          <a:xfrm>
-            <a:off x="4565350" y="4169664"/>
-            <a:ext cx="603504" cy="384048"/>
+          <p:cNvPr id="47" name="Shape 45"/>
+          <p:cNvSpPr/>
+          <p:nvPr/>
+        </p:nvSpPr>
+        <p:spPr>
+          <a:xfrm>
+            <a:off x="5254752" y="4169664"/>
+            <a:ext cx="685800" cy="475488"/>
           </a:xfrm>
           <a:prstGeom prst="rect">
             <a:avLst>
-              <a:gd name="adj" fmla="val 9524"/>
+              <a:gd name="adj" fmla="val 7692"/>
             </a:avLst>
           </a:prstGeom>
           <a:solidFill>
@@ -28298,14 +28628,14 @@
       </p:sp>
       <p:sp>
         <p:nvSpPr>
-          <p:cNvPr id="49" name="Text 47"/>
-          <p:cNvSpPr/>
-          <p:nvPr/>
-        </p:nvSpPr>
-        <p:spPr>
-          <a:xfrm>
-            <a:off x="4565350" y="4169664"/>
-            <a:ext cx="603504" cy="384048"/>
+          <p:cNvPr id="48" name="Text 46"/>
+          <p:cNvSpPr/>
+          <p:nvPr/>
+        </p:nvSpPr>
+        <p:spPr>
+          <a:xfrm>
+            <a:off x="5254752" y="4169664"/>
+            <a:ext cx="685800" cy="475488"/>
           </a:xfrm>
           <a:prstGeom prst="rect">
             <a:avLst/>
@@ -28329,7 +28659,7 @@
                 <a:ea typeface="Trebuchet MS" pitchFamily="34" charset="-122"/>
                 <a:cs typeface="Trebuchet MS" pitchFamily="34" charset="-120"/>
               </a:rPr>
-              <a:t>ar</a:t>
+              <a:t>m</a:t>
             </a:r>
             <a:endParaRPr lang="en-US" sz="900" dirty="0"/>
           </a:p>
@@ -28337,18 +28667,18 @@
       </p:sp>
       <p:sp>
         <p:nvSpPr>
-          <p:cNvPr id="50" name="Shape 48"/>
-          <p:cNvSpPr/>
-          <p:nvPr/>
-        </p:nvSpPr>
-        <p:spPr>
-          <a:xfrm>
-            <a:off x="5218730" y="4169664"/>
-            <a:ext cx="603504" cy="384048"/>
+          <p:cNvPr id="49" name="Shape 47"/>
+          <p:cNvSpPr/>
+          <p:nvPr/>
+        </p:nvSpPr>
+        <p:spPr>
+          <a:xfrm>
+            <a:off x="6062472" y="4169664"/>
+            <a:ext cx="685800" cy="475488"/>
           </a:xfrm>
           <a:prstGeom prst="rect">
             <a:avLst>
-              <a:gd name="adj" fmla="val 9524"/>
+              <a:gd name="adj" fmla="val 7692"/>
             </a:avLst>
           </a:prstGeom>
           <a:solidFill>
@@ -28364,14 +28694,14 @@
       </p:sp>
       <p:sp>
         <p:nvSpPr>
-          <p:cNvPr id="51" name="Text 49"/>
-          <p:cNvSpPr/>
-          <p:nvPr/>
-        </p:nvSpPr>
-        <p:spPr>
-          <a:xfrm>
-            <a:off x="5218730" y="4169664"/>
-            <a:ext cx="603504" cy="384048"/>
+          <p:cNvPr id="50" name="Text 48"/>
+          <p:cNvSpPr/>
+          <p:nvPr/>
+        </p:nvSpPr>
+        <p:spPr>
+          <a:xfrm>
+            <a:off x="6062472" y="4169664"/>
+            <a:ext cx="685800" cy="475488"/>
           </a:xfrm>
           <a:prstGeom prst="rect">
             <a:avLst/>
@@ -28395,7 +28725,7 @@
                 <a:ea typeface="Trebuchet MS" pitchFamily="34" charset="-122"/>
                 <a:cs typeface="Trebuchet MS" pitchFamily="34" charset="-120"/>
               </a:rPr>
-              <a:t>t</a:t>
+              <a:t>e</a:t>
             </a:r>
             <a:endParaRPr lang="en-US" sz="900" dirty="0"/>
           </a:p>
@@ -28403,18 +28733,18 @@
       </p:sp>
       <p:sp>
         <p:nvSpPr>
-          <p:cNvPr id="52" name="Shape 50"/>
-          <p:cNvSpPr/>
-          <p:nvPr/>
-        </p:nvSpPr>
-        <p:spPr>
-          <a:xfrm>
-            <a:off x="5872111" y="4169664"/>
-            <a:ext cx="603504" cy="384048"/>
+          <p:cNvPr id="51" name="Shape 49"/>
+          <p:cNvSpPr/>
+          <p:nvPr/>
+        </p:nvSpPr>
+        <p:spPr>
+          <a:xfrm>
+            <a:off x="6870192" y="4169664"/>
+            <a:ext cx="685800" cy="475488"/>
           </a:xfrm>
           <a:prstGeom prst="rect">
             <a:avLst>
-              <a:gd name="adj" fmla="val 9524"/>
+              <a:gd name="adj" fmla="val 7692"/>
             </a:avLst>
           </a:prstGeom>
           <a:solidFill>
@@ -28430,14 +28760,14 @@
       </p:sp>
       <p:sp>
         <p:nvSpPr>
-          <p:cNvPr id="53" name="Text 51"/>
-          <p:cNvSpPr/>
-          <p:nvPr/>
-        </p:nvSpPr>
-        <p:spPr>
-          <a:xfrm>
-            <a:off x="5872111" y="4169664"/>
-            <a:ext cx="603504" cy="384048"/>
+          <p:cNvPr id="52" name="Text 50"/>
+          <p:cNvSpPr/>
+          <p:nvPr/>
+        </p:nvSpPr>
+        <p:spPr>
+          <a:xfrm>
+            <a:off x="6870192" y="4169664"/>
+            <a:ext cx="685800" cy="475488"/>
           </a:xfrm>
           <a:prstGeom prst="rect">
             <a:avLst/>
@@ -28461,7 +28791,7 @@
                 <a:ea typeface="Trebuchet MS" pitchFamily="34" charset="-122"/>
                 <a:cs typeface="Trebuchet MS" pitchFamily="34" charset="-120"/>
               </a:rPr>
-              <a:t>m</a:t>
+              <a:t>n</a:t>
             </a:r>
             <a:endParaRPr lang="en-US" sz="900" dirty="0"/>
           </a:p>
@@ -28469,18 +28799,18 @@
       </p:sp>
       <p:sp>
         <p:nvSpPr>
-          <p:cNvPr id="54" name="Shape 52"/>
-          <p:cNvSpPr/>
-          <p:nvPr/>
-        </p:nvSpPr>
-        <p:spPr>
-          <a:xfrm>
-            <a:off x="6525491" y="4169664"/>
-            <a:ext cx="603504" cy="384048"/>
+          <p:cNvPr id="53" name="Shape 51"/>
+          <p:cNvSpPr/>
+          <p:nvPr/>
+        </p:nvSpPr>
+        <p:spPr>
+          <a:xfrm>
+            <a:off x="7677912" y="4169664"/>
+            <a:ext cx="685800" cy="475488"/>
           </a:xfrm>
           <a:prstGeom prst="rect">
             <a:avLst>
-              <a:gd name="adj" fmla="val 9524"/>
+              <a:gd name="adj" fmla="val 7692"/>
             </a:avLst>
           </a:prstGeom>
           <a:solidFill>
@@ -28496,146 +28826,14 @@
       </p:sp>
       <p:sp>
         <p:nvSpPr>
-          <p:cNvPr id="55" name="Text 53"/>
-          <p:cNvSpPr/>
-          <p:nvPr/>
-        </p:nvSpPr>
-        <p:spPr>
-          <a:xfrm>
-            <a:off x="6525491" y="4169664"/>
-            <a:ext cx="603504" cy="384048"/>
-          </a:xfrm>
-          <a:prstGeom prst="rect">
-            <a:avLst/>
-          </a:prstGeom>
-          <a:noFill/>
-          <a:ln/>
-        </p:spPr>
-        <p:txBody>
-          <a:bodyPr wrap="square" lIns="0" tIns="0" rIns="0" bIns="0" rtlCol="0" anchor="ctr"/>
-          <a:lstStyle/>
-          <a:p>
-            <a:pPr algn="ctr" indent="0" marL="0">
-              <a:buNone/>
-            </a:pPr>
-            <a:r>
-              <a:rPr lang="en-US" sz="900" b="1" dirty="0">
-                <a:solidFill>
-                  <a:srgbClr val="9D174D"/>
-                </a:solidFill>
-                <a:latin typeface="Trebuchet MS" pitchFamily="34" charset="0"/>
-                <a:ea typeface="Trebuchet MS" pitchFamily="34" charset="-122"/>
-                <a:cs typeface="Trebuchet MS" pitchFamily="34" charset="-120"/>
-              </a:rPr>
-              <a:t>e</a:t>
-            </a:r>
-            <a:endParaRPr lang="en-US" sz="900" dirty="0"/>
-          </a:p>
-        </p:txBody>
-      </p:sp>
-      <p:sp>
-        <p:nvSpPr>
-          <p:cNvPr id="56" name="Shape 54"/>
-          <p:cNvSpPr/>
-          <p:nvPr/>
-        </p:nvSpPr>
-        <p:spPr>
-          <a:xfrm>
-            <a:off x="7178871" y="4169664"/>
-            <a:ext cx="603504" cy="384048"/>
-          </a:xfrm>
-          <a:prstGeom prst="rect">
-            <a:avLst>
-              <a:gd name="adj" fmla="val 9524"/>
-            </a:avLst>
-          </a:prstGeom>
-          <a:solidFill>
-            <a:srgbClr val="FFFFFF"/>
-          </a:solidFill>
-          <a:ln w="12700">
-            <a:solidFill>
-              <a:srgbClr val="DB2777"/>
-            </a:solidFill>
-            <a:prstDash val="solid"/>
-          </a:ln>
-        </p:spPr>
-      </p:sp>
-      <p:sp>
-        <p:nvSpPr>
-          <p:cNvPr id="57" name="Text 55"/>
-          <p:cNvSpPr/>
-          <p:nvPr/>
-        </p:nvSpPr>
-        <p:spPr>
-          <a:xfrm>
-            <a:off x="7178871" y="4169664"/>
-            <a:ext cx="603504" cy="384048"/>
-          </a:xfrm>
-          <a:prstGeom prst="rect">
-            <a:avLst/>
-          </a:prstGeom>
-          <a:noFill/>
-          <a:ln/>
-        </p:spPr>
-        <p:txBody>
-          <a:bodyPr wrap="square" lIns="0" tIns="0" rIns="0" bIns="0" rtlCol="0" anchor="ctr"/>
-          <a:lstStyle/>
-          <a:p>
-            <a:pPr algn="ctr" indent="0" marL="0">
-              <a:buNone/>
-            </a:pPr>
-            <a:r>
-              <a:rPr lang="en-US" sz="900" b="1" dirty="0">
-                <a:solidFill>
-                  <a:srgbClr val="9D174D"/>
-                </a:solidFill>
-                <a:latin typeface="Trebuchet MS" pitchFamily="34" charset="0"/>
-                <a:ea typeface="Trebuchet MS" pitchFamily="34" charset="-122"/>
-                <a:cs typeface="Trebuchet MS" pitchFamily="34" charset="-120"/>
-              </a:rPr>
-              <a:t>n</a:t>
-            </a:r>
-            <a:endParaRPr lang="en-US" sz="900" dirty="0"/>
-          </a:p>
-        </p:txBody>
-      </p:sp>
-      <p:sp>
-        <p:nvSpPr>
-          <p:cNvPr id="58" name="Shape 56"/>
-          <p:cNvSpPr/>
-          <p:nvPr/>
-        </p:nvSpPr>
-        <p:spPr>
-          <a:xfrm>
-            <a:off x="7832252" y="4169664"/>
-            <a:ext cx="603504" cy="384048"/>
-          </a:xfrm>
-          <a:prstGeom prst="rect">
-            <a:avLst>
-              <a:gd name="adj" fmla="val 9524"/>
-            </a:avLst>
-          </a:prstGeom>
-          <a:solidFill>
-            <a:srgbClr val="FFFFFF"/>
-          </a:solidFill>
-          <a:ln w="12700">
-            <a:solidFill>
-              <a:srgbClr val="DB2777"/>
-            </a:solidFill>
-            <a:prstDash val="solid"/>
-          </a:ln>
-        </p:spPr>
-      </p:sp>
-      <p:sp>
-        <p:nvSpPr>
-          <p:cNvPr id="59" name="Text 57"/>
-          <p:cNvSpPr/>
-          <p:nvPr/>
-        </p:nvSpPr>
-        <p:spPr>
-          <a:xfrm>
-            <a:off x="7832252" y="4169664"/>
-            <a:ext cx="603504" cy="384048"/>
+          <p:cNvPr id="54" name="Text 52"/>
+          <p:cNvSpPr/>
+          <p:nvPr/>
+        </p:nvSpPr>
+        <p:spPr>
+          <a:xfrm>
+            <a:off x="7677912" y="4169664"/>
+            <a:ext cx="685800" cy="475488"/>
           </a:xfrm>
           <a:prstGeom prst="rect">
             <a:avLst/>
@@ -28951,7 +29149,7 @@
                 <a:ea typeface="Calibri" pitchFamily="34" charset="-122"/>
                 <a:cs typeface="Calibri" pitchFamily="34" charset="-120"/>
               </a:rPr>
-              <a:t>Word Labs  •  wordlabs.app  •  Root: 'part' = piece, share, divide</a:t>
+              <a:t>Word Labs  •  wordlabs.app  •  Root: 'part' = a piece of something; a section</a:t>
             </a:r>
             <a:endParaRPr lang="en-US" sz="800" dirty="0"/>
           </a:p>
@@ -29090,7 +29288,7 @@
                 <a:ea typeface="Trebuchet MS" pitchFamily="34" charset="-122"/>
                 <a:cs typeface="Trebuchet MS" pitchFamily="34" charset="-120"/>
               </a:rPr>
-              <a:t>particle</a:t>
+              <a:t>apartments</a:t>
             </a:r>
             <a:endParaRPr lang="en-US" sz="2800" dirty="0"/>
           </a:p>
@@ -29778,7 +29976,7 @@
                 <a:ea typeface="Calibri" pitchFamily="34" charset="-122"/>
                 <a:cs typeface="Calibri" pitchFamily="34" charset="-120"/>
               </a:rPr>
-              <a:t>Word Labs  •  wordlabs.app  •  Root: 'part' = piece, share, divide</a:t>
+              <a:t>Word Labs  •  wordlabs.app  •  Root: 'part' = a piece of something; a section</a:t>
             </a:r>
             <a:endParaRPr lang="en-US" sz="800" dirty="0"/>
           </a:p>
@@ -29917,7 +30115,7 @@
                 <a:ea typeface="Trebuchet MS" pitchFamily="34" charset="-122"/>
                 <a:cs typeface="Trebuchet MS" pitchFamily="34" charset="-120"/>
               </a:rPr>
-              <a:t>particle</a:t>
+              <a:t>apartments</a:t>
             </a:r>
             <a:endParaRPr lang="en-US" sz="2800" dirty="0"/>
           </a:p>
@@ -29997,8 +30195,8 @@
         </p:nvSpPr>
         <p:spPr>
           <a:xfrm>
-            <a:off x="2938272" y="2258568"/>
-            <a:ext cx="1828800" cy="292608"/>
+            <a:off x="1989734" y="2258568"/>
+            <a:ext cx="1581912" cy="292608"/>
           </a:xfrm>
           <a:prstGeom prst="rect">
             <a:avLst>
@@ -30006,11 +30204,11 @@
             </a:avLst>
           </a:prstGeom>
           <a:solidFill>
-            <a:srgbClr val="CCFBF1"/>
+            <a:srgbClr val="DDD6FE"/>
           </a:solidFill>
           <a:ln w="19050">
             <a:solidFill>
-              <a:srgbClr val="0D9488"/>
+              <a:srgbClr val="7C3AED"/>
             </a:solidFill>
             <a:prstDash val="solid"/>
           </a:ln>
@@ -30031,8 +30229,8 @@
         </p:nvSpPr>
         <p:spPr>
           <a:xfrm>
-            <a:off x="2938272" y="2258568"/>
-            <a:ext cx="1828800" cy="292608"/>
+            <a:off x="1989734" y="2258568"/>
+            <a:ext cx="1581912" cy="292608"/>
           </a:xfrm>
           <a:prstGeom prst="rect">
             <a:avLst/>
@@ -30050,13 +30248,13 @@
             <a:r>
               <a:rPr lang="en-US" sz="1300" b="1" dirty="0">
                 <a:solidFill>
-                  <a:srgbClr val="0F766E"/>
+                  <a:srgbClr val="4C1D95"/>
                 </a:solidFill>
                 <a:latin typeface="Trebuchet MS" pitchFamily="34" charset="0"/>
                 <a:ea typeface="Trebuchet MS" pitchFamily="34" charset="-122"/>
                 <a:cs typeface="Trebuchet MS" pitchFamily="34" charset="-120"/>
               </a:rPr>
-              <a:t>part</a:t>
+              <a:t>a</a:t>
             </a:r>
             <a:endParaRPr lang="en-US" sz="1300" dirty="0"/>
           </a:p>
@@ -30070,8 +30268,8 @@
         </p:nvSpPr>
         <p:spPr>
           <a:xfrm>
-            <a:off x="2938272" y="2569464"/>
-            <a:ext cx="1828800" cy="201168"/>
+            <a:off x="1989734" y="2569464"/>
+            <a:ext cx="1581912" cy="201168"/>
           </a:xfrm>
           <a:prstGeom prst="rect">
             <a:avLst/>
@@ -30095,7 +30293,7 @@
                 <a:ea typeface="Calibri" pitchFamily="34" charset="-122"/>
                 <a:cs typeface="Calibri" pitchFamily="34" charset="-120"/>
               </a:rPr>
-              <a:t>piece, share, divide</a:t>
+              <a:t>not; without</a:t>
             </a:r>
             <a:endParaRPr lang="en-US" sz="850" dirty="0"/>
           </a:p>
@@ -30109,8 +30307,8 @@
         </p:nvSpPr>
         <p:spPr>
           <a:xfrm>
-            <a:off x="5803392" y="2258568"/>
-            <a:ext cx="1828800" cy="292608"/>
+            <a:off x="3659429" y="2258568"/>
+            <a:ext cx="1581912" cy="292608"/>
           </a:xfrm>
           <a:prstGeom prst="rect">
             <a:avLst>
@@ -30118,11 +30316,11 @@
             </a:avLst>
           </a:prstGeom>
           <a:solidFill>
-            <a:srgbClr val="DDD6FE"/>
+            <a:srgbClr val="CCFBF1"/>
           </a:solidFill>
           <a:ln w="19050">
             <a:solidFill>
-              <a:srgbClr val="7C3AED"/>
+              <a:srgbClr val="0D9488"/>
             </a:solidFill>
             <a:prstDash val="solid"/>
           </a:ln>
@@ -30143,8 +30341,8 @@
         </p:nvSpPr>
         <p:spPr>
           <a:xfrm>
-            <a:off x="5803392" y="2258568"/>
-            <a:ext cx="1828800" cy="292608"/>
+            <a:off x="3659429" y="2258568"/>
+            <a:ext cx="1581912" cy="292608"/>
           </a:xfrm>
           <a:prstGeom prst="rect">
             <a:avLst/>
@@ -30162,13 +30360,13 @@
             <a:r>
               <a:rPr lang="en-US" sz="1300" b="1" dirty="0">
                 <a:solidFill>
-                  <a:srgbClr val="4C1D95"/>
+                  <a:srgbClr val="0F766E"/>
                 </a:solidFill>
                 <a:latin typeface="Trebuchet MS" pitchFamily="34" charset="0"/>
                 <a:ea typeface="Trebuchet MS" pitchFamily="34" charset="-122"/>
                 <a:cs typeface="Trebuchet MS" pitchFamily="34" charset="-120"/>
               </a:rPr>
-              <a:t>icle</a:t>
+              <a:t>part</a:t>
             </a:r>
             <a:endParaRPr lang="en-US" sz="1300" dirty="0"/>
           </a:p>
@@ -30182,8 +30380,8 @@
         </p:nvSpPr>
         <p:spPr>
           <a:xfrm>
-            <a:off x="5803392" y="2569464"/>
-            <a:ext cx="1828800" cy="201168"/>
+            <a:off x="3659429" y="2569464"/>
+            <a:ext cx="1581912" cy="201168"/>
           </a:xfrm>
           <a:prstGeom prst="rect">
             <a:avLst/>
@@ -30207,7 +30405,7 @@
                 <a:ea typeface="Calibri" pitchFamily="34" charset="-122"/>
                 <a:cs typeface="Calibri" pitchFamily="34" charset="-120"/>
               </a:rPr>
-              <a:t>small one</a:t>
+              <a:t>a piece of something; a section</a:t>
             </a:r>
             <a:endParaRPr lang="en-US" sz="850" dirty="0"/>
           </a:p>
@@ -30216,6 +30414,230 @@
       <p:sp>
         <p:nvSpPr>
           <p:cNvPr id="22" name="Shape 20"/>
+          <p:cNvSpPr/>
+          <p:nvPr/>
+        </p:nvSpPr>
+        <p:spPr>
+          <a:xfrm>
+            <a:off x="5329123" y="2258568"/>
+            <a:ext cx="1581912" cy="292608"/>
+          </a:xfrm>
+          <a:prstGeom prst="rect">
+            <a:avLst>
+              <a:gd name="adj" fmla="val 25000"/>
+            </a:avLst>
+          </a:prstGeom>
+          <a:solidFill>
+            <a:srgbClr val="FCE7F3"/>
+          </a:solidFill>
+          <a:ln w="19050">
+            <a:solidFill>
+              <a:srgbClr val="DB2777"/>
+            </a:solidFill>
+            <a:prstDash val="solid"/>
+          </a:ln>
+          <a:effectLst>
+            <a:outerShdw sx="100000" sy="100000" kx="0" ky="0" algn="bl" rotWithShape="0" blurRad="101600" dist="38100" dir="8100000">
+              <a:srgbClr val="000000">
+                <a:alpha val="12000"/>
+              </a:srgbClr>
+            </a:outerShdw>
+          </a:effectLst>
+        </p:spPr>
+      </p:sp>
+      <p:sp>
+        <p:nvSpPr>
+          <p:cNvPr id="23" name="Text 21"/>
+          <p:cNvSpPr/>
+          <p:nvPr/>
+        </p:nvSpPr>
+        <p:spPr>
+          <a:xfrm>
+            <a:off x="5329123" y="2258568"/>
+            <a:ext cx="1581912" cy="292608"/>
+          </a:xfrm>
+          <a:prstGeom prst="rect">
+            <a:avLst/>
+          </a:prstGeom>
+          <a:noFill/>
+          <a:ln/>
+        </p:spPr>
+        <p:txBody>
+          <a:bodyPr wrap="square" lIns="0" tIns="0" rIns="0" bIns="0" rtlCol="0" anchor="ctr"/>
+          <a:lstStyle/>
+          <a:p>
+            <a:pPr algn="ctr" indent="0" marL="0">
+              <a:buNone/>
+            </a:pPr>
+            <a:r>
+              <a:rPr lang="en-US" sz="1300" b="1" dirty="0">
+                <a:solidFill>
+                  <a:srgbClr val="9D174D"/>
+                </a:solidFill>
+                <a:latin typeface="Trebuchet MS" pitchFamily="34" charset="0"/>
+                <a:ea typeface="Trebuchet MS" pitchFamily="34" charset="-122"/>
+                <a:cs typeface="Trebuchet MS" pitchFamily="34" charset="-120"/>
+              </a:rPr>
+              <a:t>ment</a:t>
+            </a:r>
+            <a:endParaRPr lang="en-US" sz="1300" dirty="0"/>
+          </a:p>
+        </p:txBody>
+      </p:sp>
+      <p:sp>
+        <p:nvSpPr>
+          <p:cNvPr id="24" name="Text 22"/>
+          <p:cNvSpPr/>
+          <p:nvPr/>
+        </p:nvSpPr>
+        <p:spPr>
+          <a:xfrm>
+            <a:off x="5329123" y="2569464"/>
+            <a:ext cx="1581912" cy="201168"/>
+          </a:xfrm>
+          <a:prstGeom prst="rect">
+            <a:avLst/>
+          </a:prstGeom>
+          <a:noFill/>
+          <a:ln/>
+        </p:spPr>
+        <p:txBody>
+          <a:bodyPr wrap="square" lIns="0" tIns="0" rIns="0" bIns="0" rtlCol="0" anchor="t"/>
+          <a:lstStyle/>
+          <a:p>
+            <a:pPr algn="ctr" indent="0" marL="0">
+              <a:buNone/>
+            </a:pPr>
+            <a:r>
+              <a:rPr lang="en-US" sz="850" dirty="0">
+                <a:solidFill>
+                  <a:srgbClr val="475569"/>
+                </a:solidFill>
+                <a:latin typeface="Calibri" pitchFamily="34" charset="0"/>
+                <a:ea typeface="Calibri" pitchFamily="34" charset="-122"/>
+                <a:cs typeface="Calibri" pitchFamily="34" charset="-120"/>
+              </a:rPr>
+              <a:t>result of action</a:t>
+            </a:r>
+            <a:endParaRPr lang="en-US" sz="850" dirty="0"/>
+          </a:p>
+        </p:txBody>
+      </p:sp>
+      <p:sp>
+        <p:nvSpPr>
+          <p:cNvPr id="25" name="Shape 23"/>
+          <p:cNvSpPr/>
+          <p:nvPr/>
+        </p:nvSpPr>
+        <p:spPr>
+          <a:xfrm>
+            <a:off x="6998818" y="2258568"/>
+            <a:ext cx="1581912" cy="292608"/>
+          </a:xfrm>
+          <a:prstGeom prst="rect">
+            <a:avLst>
+              <a:gd name="adj" fmla="val 25000"/>
+            </a:avLst>
+          </a:prstGeom>
+          <a:solidFill>
+            <a:srgbClr val="FCE7F3"/>
+          </a:solidFill>
+          <a:ln w="19050">
+            <a:solidFill>
+              <a:srgbClr val="DB2777"/>
+            </a:solidFill>
+            <a:prstDash val="solid"/>
+          </a:ln>
+          <a:effectLst>
+            <a:outerShdw sx="100000" sy="100000" kx="0" ky="0" algn="bl" rotWithShape="0" blurRad="101600" dist="38100" dir="8100000">
+              <a:srgbClr val="000000">
+                <a:alpha val="12000"/>
+              </a:srgbClr>
+            </a:outerShdw>
+          </a:effectLst>
+        </p:spPr>
+      </p:sp>
+      <p:sp>
+        <p:nvSpPr>
+          <p:cNvPr id="26" name="Text 24"/>
+          <p:cNvSpPr/>
+          <p:nvPr/>
+        </p:nvSpPr>
+        <p:spPr>
+          <a:xfrm>
+            <a:off x="6998818" y="2258568"/>
+            <a:ext cx="1581912" cy="292608"/>
+          </a:xfrm>
+          <a:prstGeom prst="rect">
+            <a:avLst/>
+          </a:prstGeom>
+          <a:noFill/>
+          <a:ln/>
+        </p:spPr>
+        <p:txBody>
+          <a:bodyPr wrap="square" lIns="0" tIns="0" rIns="0" bIns="0" rtlCol="0" anchor="ctr"/>
+          <a:lstStyle/>
+          <a:p>
+            <a:pPr algn="ctr" indent="0" marL="0">
+              <a:buNone/>
+            </a:pPr>
+            <a:r>
+              <a:rPr lang="en-US" sz="1300" b="1" dirty="0">
+                <a:solidFill>
+                  <a:srgbClr val="9D174D"/>
+                </a:solidFill>
+                <a:latin typeface="Trebuchet MS" pitchFamily="34" charset="0"/>
+                <a:ea typeface="Trebuchet MS" pitchFamily="34" charset="-122"/>
+                <a:cs typeface="Trebuchet MS" pitchFamily="34" charset="-120"/>
+              </a:rPr>
+              <a:t>s</a:t>
+            </a:r>
+            <a:endParaRPr lang="en-US" sz="1300" dirty="0"/>
+          </a:p>
+        </p:txBody>
+      </p:sp>
+      <p:sp>
+        <p:nvSpPr>
+          <p:cNvPr id="27" name="Text 25"/>
+          <p:cNvSpPr/>
+          <p:nvPr/>
+        </p:nvSpPr>
+        <p:spPr>
+          <a:xfrm>
+            <a:off x="6998818" y="2569464"/>
+            <a:ext cx="1581912" cy="201168"/>
+          </a:xfrm>
+          <a:prstGeom prst="rect">
+            <a:avLst/>
+          </a:prstGeom>
+          <a:noFill/>
+          <a:ln/>
+        </p:spPr>
+        <p:txBody>
+          <a:bodyPr wrap="square" lIns="0" tIns="0" rIns="0" bIns="0" rtlCol="0" anchor="t"/>
+          <a:lstStyle/>
+          <a:p>
+            <a:pPr algn="ctr" indent="0" marL="0">
+              <a:buNone/>
+            </a:pPr>
+            <a:r>
+              <a:rPr lang="en-US" sz="850" dirty="0">
+                <a:solidFill>
+                  <a:srgbClr val="475569"/>
+                </a:solidFill>
+                <a:latin typeface="Calibri" pitchFamily="34" charset="0"/>
+                <a:ea typeface="Calibri" pitchFamily="34" charset="-122"/>
+                <a:cs typeface="Calibri" pitchFamily="34" charset="-120"/>
+              </a:rPr>
+              <a:t>plural or present tense</a:t>
+            </a:r>
+            <a:endParaRPr lang="en-US" sz="850" dirty="0"/>
+          </a:p>
+        </p:txBody>
+      </p:sp>
+      <p:sp>
+        <p:nvSpPr>
+          <p:cNvPr id="28" name="Shape 26"/>
           <p:cNvSpPr/>
           <p:nvPr/>
         </p:nvSpPr>
@@ -30242,7 +30664,7 @@
       </p:sp>
       <p:sp>
         <p:nvSpPr>
-          <p:cNvPr id="23" name="Text 21"/>
+          <p:cNvPr id="29" name="Text 27"/>
           <p:cNvSpPr/>
           <p:nvPr/>
         </p:nvSpPr>
@@ -30281,7 +30703,7 @@
       </p:sp>
       <p:sp>
         <p:nvSpPr>
-          <p:cNvPr id="24" name="Shape 22"/>
+          <p:cNvPr id="30" name="Shape 28"/>
           <p:cNvSpPr/>
           <p:nvPr/>
         </p:nvSpPr>
@@ -30308,7 +30730,7 @@
       </p:sp>
       <p:sp>
         <p:nvSpPr>
-          <p:cNvPr id="25" name="Text 23"/>
+          <p:cNvPr id="31" name="Text 29"/>
           <p:cNvSpPr/>
           <p:nvPr/>
         </p:nvSpPr>
@@ -30347,7 +30769,7 @@
       </p:sp>
       <p:sp>
         <p:nvSpPr>
-          <p:cNvPr id="26" name="Shape 24"/>
+          <p:cNvPr id="32" name="Shape 30"/>
           <p:cNvSpPr/>
           <p:nvPr/>
         </p:nvSpPr>
@@ -30374,7 +30796,7 @@
       </p:sp>
       <p:sp>
         <p:nvSpPr>
-          <p:cNvPr id="27" name="Text 25"/>
+          <p:cNvPr id="33" name="Text 31"/>
           <p:cNvSpPr/>
           <p:nvPr/>
         </p:nvSpPr>
@@ -30413,7 +30835,7 @@
       </p:sp>
       <p:sp>
         <p:nvSpPr>
-          <p:cNvPr id="28" name="Shape 26"/>
+          <p:cNvPr id="34" name="Shape 32"/>
           <p:cNvSpPr/>
           <p:nvPr/>
         </p:nvSpPr>
@@ -30440,7 +30862,7 @@
       </p:sp>
       <p:sp>
         <p:nvSpPr>
-          <p:cNvPr id="29" name="Text 27"/>
+          <p:cNvPr id="35" name="Text 33"/>
           <p:cNvSpPr/>
           <p:nvPr/>
         </p:nvSpPr>
@@ -30763,7 +31185,7 @@
                 <a:ea typeface="Calibri" pitchFamily="34" charset="-122"/>
                 <a:cs typeface="Calibri" pitchFamily="34" charset="-120"/>
               </a:rPr>
-              <a:t>Word Labs  •  wordlabs.app  •  Root: 'part' = piece, share, divide</a:t>
+              <a:t>Word Labs  •  wordlabs.app  •  Root: 'part' = a piece of something; a section</a:t>
             </a:r>
             <a:endParaRPr lang="en-US" sz="800" dirty="0"/>
           </a:p>
@@ -30902,7 +31324,7 @@
                 <a:ea typeface="Trebuchet MS" pitchFamily="34" charset="-122"/>
                 <a:cs typeface="Trebuchet MS" pitchFamily="34" charset="-120"/>
               </a:rPr>
-              <a:t>particle</a:t>
+              <a:t>apartments</a:t>
             </a:r>
             <a:endParaRPr lang="en-US" sz="2800" dirty="0"/>
           </a:p>
@@ -30982,8 +31404,8 @@
         </p:nvSpPr>
         <p:spPr>
           <a:xfrm>
-            <a:off x="2938272" y="2258568"/>
-            <a:ext cx="1828800" cy="292608"/>
+            <a:off x="1989734" y="2258568"/>
+            <a:ext cx="1581912" cy="292608"/>
           </a:xfrm>
           <a:prstGeom prst="rect">
             <a:avLst>
@@ -30991,11 +31413,11 @@
             </a:avLst>
           </a:prstGeom>
           <a:solidFill>
-            <a:srgbClr val="CCFBF1"/>
+            <a:srgbClr val="DDD6FE"/>
           </a:solidFill>
           <a:ln w="19050">
             <a:solidFill>
-              <a:srgbClr val="0D9488"/>
+              <a:srgbClr val="7C3AED"/>
             </a:solidFill>
             <a:prstDash val="solid"/>
           </a:ln>
@@ -31016,8 +31438,8 @@
         </p:nvSpPr>
         <p:spPr>
           <a:xfrm>
-            <a:off x="2938272" y="2258568"/>
-            <a:ext cx="1828800" cy="292608"/>
+            <a:off x="1989734" y="2258568"/>
+            <a:ext cx="1581912" cy="292608"/>
           </a:xfrm>
           <a:prstGeom prst="rect">
             <a:avLst/>
@@ -31035,13 +31457,13 @@
             <a:r>
               <a:rPr lang="en-US" sz="1300" b="1" dirty="0">
                 <a:solidFill>
-                  <a:srgbClr val="0F766E"/>
+                  <a:srgbClr val="4C1D95"/>
                 </a:solidFill>
                 <a:latin typeface="Trebuchet MS" pitchFamily="34" charset="0"/>
                 <a:ea typeface="Trebuchet MS" pitchFamily="34" charset="-122"/>
                 <a:cs typeface="Trebuchet MS" pitchFamily="34" charset="-120"/>
               </a:rPr>
-              <a:t>part</a:t>
+              <a:t>a</a:t>
             </a:r>
             <a:endParaRPr lang="en-US" sz="1300" dirty="0"/>
           </a:p>
@@ -31055,8 +31477,8 @@
         </p:nvSpPr>
         <p:spPr>
           <a:xfrm>
-            <a:off x="2938272" y="2569464"/>
-            <a:ext cx="1828800" cy="201168"/>
+            <a:off x="1989734" y="2569464"/>
+            <a:ext cx="1581912" cy="201168"/>
           </a:xfrm>
           <a:prstGeom prst="rect">
             <a:avLst/>
@@ -31080,7 +31502,7 @@
                 <a:ea typeface="Calibri" pitchFamily="34" charset="-122"/>
                 <a:cs typeface="Calibri" pitchFamily="34" charset="-120"/>
               </a:rPr>
-              <a:t>piece, share, divide</a:t>
+              <a:t>not; without</a:t>
             </a:r>
             <a:endParaRPr lang="en-US" sz="850" dirty="0"/>
           </a:p>
@@ -31094,8 +31516,8 @@
         </p:nvSpPr>
         <p:spPr>
           <a:xfrm>
-            <a:off x="5803392" y="2258568"/>
-            <a:ext cx="1828800" cy="292608"/>
+            <a:off x="3659429" y="2258568"/>
+            <a:ext cx="1581912" cy="292608"/>
           </a:xfrm>
           <a:prstGeom prst="rect">
             <a:avLst>
@@ -31103,11 +31525,11 @@
             </a:avLst>
           </a:prstGeom>
           <a:solidFill>
-            <a:srgbClr val="DDD6FE"/>
+            <a:srgbClr val="CCFBF1"/>
           </a:solidFill>
           <a:ln w="19050">
             <a:solidFill>
-              <a:srgbClr val="7C3AED"/>
+              <a:srgbClr val="0D9488"/>
             </a:solidFill>
             <a:prstDash val="solid"/>
           </a:ln>
@@ -31128,8 +31550,8 @@
         </p:nvSpPr>
         <p:spPr>
           <a:xfrm>
-            <a:off x="5803392" y="2258568"/>
-            <a:ext cx="1828800" cy="292608"/>
+            <a:off x="3659429" y="2258568"/>
+            <a:ext cx="1581912" cy="292608"/>
           </a:xfrm>
           <a:prstGeom prst="rect">
             <a:avLst/>
@@ -31147,13 +31569,13 @@
             <a:r>
               <a:rPr lang="en-US" sz="1300" b="1" dirty="0">
                 <a:solidFill>
-                  <a:srgbClr val="4C1D95"/>
+                  <a:srgbClr val="0F766E"/>
                 </a:solidFill>
                 <a:latin typeface="Trebuchet MS" pitchFamily="34" charset="0"/>
                 <a:ea typeface="Trebuchet MS" pitchFamily="34" charset="-122"/>
                 <a:cs typeface="Trebuchet MS" pitchFamily="34" charset="-120"/>
               </a:rPr>
-              <a:t>icle</a:t>
+              <a:t>part</a:t>
             </a:r>
             <a:endParaRPr lang="en-US" sz="1300" dirty="0"/>
           </a:p>
@@ -31167,8 +31589,8 @@
         </p:nvSpPr>
         <p:spPr>
           <a:xfrm>
-            <a:off x="5803392" y="2569464"/>
-            <a:ext cx="1828800" cy="201168"/>
+            <a:off x="3659429" y="2569464"/>
+            <a:ext cx="1581912" cy="201168"/>
           </a:xfrm>
           <a:prstGeom prst="rect">
             <a:avLst/>
@@ -31192,7 +31614,7 @@
                 <a:ea typeface="Calibri" pitchFamily="34" charset="-122"/>
                 <a:cs typeface="Calibri" pitchFamily="34" charset="-120"/>
               </a:rPr>
-              <a:t>small one</a:t>
+              <a:t>a piece of something; a section</a:t>
             </a:r>
             <a:endParaRPr lang="en-US" sz="850" dirty="0"/>
           </a:p>
@@ -31201,6 +31623,230 @@
       <p:sp>
         <p:nvSpPr>
           <p:cNvPr id="22" name="Shape 20"/>
+          <p:cNvSpPr/>
+          <p:nvPr/>
+        </p:nvSpPr>
+        <p:spPr>
+          <a:xfrm>
+            <a:off x="5329123" y="2258568"/>
+            <a:ext cx="1581912" cy="292608"/>
+          </a:xfrm>
+          <a:prstGeom prst="rect">
+            <a:avLst>
+              <a:gd name="adj" fmla="val 25000"/>
+            </a:avLst>
+          </a:prstGeom>
+          <a:solidFill>
+            <a:srgbClr val="FCE7F3"/>
+          </a:solidFill>
+          <a:ln w="19050">
+            <a:solidFill>
+              <a:srgbClr val="DB2777"/>
+            </a:solidFill>
+            <a:prstDash val="solid"/>
+          </a:ln>
+          <a:effectLst>
+            <a:outerShdw sx="100000" sy="100000" kx="0" ky="0" algn="bl" rotWithShape="0" blurRad="101600" dist="38100" dir="8100000">
+              <a:srgbClr val="000000">
+                <a:alpha val="12000"/>
+              </a:srgbClr>
+            </a:outerShdw>
+          </a:effectLst>
+        </p:spPr>
+      </p:sp>
+      <p:sp>
+        <p:nvSpPr>
+          <p:cNvPr id="23" name="Text 21"/>
+          <p:cNvSpPr/>
+          <p:nvPr/>
+        </p:nvSpPr>
+        <p:spPr>
+          <a:xfrm>
+            <a:off x="5329123" y="2258568"/>
+            <a:ext cx="1581912" cy="292608"/>
+          </a:xfrm>
+          <a:prstGeom prst="rect">
+            <a:avLst/>
+          </a:prstGeom>
+          <a:noFill/>
+          <a:ln/>
+        </p:spPr>
+        <p:txBody>
+          <a:bodyPr wrap="square" lIns="0" tIns="0" rIns="0" bIns="0" rtlCol="0" anchor="ctr"/>
+          <a:lstStyle/>
+          <a:p>
+            <a:pPr algn="ctr" indent="0" marL="0">
+              <a:buNone/>
+            </a:pPr>
+            <a:r>
+              <a:rPr lang="en-US" sz="1300" b="1" dirty="0">
+                <a:solidFill>
+                  <a:srgbClr val="9D174D"/>
+                </a:solidFill>
+                <a:latin typeface="Trebuchet MS" pitchFamily="34" charset="0"/>
+                <a:ea typeface="Trebuchet MS" pitchFamily="34" charset="-122"/>
+                <a:cs typeface="Trebuchet MS" pitchFamily="34" charset="-120"/>
+              </a:rPr>
+              <a:t>ment</a:t>
+            </a:r>
+            <a:endParaRPr lang="en-US" sz="1300" dirty="0"/>
+          </a:p>
+        </p:txBody>
+      </p:sp>
+      <p:sp>
+        <p:nvSpPr>
+          <p:cNvPr id="24" name="Text 22"/>
+          <p:cNvSpPr/>
+          <p:nvPr/>
+        </p:nvSpPr>
+        <p:spPr>
+          <a:xfrm>
+            <a:off x="5329123" y="2569464"/>
+            <a:ext cx="1581912" cy="201168"/>
+          </a:xfrm>
+          <a:prstGeom prst="rect">
+            <a:avLst/>
+          </a:prstGeom>
+          <a:noFill/>
+          <a:ln/>
+        </p:spPr>
+        <p:txBody>
+          <a:bodyPr wrap="square" lIns="0" tIns="0" rIns="0" bIns="0" rtlCol="0" anchor="t"/>
+          <a:lstStyle/>
+          <a:p>
+            <a:pPr algn="ctr" indent="0" marL="0">
+              <a:buNone/>
+            </a:pPr>
+            <a:r>
+              <a:rPr lang="en-US" sz="850" dirty="0">
+                <a:solidFill>
+                  <a:srgbClr val="475569"/>
+                </a:solidFill>
+                <a:latin typeface="Calibri" pitchFamily="34" charset="0"/>
+                <a:ea typeface="Calibri" pitchFamily="34" charset="-122"/>
+                <a:cs typeface="Calibri" pitchFamily="34" charset="-120"/>
+              </a:rPr>
+              <a:t>result of action</a:t>
+            </a:r>
+            <a:endParaRPr lang="en-US" sz="850" dirty="0"/>
+          </a:p>
+        </p:txBody>
+      </p:sp>
+      <p:sp>
+        <p:nvSpPr>
+          <p:cNvPr id="25" name="Shape 23"/>
+          <p:cNvSpPr/>
+          <p:nvPr/>
+        </p:nvSpPr>
+        <p:spPr>
+          <a:xfrm>
+            <a:off x="6998818" y="2258568"/>
+            <a:ext cx="1581912" cy="292608"/>
+          </a:xfrm>
+          <a:prstGeom prst="rect">
+            <a:avLst>
+              <a:gd name="adj" fmla="val 25000"/>
+            </a:avLst>
+          </a:prstGeom>
+          <a:solidFill>
+            <a:srgbClr val="FCE7F3"/>
+          </a:solidFill>
+          <a:ln w="19050">
+            <a:solidFill>
+              <a:srgbClr val="DB2777"/>
+            </a:solidFill>
+            <a:prstDash val="solid"/>
+          </a:ln>
+          <a:effectLst>
+            <a:outerShdw sx="100000" sy="100000" kx="0" ky="0" algn="bl" rotWithShape="0" blurRad="101600" dist="38100" dir="8100000">
+              <a:srgbClr val="000000">
+                <a:alpha val="12000"/>
+              </a:srgbClr>
+            </a:outerShdw>
+          </a:effectLst>
+        </p:spPr>
+      </p:sp>
+      <p:sp>
+        <p:nvSpPr>
+          <p:cNvPr id="26" name="Text 24"/>
+          <p:cNvSpPr/>
+          <p:nvPr/>
+        </p:nvSpPr>
+        <p:spPr>
+          <a:xfrm>
+            <a:off x="6998818" y="2258568"/>
+            <a:ext cx="1581912" cy="292608"/>
+          </a:xfrm>
+          <a:prstGeom prst="rect">
+            <a:avLst/>
+          </a:prstGeom>
+          <a:noFill/>
+          <a:ln/>
+        </p:spPr>
+        <p:txBody>
+          <a:bodyPr wrap="square" lIns="0" tIns="0" rIns="0" bIns="0" rtlCol="0" anchor="ctr"/>
+          <a:lstStyle/>
+          <a:p>
+            <a:pPr algn="ctr" indent="0" marL="0">
+              <a:buNone/>
+            </a:pPr>
+            <a:r>
+              <a:rPr lang="en-US" sz="1300" b="1" dirty="0">
+                <a:solidFill>
+                  <a:srgbClr val="9D174D"/>
+                </a:solidFill>
+                <a:latin typeface="Trebuchet MS" pitchFamily="34" charset="0"/>
+                <a:ea typeface="Trebuchet MS" pitchFamily="34" charset="-122"/>
+                <a:cs typeface="Trebuchet MS" pitchFamily="34" charset="-120"/>
+              </a:rPr>
+              <a:t>s</a:t>
+            </a:r>
+            <a:endParaRPr lang="en-US" sz="1300" dirty="0"/>
+          </a:p>
+        </p:txBody>
+      </p:sp>
+      <p:sp>
+        <p:nvSpPr>
+          <p:cNvPr id="27" name="Text 25"/>
+          <p:cNvSpPr/>
+          <p:nvPr/>
+        </p:nvSpPr>
+        <p:spPr>
+          <a:xfrm>
+            <a:off x="6998818" y="2569464"/>
+            <a:ext cx="1581912" cy="201168"/>
+          </a:xfrm>
+          <a:prstGeom prst="rect">
+            <a:avLst/>
+          </a:prstGeom>
+          <a:noFill/>
+          <a:ln/>
+        </p:spPr>
+        <p:txBody>
+          <a:bodyPr wrap="square" lIns="0" tIns="0" rIns="0" bIns="0" rtlCol="0" anchor="t"/>
+          <a:lstStyle/>
+          <a:p>
+            <a:pPr algn="ctr" indent="0" marL="0">
+              <a:buNone/>
+            </a:pPr>
+            <a:r>
+              <a:rPr lang="en-US" sz="850" dirty="0">
+                <a:solidFill>
+                  <a:srgbClr val="475569"/>
+                </a:solidFill>
+                <a:latin typeface="Calibri" pitchFamily="34" charset="0"/>
+                <a:ea typeface="Calibri" pitchFamily="34" charset="-122"/>
+                <a:cs typeface="Calibri" pitchFamily="34" charset="-120"/>
+              </a:rPr>
+              <a:t>plural or present tense</a:t>
+            </a:r>
+            <a:endParaRPr lang="en-US" sz="850" dirty="0"/>
+          </a:p>
+        </p:txBody>
+      </p:sp>
+      <p:sp>
+        <p:nvSpPr>
+          <p:cNvPr id="28" name="Shape 26"/>
           <p:cNvSpPr/>
           <p:nvPr/>
         </p:nvSpPr>
@@ -31227,7 +31873,7 @@
       </p:sp>
       <p:sp>
         <p:nvSpPr>
-          <p:cNvPr id="23" name="Text 21"/>
+          <p:cNvPr id="29" name="Text 27"/>
           <p:cNvSpPr/>
           <p:nvPr/>
         </p:nvSpPr>
@@ -31266,7 +31912,7 @@
       </p:sp>
       <p:sp>
         <p:nvSpPr>
-          <p:cNvPr id="24" name="Shape 22"/>
+          <p:cNvPr id="30" name="Shape 28"/>
           <p:cNvSpPr/>
           <p:nvPr/>
         </p:nvSpPr>
@@ -31293,7 +31939,7 @@
       </p:sp>
       <p:sp>
         <p:nvSpPr>
-          <p:cNvPr id="25" name="Shape 23"/>
+          <p:cNvPr id="31" name="Shape 29"/>
           <p:cNvSpPr/>
           <p:nvPr/>
         </p:nvSpPr>
@@ -31320,7 +31966,7 @@
       </p:sp>
       <p:sp>
         <p:nvSpPr>
-          <p:cNvPr id="26" name="Text 24"/>
+          <p:cNvPr id="32" name="Text 30"/>
           <p:cNvSpPr/>
           <p:nvPr/>
         </p:nvSpPr>
@@ -31351,7 +31997,7 @@
                 <a:ea typeface="Trebuchet MS" pitchFamily="34" charset="-122"/>
                 <a:cs typeface="Trebuchet MS" pitchFamily="34" charset="-120"/>
               </a:rPr>
-              <a:t>par</a:t>
+              <a:t>a</a:t>
             </a:r>
             <a:endParaRPr lang="en-US" sz="1400" dirty="0"/>
           </a:p>
@@ -31359,7 +32005,7 @@
       </p:sp>
       <p:sp>
         <p:nvSpPr>
-          <p:cNvPr id="27" name="Text 25"/>
+          <p:cNvPr id="33" name="Text 31"/>
           <p:cNvSpPr/>
           <p:nvPr/>
         </p:nvSpPr>
@@ -31398,7 +32044,7 @@
       </p:sp>
       <p:sp>
         <p:nvSpPr>
-          <p:cNvPr id="28" name="Shape 26"/>
+          <p:cNvPr id="34" name="Shape 32"/>
           <p:cNvSpPr/>
           <p:nvPr/>
         </p:nvSpPr>
@@ -31425,7 +32071,7 @@
       </p:sp>
       <p:sp>
         <p:nvSpPr>
-          <p:cNvPr id="29" name="Text 27"/>
+          <p:cNvPr id="35" name="Text 33"/>
           <p:cNvSpPr/>
           <p:nvPr/>
         </p:nvSpPr>
@@ -31456,7 +32102,7 @@
                 <a:ea typeface="Trebuchet MS" pitchFamily="34" charset="-122"/>
                 <a:cs typeface="Trebuchet MS" pitchFamily="34" charset="-120"/>
               </a:rPr>
-              <a:t>ti</a:t>
+              <a:t>part</a:t>
             </a:r>
             <a:endParaRPr lang="en-US" sz="1400" dirty="0"/>
           </a:p>
@@ -31464,7 +32110,7 @@
       </p:sp>
       <p:sp>
         <p:nvSpPr>
-          <p:cNvPr id="30" name="Text 28"/>
+          <p:cNvPr id="36" name="Text 34"/>
           <p:cNvSpPr/>
           <p:nvPr/>
         </p:nvSpPr>
@@ -31503,7 +32149,7 @@
       </p:sp>
       <p:sp>
         <p:nvSpPr>
-          <p:cNvPr id="31" name="Shape 29"/>
+          <p:cNvPr id="37" name="Shape 35"/>
           <p:cNvSpPr/>
           <p:nvPr/>
         </p:nvSpPr>
@@ -31530,7 +32176,7 @@
       </p:sp>
       <p:sp>
         <p:nvSpPr>
-          <p:cNvPr id="32" name="Text 30"/>
+          <p:cNvPr id="38" name="Text 36"/>
           <p:cNvSpPr/>
           <p:nvPr/>
         </p:nvSpPr>
@@ -31561,7 +32207,7 @@
                 <a:ea typeface="Trebuchet MS" pitchFamily="34" charset="-122"/>
                 <a:cs typeface="Trebuchet MS" pitchFamily="34" charset="-120"/>
               </a:rPr>
-              <a:t>cle</a:t>
+              <a:t>ments</a:t>
             </a:r>
             <a:endParaRPr lang="en-US" sz="1400" dirty="0"/>
           </a:p>
@@ -31569,7 +32215,7 @@
       </p:sp>
       <p:sp>
         <p:nvSpPr>
-          <p:cNvPr id="33" name="Shape 31"/>
+          <p:cNvPr id="39" name="Shape 37"/>
           <p:cNvSpPr/>
           <p:nvPr/>
         </p:nvSpPr>
@@ -31596,7 +32242,7 @@
       </p:sp>
       <p:sp>
         <p:nvSpPr>
-          <p:cNvPr id="34" name="Text 32"/>
+          <p:cNvPr id="40" name="Text 38"/>
           <p:cNvSpPr/>
           <p:nvPr/>
         </p:nvSpPr>
@@ -31635,7 +32281,7 @@
       </p:sp>
       <p:sp>
         <p:nvSpPr>
-          <p:cNvPr id="35" name="Shape 33"/>
+          <p:cNvPr id="41" name="Shape 39"/>
           <p:cNvSpPr/>
           <p:nvPr/>
         </p:nvSpPr>
@@ -31662,7 +32308,7 @@
       </p:sp>
       <p:sp>
         <p:nvSpPr>
-          <p:cNvPr id="36" name="Text 34"/>
+          <p:cNvPr id="42" name="Text 40"/>
           <p:cNvSpPr/>
           <p:nvPr/>
         </p:nvSpPr>
@@ -31985,7 +32631,7 @@
                 <a:ea typeface="Calibri" pitchFamily="34" charset="-122"/>
                 <a:cs typeface="Calibri" pitchFamily="34" charset="-120"/>
               </a:rPr>
-              <a:t>Word Labs  •  wordlabs.app  •  Root: 'part' = piece, share, divide</a:t>
+              <a:t>Word Labs  •  wordlabs.app  •  Root: 'part' = a piece of something; a section</a:t>
             </a:r>
             <a:endParaRPr lang="en-US" sz="800" dirty="0"/>
           </a:p>
@@ -32124,7 +32770,7 @@
                 <a:ea typeface="Trebuchet MS" pitchFamily="34" charset="-122"/>
                 <a:cs typeface="Trebuchet MS" pitchFamily="34" charset="-120"/>
               </a:rPr>
-              <a:t>particle</a:t>
+              <a:t>apartments</a:t>
             </a:r>
             <a:endParaRPr lang="en-US" sz="2800" dirty="0"/>
           </a:p>
@@ -32204,8 +32850,8 @@
         </p:nvSpPr>
         <p:spPr>
           <a:xfrm>
-            <a:off x="2938272" y="2258568"/>
-            <a:ext cx="1828800" cy="292608"/>
+            <a:off x="1989734" y="2258568"/>
+            <a:ext cx="1581912" cy="292608"/>
           </a:xfrm>
           <a:prstGeom prst="rect">
             <a:avLst>
@@ -32213,11 +32859,11 @@
             </a:avLst>
           </a:prstGeom>
           <a:solidFill>
-            <a:srgbClr val="CCFBF1"/>
+            <a:srgbClr val="DDD6FE"/>
           </a:solidFill>
           <a:ln w="19050">
             <a:solidFill>
-              <a:srgbClr val="0D9488"/>
+              <a:srgbClr val="7C3AED"/>
             </a:solidFill>
             <a:prstDash val="solid"/>
           </a:ln>
@@ -32238,8 +32884,8 @@
         </p:nvSpPr>
         <p:spPr>
           <a:xfrm>
-            <a:off x="2938272" y="2258568"/>
-            <a:ext cx="1828800" cy="292608"/>
+            <a:off x="1989734" y="2258568"/>
+            <a:ext cx="1581912" cy="292608"/>
           </a:xfrm>
           <a:prstGeom prst="rect">
             <a:avLst/>
@@ -32257,13 +32903,13 @@
             <a:r>
               <a:rPr lang="en-US" sz="1300" b="1" dirty="0">
                 <a:solidFill>
-                  <a:srgbClr val="0F766E"/>
+                  <a:srgbClr val="4C1D95"/>
                 </a:solidFill>
                 <a:latin typeface="Trebuchet MS" pitchFamily="34" charset="0"/>
                 <a:ea typeface="Trebuchet MS" pitchFamily="34" charset="-122"/>
                 <a:cs typeface="Trebuchet MS" pitchFamily="34" charset="-120"/>
               </a:rPr>
-              <a:t>part</a:t>
+              <a:t>a</a:t>
             </a:r>
             <a:endParaRPr lang="en-US" sz="1300" dirty="0"/>
           </a:p>
@@ -32277,8 +32923,8 @@
         </p:nvSpPr>
         <p:spPr>
           <a:xfrm>
-            <a:off x="2938272" y="2569464"/>
-            <a:ext cx="1828800" cy="201168"/>
+            <a:off x="1989734" y="2569464"/>
+            <a:ext cx="1581912" cy="201168"/>
           </a:xfrm>
           <a:prstGeom prst="rect">
             <a:avLst/>
@@ -32302,7 +32948,7 @@
                 <a:ea typeface="Calibri" pitchFamily="34" charset="-122"/>
                 <a:cs typeface="Calibri" pitchFamily="34" charset="-120"/>
               </a:rPr>
-              <a:t>piece, share, divide</a:t>
+              <a:t>not; without</a:t>
             </a:r>
             <a:endParaRPr lang="en-US" sz="850" dirty="0"/>
           </a:p>
@@ -32316,8 +32962,8 @@
         </p:nvSpPr>
         <p:spPr>
           <a:xfrm>
-            <a:off x="5803392" y="2258568"/>
-            <a:ext cx="1828800" cy="292608"/>
+            <a:off x="3659429" y="2258568"/>
+            <a:ext cx="1581912" cy="292608"/>
           </a:xfrm>
           <a:prstGeom prst="rect">
             <a:avLst>
@@ -32325,11 +32971,11 @@
             </a:avLst>
           </a:prstGeom>
           <a:solidFill>
-            <a:srgbClr val="DDD6FE"/>
+            <a:srgbClr val="CCFBF1"/>
           </a:solidFill>
           <a:ln w="19050">
             <a:solidFill>
-              <a:srgbClr val="7C3AED"/>
+              <a:srgbClr val="0D9488"/>
             </a:solidFill>
             <a:prstDash val="solid"/>
           </a:ln>
@@ -32350,8 +32996,8 @@
         </p:nvSpPr>
         <p:spPr>
           <a:xfrm>
-            <a:off x="5803392" y="2258568"/>
-            <a:ext cx="1828800" cy="292608"/>
+            <a:off x="3659429" y="2258568"/>
+            <a:ext cx="1581912" cy="292608"/>
           </a:xfrm>
           <a:prstGeom prst="rect">
             <a:avLst/>
@@ -32369,13 +33015,13 @@
             <a:r>
               <a:rPr lang="en-US" sz="1300" b="1" dirty="0">
                 <a:solidFill>
-                  <a:srgbClr val="4C1D95"/>
+                  <a:srgbClr val="0F766E"/>
                 </a:solidFill>
                 <a:latin typeface="Trebuchet MS" pitchFamily="34" charset="0"/>
                 <a:ea typeface="Trebuchet MS" pitchFamily="34" charset="-122"/>
                 <a:cs typeface="Trebuchet MS" pitchFamily="34" charset="-120"/>
               </a:rPr>
-              <a:t>icle</a:t>
+              <a:t>part</a:t>
             </a:r>
             <a:endParaRPr lang="en-US" sz="1300" dirty="0"/>
           </a:p>
@@ -32389,8 +33035,8 @@
         </p:nvSpPr>
         <p:spPr>
           <a:xfrm>
-            <a:off x="5803392" y="2569464"/>
-            <a:ext cx="1828800" cy="201168"/>
+            <a:off x="3659429" y="2569464"/>
+            <a:ext cx="1581912" cy="201168"/>
           </a:xfrm>
           <a:prstGeom prst="rect">
             <a:avLst/>
@@ -32414,7 +33060,7 @@
                 <a:ea typeface="Calibri" pitchFamily="34" charset="-122"/>
                 <a:cs typeface="Calibri" pitchFamily="34" charset="-120"/>
               </a:rPr>
-              <a:t>small one</a:t>
+              <a:t>a piece of something; a section</a:t>
             </a:r>
             <a:endParaRPr lang="en-US" sz="850" dirty="0"/>
           </a:p>
@@ -32423,6 +33069,230 @@
       <p:sp>
         <p:nvSpPr>
           <p:cNvPr id="22" name="Shape 20"/>
+          <p:cNvSpPr/>
+          <p:nvPr/>
+        </p:nvSpPr>
+        <p:spPr>
+          <a:xfrm>
+            <a:off x="5329123" y="2258568"/>
+            <a:ext cx="1581912" cy="292608"/>
+          </a:xfrm>
+          <a:prstGeom prst="rect">
+            <a:avLst>
+              <a:gd name="adj" fmla="val 25000"/>
+            </a:avLst>
+          </a:prstGeom>
+          <a:solidFill>
+            <a:srgbClr val="FCE7F3"/>
+          </a:solidFill>
+          <a:ln w="19050">
+            <a:solidFill>
+              <a:srgbClr val="DB2777"/>
+            </a:solidFill>
+            <a:prstDash val="solid"/>
+          </a:ln>
+          <a:effectLst>
+            <a:outerShdw sx="100000" sy="100000" kx="0" ky="0" algn="bl" rotWithShape="0" blurRad="101600" dist="38100" dir="8100000">
+              <a:srgbClr val="000000">
+                <a:alpha val="12000"/>
+              </a:srgbClr>
+            </a:outerShdw>
+          </a:effectLst>
+        </p:spPr>
+      </p:sp>
+      <p:sp>
+        <p:nvSpPr>
+          <p:cNvPr id="23" name="Text 21"/>
+          <p:cNvSpPr/>
+          <p:nvPr/>
+        </p:nvSpPr>
+        <p:spPr>
+          <a:xfrm>
+            <a:off x="5329123" y="2258568"/>
+            <a:ext cx="1581912" cy="292608"/>
+          </a:xfrm>
+          <a:prstGeom prst="rect">
+            <a:avLst/>
+          </a:prstGeom>
+          <a:noFill/>
+          <a:ln/>
+        </p:spPr>
+        <p:txBody>
+          <a:bodyPr wrap="square" lIns="0" tIns="0" rIns="0" bIns="0" rtlCol="0" anchor="ctr"/>
+          <a:lstStyle/>
+          <a:p>
+            <a:pPr algn="ctr" indent="0" marL="0">
+              <a:buNone/>
+            </a:pPr>
+            <a:r>
+              <a:rPr lang="en-US" sz="1300" b="1" dirty="0">
+                <a:solidFill>
+                  <a:srgbClr val="9D174D"/>
+                </a:solidFill>
+                <a:latin typeface="Trebuchet MS" pitchFamily="34" charset="0"/>
+                <a:ea typeface="Trebuchet MS" pitchFamily="34" charset="-122"/>
+                <a:cs typeface="Trebuchet MS" pitchFamily="34" charset="-120"/>
+              </a:rPr>
+              <a:t>ment</a:t>
+            </a:r>
+            <a:endParaRPr lang="en-US" sz="1300" dirty="0"/>
+          </a:p>
+        </p:txBody>
+      </p:sp>
+      <p:sp>
+        <p:nvSpPr>
+          <p:cNvPr id="24" name="Text 22"/>
+          <p:cNvSpPr/>
+          <p:nvPr/>
+        </p:nvSpPr>
+        <p:spPr>
+          <a:xfrm>
+            <a:off x="5329123" y="2569464"/>
+            <a:ext cx="1581912" cy="201168"/>
+          </a:xfrm>
+          <a:prstGeom prst="rect">
+            <a:avLst/>
+          </a:prstGeom>
+          <a:noFill/>
+          <a:ln/>
+        </p:spPr>
+        <p:txBody>
+          <a:bodyPr wrap="square" lIns="0" tIns="0" rIns="0" bIns="0" rtlCol="0" anchor="t"/>
+          <a:lstStyle/>
+          <a:p>
+            <a:pPr algn="ctr" indent="0" marL="0">
+              <a:buNone/>
+            </a:pPr>
+            <a:r>
+              <a:rPr lang="en-US" sz="850" dirty="0">
+                <a:solidFill>
+                  <a:srgbClr val="475569"/>
+                </a:solidFill>
+                <a:latin typeface="Calibri" pitchFamily="34" charset="0"/>
+                <a:ea typeface="Calibri" pitchFamily="34" charset="-122"/>
+                <a:cs typeface="Calibri" pitchFamily="34" charset="-120"/>
+              </a:rPr>
+              <a:t>result of action</a:t>
+            </a:r>
+            <a:endParaRPr lang="en-US" sz="850" dirty="0"/>
+          </a:p>
+        </p:txBody>
+      </p:sp>
+      <p:sp>
+        <p:nvSpPr>
+          <p:cNvPr id="25" name="Shape 23"/>
+          <p:cNvSpPr/>
+          <p:nvPr/>
+        </p:nvSpPr>
+        <p:spPr>
+          <a:xfrm>
+            <a:off x="6998818" y="2258568"/>
+            <a:ext cx="1581912" cy="292608"/>
+          </a:xfrm>
+          <a:prstGeom prst="rect">
+            <a:avLst>
+              <a:gd name="adj" fmla="val 25000"/>
+            </a:avLst>
+          </a:prstGeom>
+          <a:solidFill>
+            <a:srgbClr val="FCE7F3"/>
+          </a:solidFill>
+          <a:ln w="19050">
+            <a:solidFill>
+              <a:srgbClr val="DB2777"/>
+            </a:solidFill>
+            <a:prstDash val="solid"/>
+          </a:ln>
+          <a:effectLst>
+            <a:outerShdw sx="100000" sy="100000" kx="0" ky="0" algn="bl" rotWithShape="0" blurRad="101600" dist="38100" dir="8100000">
+              <a:srgbClr val="000000">
+                <a:alpha val="12000"/>
+              </a:srgbClr>
+            </a:outerShdw>
+          </a:effectLst>
+        </p:spPr>
+      </p:sp>
+      <p:sp>
+        <p:nvSpPr>
+          <p:cNvPr id="26" name="Text 24"/>
+          <p:cNvSpPr/>
+          <p:nvPr/>
+        </p:nvSpPr>
+        <p:spPr>
+          <a:xfrm>
+            <a:off x="6998818" y="2258568"/>
+            <a:ext cx="1581912" cy="292608"/>
+          </a:xfrm>
+          <a:prstGeom prst="rect">
+            <a:avLst/>
+          </a:prstGeom>
+          <a:noFill/>
+          <a:ln/>
+        </p:spPr>
+        <p:txBody>
+          <a:bodyPr wrap="square" lIns="0" tIns="0" rIns="0" bIns="0" rtlCol="0" anchor="ctr"/>
+          <a:lstStyle/>
+          <a:p>
+            <a:pPr algn="ctr" indent="0" marL="0">
+              <a:buNone/>
+            </a:pPr>
+            <a:r>
+              <a:rPr lang="en-US" sz="1300" b="1" dirty="0">
+                <a:solidFill>
+                  <a:srgbClr val="9D174D"/>
+                </a:solidFill>
+                <a:latin typeface="Trebuchet MS" pitchFamily="34" charset="0"/>
+                <a:ea typeface="Trebuchet MS" pitchFamily="34" charset="-122"/>
+                <a:cs typeface="Trebuchet MS" pitchFamily="34" charset="-120"/>
+              </a:rPr>
+              <a:t>s</a:t>
+            </a:r>
+            <a:endParaRPr lang="en-US" sz="1300" dirty="0"/>
+          </a:p>
+        </p:txBody>
+      </p:sp>
+      <p:sp>
+        <p:nvSpPr>
+          <p:cNvPr id="27" name="Text 25"/>
+          <p:cNvSpPr/>
+          <p:nvPr/>
+        </p:nvSpPr>
+        <p:spPr>
+          <a:xfrm>
+            <a:off x="6998818" y="2569464"/>
+            <a:ext cx="1581912" cy="201168"/>
+          </a:xfrm>
+          <a:prstGeom prst="rect">
+            <a:avLst/>
+          </a:prstGeom>
+          <a:noFill/>
+          <a:ln/>
+        </p:spPr>
+        <p:txBody>
+          <a:bodyPr wrap="square" lIns="0" tIns="0" rIns="0" bIns="0" rtlCol="0" anchor="t"/>
+          <a:lstStyle/>
+          <a:p>
+            <a:pPr algn="ctr" indent="0" marL="0">
+              <a:buNone/>
+            </a:pPr>
+            <a:r>
+              <a:rPr lang="en-US" sz="850" dirty="0">
+                <a:solidFill>
+                  <a:srgbClr val="475569"/>
+                </a:solidFill>
+                <a:latin typeface="Calibri" pitchFamily="34" charset="0"/>
+                <a:ea typeface="Calibri" pitchFamily="34" charset="-122"/>
+                <a:cs typeface="Calibri" pitchFamily="34" charset="-120"/>
+              </a:rPr>
+              <a:t>plural or present tense</a:t>
+            </a:r>
+            <a:endParaRPr lang="en-US" sz="850" dirty="0"/>
+          </a:p>
+        </p:txBody>
+      </p:sp>
+      <p:sp>
+        <p:nvSpPr>
+          <p:cNvPr id="28" name="Shape 26"/>
           <p:cNvSpPr/>
           <p:nvPr/>
         </p:nvSpPr>
@@ -32449,7 +33319,7 @@
       </p:sp>
       <p:sp>
         <p:nvSpPr>
-          <p:cNvPr id="23" name="Text 21"/>
+          <p:cNvPr id="29" name="Text 27"/>
           <p:cNvSpPr/>
           <p:nvPr/>
         </p:nvSpPr>
@@ -32488,7 +33358,7 @@
       </p:sp>
       <p:sp>
         <p:nvSpPr>
-          <p:cNvPr id="24" name="Shape 22"/>
+          <p:cNvPr id="30" name="Shape 28"/>
           <p:cNvSpPr/>
           <p:nvPr/>
         </p:nvSpPr>
@@ -32515,7 +33385,7 @@
       </p:sp>
       <p:sp>
         <p:nvSpPr>
-          <p:cNvPr id="25" name="Shape 23"/>
+          <p:cNvPr id="31" name="Shape 29"/>
           <p:cNvSpPr/>
           <p:nvPr/>
         </p:nvSpPr>
@@ -32542,7 +33412,7 @@
       </p:sp>
       <p:sp>
         <p:nvSpPr>
-          <p:cNvPr id="26" name="Text 24"/>
+          <p:cNvPr id="32" name="Text 30"/>
           <p:cNvSpPr/>
           <p:nvPr/>
         </p:nvSpPr>
@@ -32573,7 +33443,7 @@
                 <a:ea typeface="Trebuchet MS" pitchFamily="34" charset="-122"/>
                 <a:cs typeface="Trebuchet MS" pitchFamily="34" charset="-120"/>
               </a:rPr>
-              <a:t>par</a:t>
+              <a:t>a</a:t>
             </a:r>
             <a:endParaRPr lang="en-US" sz="1400" dirty="0"/>
           </a:p>
@@ -32581,7 +33451,7 @@
       </p:sp>
       <p:sp>
         <p:nvSpPr>
-          <p:cNvPr id="27" name="Text 25"/>
+          <p:cNvPr id="33" name="Text 31"/>
           <p:cNvSpPr/>
           <p:nvPr/>
         </p:nvSpPr>
@@ -32620,7 +33490,7 @@
       </p:sp>
       <p:sp>
         <p:nvSpPr>
-          <p:cNvPr id="28" name="Shape 26"/>
+          <p:cNvPr id="34" name="Shape 32"/>
           <p:cNvSpPr/>
           <p:nvPr/>
         </p:nvSpPr>
@@ -32647,7 +33517,7 @@
       </p:sp>
       <p:sp>
         <p:nvSpPr>
-          <p:cNvPr id="29" name="Text 27"/>
+          <p:cNvPr id="35" name="Text 33"/>
           <p:cNvSpPr/>
           <p:nvPr/>
         </p:nvSpPr>
@@ -32678,7 +33548,7 @@
                 <a:ea typeface="Trebuchet MS" pitchFamily="34" charset="-122"/>
                 <a:cs typeface="Trebuchet MS" pitchFamily="34" charset="-120"/>
               </a:rPr>
-              <a:t>ti</a:t>
+              <a:t>part</a:t>
             </a:r>
             <a:endParaRPr lang="en-US" sz="1400" dirty="0"/>
           </a:p>
@@ -32686,7 +33556,7 @@
       </p:sp>
       <p:sp>
         <p:nvSpPr>
-          <p:cNvPr id="30" name="Text 28"/>
+          <p:cNvPr id="36" name="Text 34"/>
           <p:cNvSpPr/>
           <p:nvPr/>
         </p:nvSpPr>
@@ -32725,7 +33595,7 @@
       </p:sp>
       <p:sp>
         <p:nvSpPr>
-          <p:cNvPr id="31" name="Shape 29"/>
+          <p:cNvPr id="37" name="Shape 35"/>
           <p:cNvSpPr/>
           <p:nvPr/>
         </p:nvSpPr>
@@ -32752,7 +33622,7 @@
       </p:sp>
       <p:sp>
         <p:nvSpPr>
-          <p:cNvPr id="32" name="Text 30"/>
+          <p:cNvPr id="38" name="Text 36"/>
           <p:cNvSpPr/>
           <p:nvPr/>
         </p:nvSpPr>
@@ -32783,7 +33653,7 @@
                 <a:ea typeface="Trebuchet MS" pitchFamily="34" charset="-122"/>
                 <a:cs typeface="Trebuchet MS" pitchFamily="34" charset="-120"/>
               </a:rPr>
-              <a:t>cle</a:t>
+              <a:t>ments</a:t>
             </a:r>
             <a:endParaRPr lang="en-US" sz="1400" dirty="0"/>
           </a:p>
@@ -32791,7 +33661,7 @@
       </p:sp>
       <p:sp>
         <p:nvSpPr>
-          <p:cNvPr id="33" name="Shape 31"/>
+          <p:cNvPr id="39" name="Shape 37"/>
           <p:cNvSpPr/>
           <p:nvPr/>
         </p:nvSpPr>
@@ -32818,7 +33688,7 @@
       </p:sp>
       <p:sp>
         <p:nvSpPr>
-          <p:cNvPr id="34" name="Text 32"/>
+          <p:cNvPr id="40" name="Text 38"/>
           <p:cNvSpPr/>
           <p:nvPr/>
         </p:nvSpPr>
@@ -32857,18 +33727,18 @@
       </p:sp>
       <p:sp>
         <p:nvSpPr>
-          <p:cNvPr id="35" name="Shape 33"/>
+          <p:cNvPr id="41" name="Shape 39"/>
           <p:cNvSpPr/>
           <p:nvPr/>
         </p:nvSpPr>
         <p:spPr>
           <a:xfrm>
             <a:off x="1874520" y="4096512"/>
-            <a:ext cx="6903720" cy="804672"/>
+            <a:ext cx="6903720" cy="658368"/>
           </a:xfrm>
           <a:prstGeom prst="rect">
             <a:avLst>
-              <a:gd name="adj" fmla="val 6818"/>
+              <a:gd name="adj" fmla="val 8333"/>
             </a:avLst>
           </a:prstGeom>
           <a:solidFill>
@@ -32884,18 +33754,18 @@
       </p:sp>
       <p:sp>
         <p:nvSpPr>
-          <p:cNvPr id="36" name="Shape 34"/>
-          <p:cNvSpPr/>
-          <p:nvPr/>
-        </p:nvSpPr>
-        <p:spPr>
-          <a:xfrm>
-            <a:off x="2254649" y="4169664"/>
-            <a:ext cx="685800" cy="384048"/>
+          <p:cNvPr id="42" name="Shape 40"/>
+          <p:cNvSpPr/>
+          <p:nvPr/>
+        </p:nvSpPr>
+        <p:spPr>
+          <a:xfrm>
+            <a:off x="1951330" y="4169664"/>
+            <a:ext cx="676656" cy="475488"/>
           </a:xfrm>
           <a:prstGeom prst="rect">
             <a:avLst>
-              <a:gd name="adj" fmla="val 9524"/>
+              <a:gd name="adj" fmla="val 7692"/>
             </a:avLst>
           </a:prstGeom>
           <a:solidFill>
@@ -32911,14 +33781,14 @@
       </p:sp>
       <p:sp>
         <p:nvSpPr>
-          <p:cNvPr id="37" name="Text 35"/>
-          <p:cNvSpPr/>
-          <p:nvPr/>
-        </p:nvSpPr>
-        <p:spPr>
-          <a:xfrm>
-            <a:off x="2254649" y="4169664"/>
-            <a:ext cx="685800" cy="384048"/>
+          <p:cNvPr id="43" name="Text 41"/>
+          <p:cNvSpPr/>
+          <p:nvPr/>
+        </p:nvSpPr>
+        <p:spPr>
+          <a:xfrm>
+            <a:off x="1951330" y="4169664"/>
+            <a:ext cx="676656" cy="475488"/>
           </a:xfrm>
           <a:prstGeom prst="rect">
             <a:avLst/>
@@ -32942,7 +33812,7 @@
                 <a:ea typeface="Trebuchet MS" pitchFamily="34" charset="-122"/>
                 <a:cs typeface="Trebuchet MS" pitchFamily="34" charset="-120"/>
               </a:rPr>
-              <a:t>p</a:t>
+              <a:t>a</a:t>
             </a:r>
             <a:endParaRPr lang="en-US" sz="900" dirty="0"/>
           </a:p>
@@ -32950,18 +33820,18 @@
       </p:sp>
       <p:sp>
         <p:nvSpPr>
-          <p:cNvPr id="38" name="Shape 36"/>
-          <p:cNvSpPr/>
-          <p:nvPr/>
-        </p:nvSpPr>
-        <p:spPr>
-          <a:xfrm>
-            <a:off x="3293146" y="4169664"/>
-            <a:ext cx="685800" cy="384048"/>
+          <p:cNvPr id="44" name="Shape 42"/>
+          <p:cNvSpPr/>
+          <p:nvPr/>
+        </p:nvSpPr>
+        <p:spPr>
+          <a:xfrm>
+            <a:off x="2677363" y="4169664"/>
+            <a:ext cx="676656" cy="475488"/>
           </a:xfrm>
           <a:prstGeom prst="rect">
             <a:avLst>
-              <a:gd name="adj" fmla="val 9524"/>
+              <a:gd name="adj" fmla="val 7692"/>
             </a:avLst>
           </a:prstGeom>
           <a:solidFill>
@@ -32977,14 +33847,14 @@
       </p:sp>
       <p:sp>
         <p:nvSpPr>
-          <p:cNvPr id="39" name="Text 37"/>
-          <p:cNvSpPr/>
-          <p:nvPr/>
-        </p:nvSpPr>
-        <p:spPr>
-          <a:xfrm>
-            <a:off x="3293146" y="4169664"/>
-            <a:ext cx="685800" cy="384048"/>
+          <p:cNvPr id="45" name="Text 43"/>
+          <p:cNvSpPr/>
+          <p:nvPr/>
+        </p:nvSpPr>
+        <p:spPr>
+          <a:xfrm>
+            <a:off x="2677363" y="4169664"/>
+            <a:ext cx="676656" cy="475488"/>
           </a:xfrm>
           <a:prstGeom prst="rect">
             <a:avLst/>
@@ -33008,7 +33878,7 @@
                 <a:ea typeface="Trebuchet MS" pitchFamily="34" charset="-122"/>
                 <a:cs typeface="Trebuchet MS" pitchFamily="34" charset="-120"/>
               </a:rPr>
-              <a:t>ar</a:t>
+              <a:t>p</a:t>
             </a:r>
             <a:endParaRPr lang="en-US" sz="900" dirty="0"/>
           </a:p>
@@ -33016,18 +33886,18 @@
       </p:sp>
       <p:sp>
         <p:nvSpPr>
-          <p:cNvPr id="40" name="Shape 38"/>
-          <p:cNvSpPr/>
-          <p:nvPr/>
-        </p:nvSpPr>
-        <p:spPr>
-          <a:xfrm>
-            <a:off x="4331643" y="4169664"/>
-            <a:ext cx="685800" cy="384048"/>
+          <p:cNvPr id="46" name="Shape 44"/>
+          <p:cNvSpPr/>
+          <p:nvPr/>
+        </p:nvSpPr>
+        <p:spPr>
+          <a:xfrm>
+            <a:off x="3403397" y="4169664"/>
+            <a:ext cx="676656" cy="475488"/>
           </a:xfrm>
           <a:prstGeom prst="rect">
             <a:avLst>
-              <a:gd name="adj" fmla="val 9524"/>
+              <a:gd name="adj" fmla="val 7692"/>
             </a:avLst>
           </a:prstGeom>
           <a:solidFill>
@@ -33043,14 +33913,14 @@
       </p:sp>
       <p:sp>
         <p:nvSpPr>
-          <p:cNvPr id="41" name="Text 39"/>
-          <p:cNvSpPr/>
-          <p:nvPr/>
-        </p:nvSpPr>
-        <p:spPr>
-          <a:xfrm>
-            <a:off x="4331643" y="4169664"/>
-            <a:ext cx="685800" cy="384048"/>
+          <p:cNvPr id="47" name="Text 45"/>
+          <p:cNvSpPr/>
+          <p:nvPr/>
+        </p:nvSpPr>
+        <p:spPr>
+          <a:xfrm>
+            <a:off x="3403397" y="4169664"/>
+            <a:ext cx="676656" cy="475488"/>
           </a:xfrm>
           <a:prstGeom prst="rect">
             <a:avLst/>
@@ -33074,7 +33944,7 @@
                 <a:ea typeface="Trebuchet MS" pitchFamily="34" charset="-122"/>
                 <a:cs typeface="Trebuchet MS" pitchFamily="34" charset="-120"/>
               </a:rPr>
-              <a:t>t</a:t>
+              <a:t>ar</a:t>
             </a:r>
             <a:endParaRPr lang="en-US" sz="900" dirty="0"/>
           </a:p>
@@ -33082,18 +33952,18 @@
       </p:sp>
       <p:sp>
         <p:nvSpPr>
-          <p:cNvPr id="42" name="Shape 40"/>
-          <p:cNvSpPr/>
-          <p:nvPr/>
-        </p:nvSpPr>
-        <p:spPr>
-          <a:xfrm>
-            <a:off x="5370141" y="4169664"/>
-            <a:ext cx="685800" cy="384048"/>
+          <p:cNvPr id="48" name="Shape 46"/>
+          <p:cNvSpPr/>
+          <p:nvPr/>
+        </p:nvSpPr>
+        <p:spPr>
+          <a:xfrm>
+            <a:off x="4129430" y="4169664"/>
+            <a:ext cx="676656" cy="475488"/>
           </a:xfrm>
           <a:prstGeom prst="rect">
             <a:avLst>
-              <a:gd name="adj" fmla="val 9524"/>
+              <a:gd name="adj" fmla="val 7692"/>
             </a:avLst>
           </a:prstGeom>
           <a:solidFill>
@@ -33109,14 +33979,14 @@
       </p:sp>
       <p:sp>
         <p:nvSpPr>
-          <p:cNvPr id="43" name="Text 41"/>
-          <p:cNvSpPr/>
-          <p:nvPr/>
-        </p:nvSpPr>
-        <p:spPr>
-          <a:xfrm>
-            <a:off x="5370141" y="4169664"/>
-            <a:ext cx="685800" cy="384048"/>
+          <p:cNvPr id="49" name="Text 47"/>
+          <p:cNvSpPr/>
+          <p:nvPr/>
+        </p:nvSpPr>
+        <p:spPr>
+          <a:xfrm>
+            <a:off x="4129430" y="4169664"/>
+            <a:ext cx="676656" cy="475488"/>
           </a:xfrm>
           <a:prstGeom prst="rect">
             <a:avLst/>
@@ -33140,7 +34010,7 @@
                 <a:ea typeface="Trebuchet MS" pitchFamily="34" charset="-122"/>
                 <a:cs typeface="Trebuchet MS" pitchFamily="34" charset="-120"/>
               </a:rPr>
-              <a:t>i</a:t>
+              <a:t>t</a:t>
             </a:r>
             <a:endParaRPr lang="en-US" sz="900" dirty="0"/>
           </a:p>
@@ -33148,18 +34018,18 @@
       </p:sp>
       <p:sp>
         <p:nvSpPr>
-          <p:cNvPr id="44" name="Shape 42"/>
-          <p:cNvSpPr/>
-          <p:nvPr/>
-        </p:nvSpPr>
-        <p:spPr>
-          <a:xfrm>
-            <a:off x="6408638" y="4169664"/>
-            <a:ext cx="685800" cy="384048"/>
+          <p:cNvPr id="50" name="Shape 48"/>
+          <p:cNvSpPr/>
+          <p:nvPr/>
+        </p:nvSpPr>
+        <p:spPr>
+          <a:xfrm>
+            <a:off x="4855464" y="4169664"/>
+            <a:ext cx="676656" cy="475488"/>
           </a:xfrm>
           <a:prstGeom prst="rect">
             <a:avLst>
-              <a:gd name="adj" fmla="val 9524"/>
+              <a:gd name="adj" fmla="val 7692"/>
             </a:avLst>
           </a:prstGeom>
           <a:solidFill>
@@ -33175,14 +34045,14 @@
       </p:sp>
       <p:sp>
         <p:nvSpPr>
-          <p:cNvPr id="45" name="Text 43"/>
-          <p:cNvSpPr/>
-          <p:nvPr/>
-        </p:nvSpPr>
-        <p:spPr>
-          <a:xfrm>
-            <a:off x="6408638" y="4169664"/>
-            <a:ext cx="685800" cy="384048"/>
+          <p:cNvPr id="51" name="Text 49"/>
+          <p:cNvSpPr/>
+          <p:nvPr/>
+        </p:nvSpPr>
+        <p:spPr>
+          <a:xfrm>
+            <a:off x="4855464" y="4169664"/>
+            <a:ext cx="676656" cy="475488"/>
           </a:xfrm>
           <a:prstGeom prst="rect">
             <a:avLst/>
@@ -33206,7 +34076,7 @@
                 <a:ea typeface="Trebuchet MS" pitchFamily="34" charset="-122"/>
                 <a:cs typeface="Trebuchet MS" pitchFamily="34" charset="-120"/>
               </a:rPr>
-              <a:t>c</a:t>
+              <a:t>m</a:t>
             </a:r>
             <a:endParaRPr lang="en-US" sz="900" dirty="0"/>
           </a:p>
@@ -33214,57 +34084,18 @@
       </p:sp>
       <p:sp>
         <p:nvSpPr>
-          <p:cNvPr id="46" name="Text 44"/>
-          <p:cNvSpPr/>
-          <p:nvPr/>
-        </p:nvSpPr>
-        <p:spPr>
-          <a:xfrm>
-            <a:off x="6408638" y="4572000"/>
-            <a:ext cx="685800" cy="219456"/>
-          </a:xfrm>
-          <a:prstGeom prst="rect">
-            <a:avLst/>
-          </a:prstGeom>
-          <a:noFill/>
-          <a:ln/>
-        </p:spPr>
-        <p:txBody>
-          <a:bodyPr wrap="square" lIns="0" tIns="0" rIns="0" bIns="0" rtlCol="0" anchor="t"/>
-          <a:lstStyle/>
-          <a:p>
-            <a:pPr algn="ctr" indent="0" marL="0">
-              <a:buNone/>
-            </a:pPr>
-            <a:r>
-              <a:rPr lang="en-US" sz="750" i="1" dirty="0">
-                <a:solidFill>
-                  <a:srgbClr val="94A3B8"/>
-                </a:solidFill>
-                <a:latin typeface="Calibri" pitchFamily="34" charset="0"/>
-                <a:ea typeface="Calibri" pitchFamily="34" charset="-122"/>
-                <a:cs typeface="Calibri" pitchFamily="34" charset="-120"/>
-              </a:rPr>
-              <a:t>/k/</a:t>
-            </a:r>
-            <a:endParaRPr lang="en-US" sz="750" dirty="0"/>
-          </a:p>
-        </p:txBody>
-      </p:sp>
-      <p:sp>
-        <p:nvSpPr>
-          <p:cNvPr id="47" name="Shape 45"/>
-          <p:cNvSpPr/>
-          <p:nvPr/>
-        </p:nvSpPr>
-        <p:spPr>
-          <a:xfrm>
-            <a:off x="7447135" y="4169664"/>
-            <a:ext cx="685800" cy="384048"/>
+          <p:cNvPr id="52" name="Shape 50"/>
+          <p:cNvSpPr/>
+          <p:nvPr/>
+        </p:nvSpPr>
+        <p:spPr>
+          <a:xfrm>
+            <a:off x="5581498" y="4169664"/>
+            <a:ext cx="676656" cy="475488"/>
           </a:xfrm>
           <a:prstGeom prst="rect">
             <a:avLst>
-              <a:gd name="adj" fmla="val 9524"/>
+              <a:gd name="adj" fmla="val 7692"/>
             </a:avLst>
           </a:prstGeom>
           <a:solidFill>
@@ -33280,14 +34111,14 @@
       </p:sp>
       <p:sp>
         <p:nvSpPr>
-          <p:cNvPr id="48" name="Text 46"/>
-          <p:cNvSpPr/>
-          <p:nvPr/>
-        </p:nvSpPr>
-        <p:spPr>
-          <a:xfrm>
-            <a:off x="7447135" y="4169664"/>
-            <a:ext cx="685800" cy="384048"/>
+          <p:cNvPr id="53" name="Text 51"/>
+          <p:cNvSpPr/>
+          <p:nvPr/>
+        </p:nvSpPr>
+        <p:spPr>
+          <a:xfrm>
+            <a:off x="5581498" y="4169664"/>
+            <a:ext cx="676656" cy="475488"/>
           </a:xfrm>
           <a:prstGeom prst="rect">
             <a:avLst/>
@@ -33311,7 +34142,205 @@
                 <a:ea typeface="Trebuchet MS" pitchFamily="34" charset="-122"/>
                 <a:cs typeface="Trebuchet MS" pitchFamily="34" charset="-120"/>
               </a:rPr>
-              <a:t>le</a:t>
+              <a:t>e</a:t>
+            </a:r>
+            <a:endParaRPr lang="en-US" sz="900" dirty="0"/>
+          </a:p>
+        </p:txBody>
+      </p:sp>
+      <p:sp>
+        <p:nvSpPr>
+          <p:cNvPr id="54" name="Shape 52"/>
+          <p:cNvSpPr/>
+          <p:nvPr/>
+        </p:nvSpPr>
+        <p:spPr>
+          <a:xfrm>
+            <a:off x="6307531" y="4169664"/>
+            <a:ext cx="676656" cy="475488"/>
+          </a:xfrm>
+          <a:prstGeom prst="rect">
+            <a:avLst>
+              <a:gd name="adj" fmla="val 7692"/>
+            </a:avLst>
+          </a:prstGeom>
+          <a:solidFill>
+            <a:srgbClr val="FFFFFF"/>
+          </a:solidFill>
+          <a:ln w="12700">
+            <a:solidFill>
+              <a:srgbClr val="DB2777"/>
+            </a:solidFill>
+            <a:prstDash val="solid"/>
+          </a:ln>
+        </p:spPr>
+      </p:sp>
+      <p:sp>
+        <p:nvSpPr>
+          <p:cNvPr id="55" name="Text 53"/>
+          <p:cNvSpPr/>
+          <p:nvPr/>
+        </p:nvSpPr>
+        <p:spPr>
+          <a:xfrm>
+            <a:off x="6307531" y="4169664"/>
+            <a:ext cx="676656" cy="475488"/>
+          </a:xfrm>
+          <a:prstGeom prst="rect">
+            <a:avLst/>
+          </a:prstGeom>
+          <a:noFill/>
+          <a:ln/>
+        </p:spPr>
+        <p:txBody>
+          <a:bodyPr wrap="square" lIns="0" tIns="0" rIns="0" bIns="0" rtlCol="0" anchor="ctr"/>
+          <a:lstStyle/>
+          <a:p>
+            <a:pPr algn="ctr" indent="0" marL="0">
+              <a:buNone/>
+            </a:pPr>
+            <a:r>
+              <a:rPr lang="en-US" sz="900" b="1" dirty="0">
+                <a:solidFill>
+                  <a:srgbClr val="9D174D"/>
+                </a:solidFill>
+                <a:latin typeface="Trebuchet MS" pitchFamily="34" charset="0"/>
+                <a:ea typeface="Trebuchet MS" pitchFamily="34" charset="-122"/>
+                <a:cs typeface="Trebuchet MS" pitchFamily="34" charset="-120"/>
+              </a:rPr>
+              <a:t>n</a:t>
+            </a:r>
+            <a:endParaRPr lang="en-US" sz="900" dirty="0"/>
+          </a:p>
+        </p:txBody>
+      </p:sp>
+      <p:sp>
+        <p:nvSpPr>
+          <p:cNvPr id="56" name="Shape 54"/>
+          <p:cNvSpPr/>
+          <p:nvPr/>
+        </p:nvSpPr>
+        <p:spPr>
+          <a:xfrm>
+            <a:off x="7033565" y="4169664"/>
+            <a:ext cx="676656" cy="475488"/>
+          </a:xfrm>
+          <a:prstGeom prst="rect">
+            <a:avLst>
+              <a:gd name="adj" fmla="val 7692"/>
+            </a:avLst>
+          </a:prstGeom>
+          <a:solidFill>
+            <a:srgbClr val="FFFFFF"/>
+          </a:solidFill>
+          <a:ln w="12700">
+            <a:solidFill>
+              <a:srgbClr val="DB2777"/>
+            </a:solidFill>
+            <a:prstDash val="solid"/>
+          </a:ln>
+        </p:spPr>
+      </p:sp>
+      <p:sp>
+        <p:nvSpPr>
+          <p:cNvPr id="57" name="Text 55"/>
+          <p:cNvSpPr/>
+          <p:nvPr/>
+        </p:nvSpPr>
+        <p:spPr>
+          <a:xfrm>
+            <a:off x="7033565" y="4169664"/>
+            <a:ext cx="676656" cy="475488"/>
+          </a:xfrm>
+          <a:prstGeom prst="rect">
+            <a:avLst/>
+          </a:prstGeom>
+          <a:noFill/>
+          <a:ln/>
+        </p:spPr>
+        <p:txBody>
+          <a:bodyPr wrap="square" lIns="0" tIns="0" rIns="0" bIns="0" rtlCol="0" anchor="ctr"/>
+          <a:lstStyle/>
+          <a:p>
+            <a:pPr algn="ctr" indent="0" marL="0">
+              <a:buNone/>
+            </a:pPr>
+            <a:r>
+              <a:rPr lang="en-US" sz="900" b="1" dirty="0">
+                <a:solidFill>
+                  <a:srgbClr val="9D174D"/>
+                </a:solidFill>
+                <a:latin typeface="Trebuchet MS" pitchFamily="34" charset="0"/>
+                <a:ea typeface="Trebuchet MS" pitchFamily="34" charset="-122"/>
+                <a:cs typeface="Trebuchet MS" pitchFamily="34" charset="-120"/>
+              </a:rPr>
+              <a:t>t</a:t>
+            </a:r>
+            <a:endParaRPr lang="en-US" sz="900" dirty="0"/>
+          </a:p>
+        </p:txBody>
+      </p:sp>
+      <p:sp>
+        <p:nvSpPr>
+          <p:cNvPr id="58" name="Shape 56"/>
+          <p:cNvSpPr/>
+          <p:nvPr/>
+        </p:nvSpPr>
+        <p:spPr>
+          <a:xfrm>
+            <a:off x="7759598" y="4169664"/>
+            <a:ext cx="676656" cy="475488"/>
+          </a:xfrm>
+          <a:prstGeom prst="rect">
+            <a:avLst>
+              <a:gd name="adj" fmla="val 7692"/>
+            </a:avLst>
+          </a:prstGeom>
+          <a:solidFill>
+            <a:srgbClr val="FFFFFF"/>
+          </a:solidFill>
+          <a:ln w="12700">
+            <a:solidFill>
+              <a:srgbClr val="DB2777"/>
+            </a:solidFill>
+            <a:prstDash val="solid"/>
+          </a:ln>
+        </p:spPr>
+      </p:sp>
+      <p:sp>
+        <p:nvSpPr>
+          <p:cNvPr id="59" name="Text 57"/>
+          <p:cNvSpPr/>
+          <p:nvPr/>
+        </p:nvSpPr>
+        <p:spPr>
+          <a:xfrm>
+            <a:off x="7759598" y="4169664"/>
+            <a:ext cx="676656" cy="475488"/>
+          </a:xfrm>
+          <a:prstGeom prst="rect">
+            <a:avLst/>
+          </a:prstGeom>
+          <a:noFill/>
+          <a:ln/>
+        </p:spPr>
+        <p:txBody>
+          <a:bodyPr wrap="square" lIns="0" tIns="0" rIns="0" bIns="0" rtlCol="0" anchor="ctr"/>
+          <a:lstStyle/>
+          <a:p>
+            <a:pPr algn="ctr" indent="0" marL="0">
+              <a:buNone/>
+            </a:pPr>
+            <a:r>
+              <a:rPr lang="en-US" sz="900" b="1" dirty="0">
+                <a:solidFill>
+                  <a:srgbClr val="9D174D"/>
+                </a:solidFill>
+                <a:latin typeface="Trebuchet MS" pitchFamily="34" charset="0"/>
+                <a:ea typeface="Trebuchet MS" pitchFamily="34" charset="-122"/>
+                <a:cs typeface="Trebuchet MS" pitchFamily="34" charset="-120"/>
+              </a:rPr>
+              <a:t>s</a:t>
             </a:r>
             <a:endParaRPr lang="en-US" sz="900" dirty="0"/>
           </a:p>
@@ -33603,7 +34632,7 @@
                 <a:ea typeface="Calibri" pitchFamily="34" charset="-122"/>
                 <a:cs typeface="Calibri" pitchFamily="34" charset="-120"/>
               </a:rPr>
-              <a:t>Word Labs  •  wordlabs.app  •  Root: 'part' = piece, share, divide</a:t>
+              <a:t>Word Labs  •  wordlabs.app  •  Root: 'part' = a piece of something; a section</a:t>
             </a:r>
             <a:endParaRPr lang="en-US" sz="800" dirty="0"/>
           </a:p>
@@ -34772,7 +35801,7 @@
                 <a:ea typeface="Calibri" pitchFamily="34" charset="-122"/>
                 <a:cs typeface="Calibri" pitchFamily="34" charset="-120"/>
               </a:rPr>
-              <a:t>Word Labs  •  wordlabs.app  •  Root: 'part' = piece, share, divide</a:t>
+              <a:t>Word Labs  •  wordlabs.app  •  Root: 'part' = a piece of something; a section</a:t>
             </a:r>
             <a:endParaRPr lang="en-US" sz="800" dirty="0"/>
           </a:p>
@@ -35073,7 +36102,7 @@
                 <a:ea typeface="Trebuchet MS" pitchFamily="34" charset="-122"/>
                 <a:cs typeface="Trebuchet MS" pitchFamily="34" charset="-120"/>
               </a:rPr>
-              <a:t>de-</a:t>
+              <a:t>a-</a:t>
             </a:r>
             <a:endParaRPr lang="en-US" sz="1300" dirty="0"/>
           </a:p>
@@ -35201,7 +36230,7 @@
                 <a:ea typeface="Trebuchet MS" pitchFamily="34" charset="-122"/>
                 <a:cs typeface="Trebuchet MS" pitchFamily="34" charset="-120"/>
               </a:rPr>
-              <a:t>-ial</a:t>
+              <a:t>-ment</a:t>
             </a:r>
             <a:endParaRPr lang="en-US" sz="1300" dirty="0"/>
           </a:p>
@@ -35265,7 +36294,7 @@
                 <a:ea typeface="Trebuchet MS" pitchFamily="34" charset="-122"/>
                 <a:cs typeface="Trebuchet MS" pitchFamily="34" charset="-120"/>
               </a:rPr>
-              <a:t>im-</a:t>
+              <a:t>con-</a:t>
             </a:r>
             <a:endParaRPr lang="en-US" sz="1300" dirty="0"/>
           </a:p>
@@ -35354,7 +36383,7 @@
                 <a:ea typeface="Trebuchet MS" pitchFamily="34" charset="-122"/>
                 <a:cs typeface="Trebuchet MS" pitchFamily="34" charset="-120"/>
               </a:rPr>
-              <a:t>-ly</a:t>
+              <a:t>-ed</a:t>
             </a:r>
             <a:endParaRPr lang="en-US" sz="1300" dirty="0"/>
           </a:p>
@@ -35418,7 +36447,7 @@
                 <a:ea typeface="Trebuchet MS" pitchFamily="34" charset="-122"/>
                 <a:cs typeface="Trebuchet MS" pitchFamily="34" charset="-120"/>
               </a:rPr>
-              <a:t>bi-</a:t>
+              <a:t>de-</a:t>
             </a:r>
             <a:endParaRPr lang="en-US" sz="1300" dirty="0"/>
           </a:p>
@@ -35507,7 +36536,7 @@
                 <a:ea typeface="Trebuchet MS" pitchFamily="34" charset="-122"/>
                 <a:cs typeface="Trebuchet MS" pitchFamily="34" charset="-120"/>
               </a:rPr>
-              <a:t>-ner</a:t>
+              <a:t>-ing</a:t>
             </a:r>
             <a:endParaRPr lang="en-US" sz="1300" dirty="0"/>
           </a:p>
@@ -35571,7 +36600,7 @@
                 <a:ea typeface="Trebuchet MS" pitchFamily="34" charset="-122"/>
                 <a:cs typeface="Trebuchet MS" pitchFamily="34" charset="-120"/>
               </a:rPr>
-              <a:t>com-</a:t>
+              <a:t>in-</a:t>
             </a:r>
             <a:endParaRPr lang="en-US" sz="1300" dirty="0"/>
           </a:p>
@@ -35660,7 +36689,7 @@
                 <a:ea typeface="Trebuchet MS" pitchFamily="34" charset="-122"/>
                 <a:cs typeface="Trebuchet MS" pitchFamily="34" charset="-120"/>
               </a:rPr>
-              <a:t>-ition</a:t>
+              <a:t>-ure</a:t>
             </a:r>
             <a:endParaRPr lang="en-US" sz="1300" dirty="0"/>
           </a:p>
@@ -35681,7 +36710,7 @@
             <a:avLst/>
           </a:prstGeom>
           <a:solidFill>
-            <a:srgbClr val="DDD6FE"/>
+            <a:srgbClr val="F8FAFC"/>
           </a:solidFill>
           <a:ln w="12700">
             <a:solidFill>
@@ -35693,14 +36722,64 @@
       </p:sp>
       <p:sp>
         <p:nvSpPr>
-          <p:cNvPr id="39" name="Text 37"/>
-          <p:cNvSpPr/>
-          <p:nvPr/>
-        </p:nvSpPr>
-        <p:spPr>
-          <a:xfrm>
-            <a:off x="365760" y="3246120"/>
-            <a:ext cx="2468880" cy="402336"/>
+          <p:cNvPr id="39" name="Shape 37"/>
+          <p:cNvSpPr/>
+          <p:nvPr/>
+        </p:nvSpPr>
+        <p:spPr>
+          <a:xfrm>
+            <a:off x="2971800" y="3246120"/>
+            <a:ext cx="2834640" cy="402336"/>
+          </a:xfrm>
+          <a:prstGeom prst="rect">
+            <a:avLst/>
+          </a:prstGeom>
+          <a:solidFill>
+            <a:srgbClr val="F8FAFC"/>
+          </a:solidFill>
+          <a:ln w="12700">
+            <a:solidFill>
+              <a:srgbClr val="E2E8F0"/>
+            </a:solidFill>
+            <a:prstDash val="solid"/>
+          </a:ln>
+        </p:spPr>
+      </p:sp>
+      <p:sp>
+        <p:nvSpPr>
+          <p:cNvPr id="40" name="Shape 38"/>
+          <p:cNvSpPr/>
+          <p:nvPr/>
+        </p:nvSpPr>
+        <p:spPr>
+          <a:xfrm>
+            <a:off x="5943600" y="3246120"/>
+            <a:ext cx="2834640" cy="402336"/>
+          </a:xfrm>
+          <a:prstGeom prst="rect">
+            <a:avLst/>
+          </a:prstGeom>
+          <a:solidFill>
+            <a:srgbClr val="FCE7F3"/>
+          </a:solidFill>
+          <a:ln w="12700">
+            <a:solidFill>
+              <a:srgbClr val="E2E8F0"/>
+            </a:solidFill>
+            <a:prstDash val="solid"/>
+          </a:ln>
+        </p:spPr>
+      </p:sp>
+      <p:sp>
+        <p:nvSpPr>
+          <p:cNvPr id="41" name="Text 39"/>
+          <p:cNvSpPr/>
+          <p:nvPr/>
+        </p:nvSpPr>
+        <p:spPr>
+          <a:xfrm>
+            <a:off x="5943600" y="3246120"/>
+            <a:ext cx="2834640" cy="402336"/>
           </a:xfrm>
           <a:prstGeom prst="rect">
             <a:avLst/>
@@ -35718,13 +36797,13 @@
             <a:r>
               <a:rPr lang="en-US" sz="1300" b="1" dirty="0">
                 <a:solidFill>
-                  <a:srgbClr val="4C1D95"/>
+                  <a:srgbClr val="9D174D"/>
                 </a:solidFill>
                 <a:latin typeface="Trebuchet MS" pitchFamily="34" charset="0"/>
                 <a:ea typeface="Trebuchet MS" pitchFamily="34" charset="-122"/>
                 <a:cs typeface="Trebuchet MS" pitchFamily="34" charset="-120"/>
               </a:rPr>
-              <a:t>re-</a:t>
+              <a:t>-y</a:t>
             </a:r>
             <a:endParaRPr lang="en-US" sz="1300" dirty="0"/>
           </a:p>
@@ -35732,20 +36811,45 @@
       </p:sp>
       <p:sp>
         <p:nvSpPr>
-          <p:cNvPr id="40" name="Shape 38"/>
-          <p:cNvSpPr/>
-          <p:nvPr/>
-        </p:nvSpPr>
-        <p:spPr>
-          <a:xfrm>
-            <a:off x="2971800" y="3246120"/>
+          <p:cNvPr id="42" name="Shape 40"/>
+          <p:cNvSpPr/>
+          <p:nvPr/>
+        </p:nvSpPr>
+        <p:spPr>
+          <a:xfrm>
+            <a:off x="365760" y="3666744"/>
+            <a:ext cx="2468880" cy="402336"/>
+          </a:xfrm>
+          <a:prstGeom prst="rect">
+            <a:avLst/>
+          </a:prstGeom>
+          <a:solidFill>
+            <a:srgbClr val="F1F5F9"/>
+          </a:solidFill>
+          <a:ln w="12700">
+            <a:solidFill>
+              <a:srgbClr val="E2E8F0"/>
+            </a:solidFill>
+            <a:prstDash val="solid"/>
+          </a:ln>
+        </p:spPr>
+      </p:sp>
+      <p:sp>
+        <p:nvSpPr>
+          <p:cNvPr id="43" name="Shape 41"/>
+          <p:cNvSpPr/>
+          <p:nvPr/>
+        </p:nvSpPr>
+        <p:spPr>
+          <a:xfrm>
+            <a:off x="2971800" y="3666744"/>
             <a:ext cx="2834640" cy="402336"/>
           </a:xfrm>
           <a:prstGeom prst="rect">
             <a:avLst/>
           </a:prstGeom>
           <a:solidFill>
-            <a:srgbClr val="F8FAFC"/>
+            <a:srgbClr val="F1F5F9"/>
           </a:solidFill>
           <a:ln w="12700">
             <a:solidFill>
@@ -35757,13 +36861,13 @@
       </p:sp>
       <p:sp>
         <p:nvSpPr>
-          <p:cNvPr id="41" name="Shape 39"/>
-          <p:cNvSpPr/>
-          <p:nvPr/>
-        </p:nvSpPr>
-        <p:spPr>
-          <a:xfrm>
-            <a:off x="5943600" y="3246120"/>
+          <p:cNvPr id="44" name="Shape 42"/>
+          <p:cNvSpPr/>
+          <p:nvPr/>
+        </p:nvSpPr>
+        <p:spPr>
+          <a:xfrm>
+            <a:off x="5943600" y="3666744"/>
             <a:ext cx="2834640" cy="402336"/>
           </a:xfrm>
           <a:prstGeom prst="rect">
@@ -35782,13 +36886,13 @@
       </p:sp>
       <p:sp>
         <p:nvSpPr>
-          <p:cNvPr id="42" name="Text 40"/>
-          <p:cNvSpPr/>
-          <p:nvPr/>
-        </p:nvSpPr>
-        <p:spPr>
-          <a:xfrm>
-            <a:off x="5943600" y="3246120"/>
+          <p:cNvPr id="45" name="Text 43"/>
+          <p:cNvSpPr/>
+          <p:nvPr/>
+        </p:nvSpPr>
+        <p:spPr>
+          <a:xfrm>
+            <a:off x="5943600" y="3666744"/>
             <a:ext cx="2834640" cy="402336"/>
           </a:xfrm>
           <a:prstGeom prst="rect">
@@ -35813,7 +36917,7 @@
                 <a:ea typeface="Trebuchet MS" pitchFamily="34" charset="-122"/>
                 <a:cs typeface="Trebuchet MS" pitchFamily="34" charset="-120"/>
               </a:rPr>
-              <a:t>-icle</a:t>
+              <a:t>-ial</a:t>
             </a:r>
             <a:endParaRPr lang="en-US" sz="1300" dirty="0"/>
           </a:p>
@@ -35821,7 +36925,7 @@
       </p:sp>
       <p:sp>
         <p:nvSpPr>
-          <p:cNvPr id="43" name="Text 41"/>
+          <p:cNvPr id="46" name="Text 44"/>
           <p:cNvSpPr/>
           <p:nvPr/>
         </p:nvSpPr>
@@ -35860,7 +36964,7 @@
       </p:sp>
       <p:sp>
         <p:nvSpPr>
-          <p:cNvPr id="44" name="Shape 42"/>
+          <p:cNvPr id="47" name="Shape 45"/>
           <p:cNvSpPr/>
           <p:nvPr/>
         </p:nvSpPr>
@@ -35887,7 +36991,7 @@
       </p:sp>
       <p:sp>
         <p:nvSpPr>
-          <p:cNvPr id="45" name="Text 43"/>
+          <p:cNvPr id="48" name="Text 46"/>
           <p:cNvSpPr/>
           <p:nvPr/>
         </p:nvSpPr>
@@ -35918,7 +37022,7 @@
                 <a:ea typeface="Trebuchet MS" pitchFamily="34" charset="-122"/>
                 <a:cs typeface="Trebuchet MS" pitchFamily="34" charset="-120"/>
               </a:rPr>
-              <a:t>partial</a:t>
+              <a:t>part</a:t>
             </a:r>
             <a:endParaRPr lang="en-US" sz="1200" dirty="0"/>
           </a:p>
@@ -35926,7 +37030,7 @@
       </p:sp>
       <p:sp>
         <p:nvSpPr>
-          <p:cNvPr id="46" name="Shape 44"/>
+          <p:cNvPr id="49" name="Shape 47"/>
           <p:cNvSpPr/>
           <p:nvPr/>
         </p:nvSpPr>
@@ -35953,7 +37057,7 @@
       </p:sp>
       <p:sp>
         <p:nvSpPr>
-          <p:cNvPr id="47" name="Text 45"/>
+          <p:cNvPr id="50" name="Text 48"/>
           <p:cNvSpPr/>
           <p:nvPr/>
         </p:nvSpPr>
@@ -35984,7 +37088,7 @@
                 <a:ea typeface="Trebuchet MS" pitchFamily="34" charset="-122"/>
                 <a:cs typeface="Trebuchet MS" pitchFamily="34" charset="-120"/>
               </a:rPr>
-              <a:t>partition</a:t>
+              <a:t>parts</a:t>
             </a:r>
             <a:endParaRPr lang="en-US" sz="1200" dirty="0"/>
           </a:p>
@@ -35992,7 +37096,7 @@
       </p:sp>
       <p:sp>
         <p:nvSpPr>
-          <p:cNvPr id="48" name="Shape 46"/>
+          <p:cNvPr id="51" name="Shape 49"/>
           <p:cNvSpPr/>
           <p:nvPr/>
         </p:nvSpPr>
@@ -36019,7 +37123,7 @@
       </p:sp>
       <p:sp>
         <p:nvSpPr>
-          <p:cNvPr id="49" name="Text 47"/>
+          <p:cNvPr id="52" name="Text 50"/>
           <p:cNvSpPr/>
           <p:nvPr/>
         </p:nvSpPr>
@@ -36050,7 +37154,7 @@
                 <a:ea typeface="Trebuchet MS" pitchFamily="34" charset="-122"/>
                 <a:cs typeface="Trebuchet MS" pitchFamily="34" charset="-120"/>
               </a:rPr>
-              <a:t>particle</a:t>
+              <a:t>party</a:t>
             </a:r>
             <a:endParaRPr lang="en-US" sz="1200" dirty="0"/>
           </a:p>
@@ -36058,7 +37162,7 @@
       </p:sp>
       <p:sp>
         <p:nvSpPr>
-          <p:cNvPr id="50" name="Shape 48"/>
+          <p:cNvPr id="53" name="Shape 51"/>
           <p:cNvSpPr/>
           <p:nvPr/>
         </p:nvSpPr>
@@ -36085,7 +37189,7 @@
       </p:sp>
       <p:sp>
         <p:nvSpPr>
-          <p:cNvPr id="51" name="Text 49"/>
+          <p:cNvPr id="54" name="Text 52"/>
           <p:cNvSpPr/>
           <p:nvPr/>
         </p:nvSpPr>
@@ -36116,7 +37220,7 @@
                 <a:ea typeface="Trebuchet MS" pitchFamily="34" charset="-122"/>
                 <a:cs typeface="Trebuchet MS" pitchFamily="34" charset="-120"/>
               </a:rPr>
-              <a:t>partner</a:t>
+              <a:t>depart</a:t>
             </a:r>
             <a:endParaRPr lang="en-US" sz="1200" dirty="0"/>
           </a:p>
@@ -36124,7 +37228,7 @@
       </p:sp>
       <p:sp>
         <p:nvSpPr>
-          <p:cNvPr id="52" name="Shape 50"/>
+          <p:cNvPr id="55" name="Shape 53"/>
           <p:cNvSpPr/>
           <p:nvPr/>
         </p:nvSpPr>
@@ -36151,7 +37255,7 @@
       </p:sp>
       <p:sp>
         <p:nvSpPr>
-          <p:cNvPr id="53" name="Text 51"/>
+          <p:cNvPr id="56" name="Text 54"/>
           <p:cNvSpPr/>
           <p:nvPr/>
         </p:nvSpPr>
@@ -36182,7 +37286,7 @@
                 <a:ea typeface="Trebuchet MS" pitchFamily="34" charset="-122"/>
                 <a:cs typeface="Trebuchet MS" pitchFamily="34" charset="-120"/>
               </a:rPr>
-              <a:t>depart</a:t>
+              <a:t>parted</a:t>
             </a:r>
             <a:endParaRPr lang="en-US" sz="1200" dirty="0"/>
           </a:p>
@@ -36190,7 +37294,7 @@
       </p:sp>
       <p:sp>
         <p:nvSpPr>
-          <p:cNvPr id="54" name="Shape 52"/>
+          <p:cNvPr id="57" name="Shape 55"/>
           <p:cNvSpPr/>
           <p:nvPr/>
         </p:nvSpPr>
@@ -36217,7 +37321,7 @@
       </p:sp>
       <p:sp>
         <p:nvSpPr>
-          <p:cNvPr id="55" name="Text 53"/>
+          <p:cNvPr id="58" name="Text 56"/>
           <p:cNvSpPr/>
           <p:nvPr/>
         </p:nvSpPr>
@@ -36248,7 +37352,7 @@
                 <a:ea typeface="Trebuchet MS" pitchFamily="34" charset="-122"/>
                 <a:cs typeface="Trebuchet MS" pitchFamily="34" charset="-120"/>
               </a:rPr>
-              <a:t>impartial</a:t>
+              <a:t>partly</a:t>
             </a:r>
             <a:endParaRPr lang="en-US" sz="1200" dirty="0"/>
           </a:p>
@@ -36256,7 +37360,7 @@
       </p:sp>
       <p:sp>
         <p:nvSpPr>
-          <p:cNvPr id="56" name="Shape 54"/>
+          <p:cNvPr id="59" name="Shape 57"/>
           <p:cNvSpPr/>
           <p:nvPr/>
         </p:nvSpPr>
@@ -36283,7 +37387,7 @@
       </p:sp>
       <p:sp>
         <p:nvSpPr>
-          <p:cNvPr id="57" name="Text 55"/>
+          <p:cNvPr id="60" name="Text 58"/>
           <p:cNvSpPr/>
           <p:nvPr/>
         </p:nvSpPr>
@@ -36314,73 +37418,7 @@
                 <a:ea typeface="Trebuchet MS" pitchFamily="34" charset="-122"/>
                 <a:cs typeface="Trebuchet MS" pitchFamily="34" charset="-120"/>
               </a:rPr>
-              <a:t>compartment</a:t>
-            </a:r>
-            <a:endParaRPr lang="en-US" sz="1200" dirty="0"/>
-          </a:p>
-        </p:txBody>
-      </p:sp>
-      <p:sp>
-        <p:nvSpPr>
-          <p:cNvPr id="58" name="Shape 56"/>
-          <p:cNvSpPr/>
-          <p:nvPr/>
-        </p:nvSpPr>
-        <p:spPr>
-          <a:xfrm>
-            <a:off x="6894576" y="4498848"/>
-            <a:ext cx="2011680" cy="402336"/>
-          </a:xfrm>
-          <a:prstGeom prst="rect">
-            <a:avLst>
-              <a:gd name="adj" fmla="val 13636"/>
-            </a:avLst>
-          </a:prstGeom>
-          <a:solidFill>
-            <a:srgbClr val="EEF2FF"/>
-          </a:solidFill>
-          <a:ln w="12700">
-            <a:solidFill>
-              <a:srgbClr val="6366F1"/>
-            </a:solidFill>
-            <a:prstDash val="solid"/>
-          </a:ln>
-        </p:spPr>
-      </p:sp>
-      <p:sp>
-        <p:nvSpPr>
-          <p:cNvPr id="59" name="Text 57"/>
-          <p:cNvSpPr/>
-          <p:nvPr/>
-        </p:nvSpPr>
-        <p:spPr>
-          <a:xfrm>
-            <a:off x="6894576" y="4498848"/>
-            <a:ext cx="2011680" cy="402336"/>
-          </a:xfrm>
-          <a:prstGeom prst="rect">
-            <a:avLst/>
-          </a:prstGeom>
-          <a:noFill/>
-          <a:ln/>
-        </p:spPr>
-        <p:txBody>
-          <a:bodyPr wrap="square" lIns="0" tIns="0" rIns="0" bIns="0" rtlCol="0" anchor="ctr"/>
-          <a:lstStyle/>
-          <a:p>
-            <a:pPr algn="ctr" indent="0" marL="0">
-              <a:buNone/>
-            </a:pPr>
-            <a:r>
-              <a:rPr lang="en-US" sz="1200" b="1" dirty="0">
-                <a:solidFill>
-                  <a:srgbClr val="4338CA"/>
-                </a:solidFill>
-                <a:latin typeface="Trebuchet MS" pitchFamily="34" charset="0"/>
-                <a:ea typeface="Trebuchet MS" pitchFamily="34" charset="-122"/>
-                <a:cs typeface="Trebuchet MS" pitchFamily="34" charset="-120"/>
-              </a:rPr>
-              <a:t>department</a:t>
+              <a:t>parties</a:t>
             </a:r>
             <a:endParaRPr lang="en-US" sz="1200" dirty="0"/>
           </a:p>
@@ -36672,7 +37710,7 @@
                 <a:ea typeface="Calibri" pitchFamily="34" charset="-122"/>
                 <a:cs typeface="Calibri" pitchFamily="34" charset="-120"/>
               </a:rPr>
-              <a:t>Word Labs  •  wordlabs.app  •  Root: 'part' = piece, share, divide</a:t>
+              <a:t>Word Labs  •  wordlabs.app  •  Root: 'part' = a piece of something; a section</a:t>
             </a:r>
             <a:endParaRPr lang="en-US" sz="800" dirty="0"/>
           </a:p>
@@ -36836,7 +37874,7 @@
                 <a:ea typeface="Calibri" pitchFamily="34" charset="-122"/>
                 <a:cs typeface="Calibri" pitchFamily="34" charset="-120"/>
               </a:rPr>
-              <a:t>The core part of a word carrying its basic meaning. For example, 'part' means 'piece, share, divide'.</a:t>
+              <a:t>The core part of a word carrying its basic meaning. For example, 'part' means 'a piece of something; a section'.</a:t>
             </a:r>
             <a:endParaRPr lang="en-US" sz="1350" dirty="0"/>
           </a:p>
@@ -37456,7 +38494,7 @@
                 <a:ea typeface="Calibri" pitchFamily="34" charset="-122"/>
                 <a:cs typeface="Calibri" pitchFamily="34" charset="-120"/>
               </a:rPr>
-              <a:t>Word Labs  •  wordlabs.app  •  Root: 'part' = piece, share, divide</a:t>
+              <a:t>Word Labs  •  wordlabs.app  •  Root: 'part' = a piece of something; a section</a:t>
             </a:r>
             <a:endParaRPr lang="en-US" sz="800" dirty="0"/>
           </a:p>
@@ -37568,7 +38606,7 @@
                 <a:ea typeface="Calibri" pitchFamily="34" charset="-122"/>
                 <a:cs typeface="Calibri" pitchFamily="34" charset="-120"/>
               </a:rPr>
-              <a:t>1.  A particle is a tiny piece or small part of something.</a:t>
+              <a:t>1.  'part' means 'a piece or section of something larger'.</a:t>
             </a:r>
             <a:endParaRPr lang="en-US" sz="1300" dirty="0"/>
           </a:p>
@@ -37707,7 +38745,7 @@
                 <a:ea typeface="Calibri" pitchFamily="34" charset="-122"/>
                 <a:cs typeface="Calibri" pitchFamily="34" charset="-120"/>
               </a:rPr>
-              <a:t>2.  The word 'depart' contains the root 'part'.</a:t>
+              <a:t>2.  'parts' means 'pieces or components that make up something bigger'.</a:t>
             </a:r>
             <a:endParaRPr lang="en-US" sz="1300" dirty="0"/>
           </a:p>
@@ -37846,7 +38884,7 @@
                 <a:ea typeface="Calibri" pitchFamily="34" charset="-122"/>
                 <a:cs typeface="Calibri" pitchFamily="34" charset="-120"/>
               </a:rPr>
-              <a:t>3.  The word 'partial' means something is complete and whole.</a:t>
+              <a:t>3.  'part' means 'a piece of something; a section'.</a:t>
             </a:r>
             <a:endParaRPr lang="en-US" sz="1300" dirty="0"/>
           </a:p>
@@ -37869,11 +38907,11 @@
             </a:avLst>
           </a:prstGeom>
           <a:solidFill>
-            <a:srgbClr val="FEE2E2"/>
-          </a:solidFill>
-          <a:ln w="12700">
-            <a:solidFill>
-              <a:srgbClr val="DC2626"/>
+            <a:srgbClr val="DCFCE7"/>
+          </a:solidFill>
+          <a:ln w="12700">
+            <a:solidFill>
+              <a:srgbClr val="16A34A"/>
             </a:solidFill>
             <a:prstDash val="solid"/>
           </a:ln>
@@ -37906,13 +38944,13 @@
             <a:r>
               <a:rPr lang="en-US" sz="1100" b="1" dirty="0">
                 <a:solidFill>
-                  <a:srgbClr val="DC2626"/>
+                  <a:srgbClr val="16A34A"/>
                 </a:solidFill>
                 <a:latin typeface="Trebuchet MS" pitchFamily="34" charset="0"/>
                 <a:ea typeface="Trebuchet MS" pitchFamily="34" charset="-122"/>
                 <a:cs typeface="Trebuchet MS" pitchFamily="34" charset="-120"/>
               </a:rPr>
-              <a:t>FALSE</a:t>
+              <a:t>TRUE</a:t>
             </a:r>
             <a:endParaRPr lang="en-US" sz="1100" dirty="0"/>
           </a:p>
@@ -37985,7 +39023,7 @@
                 <a:ea typeface="Calibri" pitchFamily="34" charset="-122"/>
                 <a:cs typeface="Calibri" pitchFamily="34" charset="-120"/>
               </a:rPr>
-              <a:t>4.  The root 'part' comes from a Latin word meaning piece or share.</a:t>
+              <a:t>4.  'part' means 'to walk or travel somewhere on foot'.</a:t>
             </a:r>
             <a:endParaRPr lang="en-US" sz="1300" dirty="0"/>
           </a:p>
@@ -38008,11 +39046,11 @@
             </a:avLst>
           </a:prstGeom>
           <a:solidFill>
-            <a:srgbClr val="DCFCE7"/>
-          </a:solidFill>
-          <a:ln w="12700">
-            <a:solidFill>
-              <a:srgbClr val="16A34A"/>
+            <a:srgbClr val="FEE2E2"/>
+          </a:solidFill>
+          <a:ln w="12700">
+            <a:solidFill>
+              <a:srgbClr val="DC2626"/>
             </a:solidFill>
             <a:prstDash val="solid"/>
           </a:ln>
@@ -38045,13 +39083,13 @@
             <a:r>
               <a:rPr lang="en-US" sz="1100" b="1" dirty="0">
                 <a:solidFill>
-                  <a:srgbClr val="16A34A"/>
+                  <a:srgbClr val="DC2626"/>
                 </a:solidFill>
                 <a:latin typeface="Trebuchet MS" pitchFamily="34" charset="0"/>
                 <a:ea typeface="Trebuchet MS" pitchFamily="34" charset="-122"/>
                 <a:cs typeface="Trebuchet MS" pitchFamily="34" charset="-120"/>
               </a:rPr>
-              <a:t>TRUE</a:t>
+              <a:t>FALSE</a:t>
             </a:r>
             <a:endParaRPr lang="en-US" sz="1100" dirty="0"/>
           </a:p>
@@ -38124,7 +39162,7 @@
                 <a:ea typeface="Calibri" pitchFamily="34" charset="-122"/>
                 <a:cs typeface="Calibri" pitchFamily="34" charset="-120"/>
               </a:rPr>
-              <a:t>5.  The prefix 'im' in 'impartial' means after or behind.</a:t>
+              <a:t>5.  'parts' means 'small celebrations held with friends'.</a:t>
             </a:r>
             <a:endParaRPr lang="en-US" sz="1300" dirty="0"/>
           </a:p>
@@ -38482,7 +39520,7 @@
                 <a:ea typeface="Calibri" pitchFamily="34" charset="-122"/>
                 <a:cs typeface="Calibri" pitchFamily="34" charset="-120"/>
               </a:rPr>
-              <a:t>Word Labs  •  wordlabs.app  •  Root: 'part' = piece, share, divide</a:t>
+              <a:t>Word Labs  •  wordlabs.app  •  Root: 'part' = a piece of something; a section</a:t>
             </a:r>
             <a:endParaRPr lang="en-US" sz="800" dirty="0"/>
           </a:p>
@@ -38619,7 +39657,7 @@
                 <a:ea typeface="Trebuchet MS" pitchFamily="34" charset="-122"/>
                 <a:cs typeface="Trebuchet MS" pitchFamily="34" charset="-120"/>
               </a:rPr>
-              <a:t>piece, share, divide</a:t>
+              <a:t>a piece of something; a section</a:t>
             </a:r>
             <a:endParaRPr lang="en-US" sz="2000" dirty="0"/>
           </a:p>
@@ -38658,7 +39696,7 @@
                 <a:ea typeface="Calibri" pitchFamily="34" charset="-122"/>
                 <a:cs typeface="Calibri" pitchFamily="34" charset="-120"/>
               </a:rPr>
-              <a:t>Origin: Latin: pars</a:t>
+              <a:t>Origin: Anglo-Saxon (Old English) root</a:t>
             </a:r>
             <a:endParaRPr lang="en-US" sz="1100" dirty="0"/>
           </a:p>
@@ -38763,7 +39801,7 @@
                 <a:ea typeface="Trebuchet MS" pitchFamily="34" charset="-122"/>
                 <a:cs typeface="Trebuchet MS" pitchFamily="34" charset="-120"/>
               </a:rPr>
-              <a:t>partial</a:t>
+              <a:t>part</a:t>
             </a:r>
             <a:endParaRPr lang="en-US" sz="1300" dirty="0"/>
           </a:p>
@@ -38829,7 +39867,7 @@
                 <a:ea typeface="Trebuchet MS" pitchFamily="34" charset="-122"/>
                 <a:cs typeface="Trebuchet MS" pitchFamily="34" charset="-120"/>
               </a:rPr>
-              <a:t>partition</a:t>
+              <a:t>parts</a:t>
             </a:r>
             <a:endParaRPr lang="en-US" sz="1300" dirty="0"/>
           </a:p>
@@ -38895,7 +39933,7 @@
                 <a:ea typeface="Trebuchet MS" pitchFamily="34" charset="-122"/>
                 <a:cs typeface="Trebuchet MS" pitchFamily="34" charset="-120"/>
               </a:rPr>
-              <a:t>particle</a:t>
+              <a:t>party</a:t>
             </a:r>
             <a:endParaRPr lang="en-US" sz="1300" dirty="0"/>
           </a:p>
@@ -38961,7 +39999,7 @@
                 <a:ea typeface="Trebuchet MS" pitchFamily="34" charset="-122"/>
                 <a:cs typeface="Trebuchet MS" pitchFamily="34" charset="-120"/>
               </a:rPr>
-              <a:t>partner</a:t>
+              <a:t>depart</a:t>
             </a:r>
             <a:endParaRPr lang="en-US" sz="1300" dirty="0"/>
           </a:p>
@@ -39027,7 +40065,7 @@
                 <a:ea typeface="Trebuchet MS" pitchFamily="34" charset="-122"/>
                 <a:cs typeface="Trebuchet MS" pitchFamily="34" charset="-120"/>
               </a:rPr>
-              <a:t>depart</a:t>
+              <a:t>parted</a:t>
             </a:r>
             <a:endParaRPr lang="en-US" sz="1300" dirty="0"/>
           </a:p>
@@ -39093,7 +40131,7 @@
                 <a:ea typeface="Trebuchet MS" pitchFamily="34" charset="-122"/>
                 <a:cs typeface="Trebuchet MS" pitchFamily="34" charset="-120"/>
               </a:rPr>
-              <a:t>impartial</a:t>
+              <a:t>partly</a:t>
             </a:r>
             <a:endParaRPr lang="en-US" sz="1300" dirty="0"/>
           </a:p>
@@ -39159,7 +40197,7 @@
                 <a:ea typeface="Trebuchet MS" pitchFamily="34" charset="-122"/>
                 <a:cs typeface="Trebuchet MS" pitchFamily="34" charset="-120"/>
               </a:rPr>
-              <a:t>compartment</a:t>
+              <a:t>parties</a:t>
             </a:r>
             <a:endParaRPr lang="en-US" sz="1300" dirty="0"/>
           </a:p>
@@ -39451,7 +40489,7 @@
                 <a:ea typeface="Calibri" pitchFamily="34" charset="-122"/>
                 <a:cs typeface="Calibri" pitchFamily="34" charset="-120"/>
               </a:rPr>
-              <a:t>Word Labs  •  wordlabs.app  •  Root: 'part' = piece, share, divide</a:t>
+              <a:t>Word Labs  •  wordlabs.app  •  Root: 'part' = a piece of something; a section</a:t>
             </a:r>
             <a:endParaRPr lang="en-US" sz="800" dirty="0"/>
           </a:p>
@@ -39752,7 +40790,7 @@
                 <a:ea typeface="Trebuchet MS" pitchFamily="34" charset="-122"/>
                 <a:cs typeface="Trebuchet MS" pitchFamily="34" charset="-120"/>
               </a:rPr>
-              <a:t>de-</a:t>
+              <a:t>a-</a:t>
             </a:r>
             <a:endParaRPr lang="en-US" sz="1300" dirty="0"/>
           </a:p>
@@ -39880,7 +40918,7 @@
                 <a:ea typeface="Trebuchet MS" pitchFamily="34" charset="-122"/>
                 <a:cs typeface="Trebuchet MS" pitchFamily="34" charset="-120"/>
               </a:rPr>
-              <a:t>-ial</a:t>
+              <a:t>-ment</a:t>
             </a:r>
             <a:endParaRPr lang="en-US" sz="1300" dirty="0"/>
           </a:p>
@@ -39944,7 +40982,7 @@
                 <a:ea typeface="Trebuchet MS" pitchFamily="34" charset="-122"/>
                 <a:cs typeface="Trebuchet MS" pitchFamily="34" charset="-120"/>
               </a:rPr>
-              <a:t>im-</a:t>
+              <a:t>con-</a:t>
             </a:r>
             <a:endParaRPr lang="en-US" sz="1300" dirty="0"/>
           </a:p>
@@ -40033,7 +41071,7 @@
                 <a:ea typeface="Trebuchet MS" pitchFamily="34" charset="-122"/>
                 <a:cs typeface="Trebuchet MS" pitchFamily="34" charset="-120"/>
               </a:rPr>
-              <a:t>-ly</a:t>
+              <a:t>-ed</a:t>
             </a:r>
             <a:endParaRPr lang="en-US" sz="1300" dirty="0"/>
           </a:p>
@@ -40097,7 +41135,7 @@
                 <a:ea typeface="Trebuchet MS" pitchFamily="34" charset="-122"/>
                 <a:cs typeface="Trebuchet MS" pitchFamily="34" charset="-120"/>
               </a:rPr>
-              <a:t>bi-</a:t>
+              <a:t>de-</a:t>
             </a:r>
             <a:endParaRPr lang="en-US" sz="1300" dirty="0"/>
           </a:p>
@@ -40186,7 +41224,7 @@
                 <a:ea typeface="Trebuchet MS" pitchFamily="34" charset="-122"/>
                 <a:cs typeface="Trebuchet MS" pitchFamily="34" charset="-120"/>
               </a:rPr>
-              <a:t>-ner</a:t>
+              <a:t>-ing</a:t>
             </a:r>
             <a:endParaRPr lang="en-US" sz="1300" dirty="0"/>
           </a:p>
@@ -40250,7 +41288,7 @@
                 <a:ea typeface="Trebuchet MS" pitchFamily="34" charset="-122"/>
                 <a:cs typeface="Trebuchet MS" pitchFamily="34" charset="-120"/>
               </a:rPr>
-              <a:t>com-</a:t>
+              <a:t>in-</a:t>
             </a:r>
             <a:endParaRPr lang="en-US" sz="1300" dirty="0"/>
           </a:p>
@@ -40339,7 +41377,7 @@
                 <a:ea typeface="Trebuchet MS" pitchFamily="34" charset="-122"/>
                 <a:cs typeface="Trebuchet MS" pitchFamily="34" charset="-120"/>
               </a:rPr>
-              <a:t>-ition</a:t>
+              <a:t>-ure</a:t>
             </a:r>
             <a:endParaRPr lang="en-US" sz="1300" dirty="0"/>
           </a:p>
@@ -40360,7 +41398,7 @@
             <a:avLst/>
           </a:prstGeom>
           <a:solidFill>
-            <a:srgbClr val="DDD6FE"/>
+            <a:srgbClr val="F8FAFC"/>
           </a:solidFill>
           <a:ln w="12700">
             <a:solidFill>
@@ -40372,18 +41410,68 @@
       </p:sp>
       <p:sp>
         <p:nvSpPr>
-          <p:cNvPr id="39" name="Text 37"/>
-          <p:cNvSpPr/>
-          <p:nvPr/>
-        </p:nvSpPr>
-        <p:spPr>
-          <a:xfrm>
-            <a:off x="640080" y="3584448"/>
+          <p:cNvPr id="39" name="Shape 37"/>
+          <p:cNvSpPr/>
+          <p:nvPr/>
+        </p:nvSpPr>
+        <p:spPr>
+          <a:xfrm>
+            <a:off x="3291840" y="3584448"/>
+            <a:ext cx="1645920" cy="420624"/>
+          </a:xfrm>
+          <a:prstGeom prst="rect">
+            <a:avLst/>
+          </a:prstGeom>
+          <a:solidFill>
+            <a:srgbClr val="F8FAFC"/>
+          </a:solidFill>
+          <a:ln w="12700">
+            <a:solidFill>
+              <a:srgbClr val="E5E7EB"/>
+            </a:solidFill>
+            <a:prstDash val="solid"/>
+          </a:ln>
+        </p:spPr>
+      </p:sp>
+      <p:sp>
+        <p:nvSpPr>
+          <p:cNvPr id="40" name="Shape 38"/>
+          <p:cNvSpPr/>
+          <p:nvPr/>
+        </p:nvSpPr>
+        <p:spPr>
+          <a:xfrm>
+            <a:off x="5943600" y="3584448"/>
             <a:ext cx="1463040" cy="420624"/>
           </a:xfrm>
           <a:prstGeom prst="rect">
             <a:avLst/>
           </a:prstGeom>
+          <a:solidFill>
+            <a:srgbClr val="FCE7F3"/>
+          </a:solidFill>
+          <a:ln w="12700">
+            <a:solidFill>
+              <a:srgbClr val="E5E7EB"/>
+            </a:solidFill>
+            <a:prstDash val="solid"/>
+          </a:ln>
+        </p:spPr>
+      </p:sp>
+      <p:sp>
+        <p:nvSpPr>
+          <p:cNvPr id="41" name="Text 39"/>
+          <p:cNvSpPr/>
+          <p:nvPr/>
+        </p:nvSpPr>
+        <p:spPr>
+          <a:xfrm>
+            <a:off x="5943600" y="3584448"/>
+            <a:ext cx="1463040" cy="420624"/>
+          </a:xfrm>
+          <a:prstGeom prst="rect">
+            <a:avLst/>
+          </a:prstGeom>
           <a:noFill/>
           <a:ln/>
         </p:spPr>
@@ -40397,13 +41485,13 @@
             <a:r>
               <a:rPr lang="en-US" sz="1300" b="1" dirty="0">
                 <a:solidFill>
-                  <a:srgbClr val="4C1D95"/>
+                  <a:srgbClr val="9D174D"/>
                 </a:solidFill>
                 <a:latin typeface="Trebuchet MS" pitchFamily="34" charset="0"/>
                 <a:ea typeface="Trebuchet MS" pitchFamily="34" charset="-122"/>
                 <a:cs typeface="Trebuchet MS" pitchFamily="34" charset="-120"/>
               </a:rPr>
-              <a:t>re-</a:t>
+              <a:t>-y</a:t>
             </a:r>
             <a:endParaRPr lang="en-US" sz="1300" dirty="0"/>
           </a:p>
@@ -40411,20 +41499,45 @@
       </p:sp>
       <p:sp>
         <p:nvSpPr>
-          <p:cNvPr id="40" name="Shape 38"/>
-          <p:cNvSpPr/>
-          <p:nvPr/>
-        </p:nvSpPr>
-        <p:spPr>
-          <a:xfrm>
-            <a:off x="3291840" y="3584448"/>
+          <p:cNvPr id="42" name="Shape 40"/>
+          <p:cNvSpPr/>
+          <p:nvPr/>
+        </p:nvSpPr>
+        <p:spPr>
+          <a:xfrm>
+            <a:off x="640080" y="4041648"/>
+            <a:ext cx="1463040" cy="420624"/>
+          </a:xfrm>
+          <a:prstGeom prst="rect">
+            <a:avLst/>
+          </a:prstGeom>
+          <a:solidFill>
+            <a:srgbClr val="F1F5F9"/>
+          </a:solidFill>
+          <a:ln w="12700">
+            <a:solidFill>
+              <a:srgbClr val="E5E7EB"/>
+            </a:solidFill>
+            <a:prstDash val="solid"/>
+          </a:ln>
+        </p:spPr>
+      </p:sp>
+      <p:sp>
+        <p:nvSpPr>
+          <p:cNvPr id="43" name="Shape 41"/>
+          <p:cNvSpPr/>
+          <p:nvPr/>
+        </p:nvSpPr>
+        <p:spPr>
+          <a:xfrm>
+            <a:off x="3291840" y="4041648"/>
             <a:ext cx="1645920" cy="420624"/>
           </a:xfrm>
           <a:prstGeom prst="rect">
             <a:avLst/>
           </a:prstGeom>
           <a:solidFill>
-            <a:srgbClr val="F8FAFC"/>
+            <a:srgbClr val="F1F5F9"/>
           </a:solidFill>
           <a:ln w="12700">
             <a:solidFill>
@@ -40436,13 +41549,13 @@
       </p:sp>
       <p:sp>
         <p:nvSpPr>
-          <p:cNvPr id="41" name="Shape 39"/>
-          <p:cNvSpPr/>
-          <p:nvPr/>
-        </p:nvSpPr>
-        <p:spPr>
-          <a:xfrm>
-            <a:off x="5943600" y="3584448"/>
+          <p:cNvPr id="44" name="Shape 42"/>
+          <p:cNvSpPr/>
+          <p:nvPr/>
+        </p:nvSpPr>
+        <p:spPr>
+          <a:xfrm>
+            <a:off x="5943600" y="4041648"/>
             <a:ext cx="1463040" cy="420624"/>
           </a:xfrm>
           <a:prstGeom prst="rect">
@@ -40461,13 +41574,13 @@
       </p:sp>
       <p:sp>
         <p:nvSpPr>
-          <p:cNvPr id="42" name="Text 40"/>
-          <p:cNvSpPr/>
-          <p:nvPr/>
-        </p:nvSpPr>
-        <p:spPr>
-          <a:xfrm>
-            <a:off x="5943600" y="3584448"/>
+          <p:cNvPr id="45" name="Text 43"/>
+          <p:cNvSpPr/>
+          <p:nvPr/>
+        </p:nvSpPr>
+        <p:spPr>
+          <a:xfrm>
+            <a:off x="5943600" y="4041648"/>
             <a:ext cx="1463040" cy="420624"/>
           </a:xfrm>
           <a:prstGeom prst="rect">
@@ -40492,7 +41605,7 @@
                 <a:ea typeface="Trebuchet MS" pitchFamily="34" charset="-122"/>
                 <a:cs typeface="Trebuchet MS" pitchFamily="34" charset="-120"/>
               </a:rPr>
-              <a:t>-icle</a:t>
+              <a:t>-ial</a:t>
             </a:r>
             <a:endParaRPr lang="en-US" sz="1300" dirty="0"/>
           </a:p>
@@ -40500,13 +41613,13 @@
       </p:sp>
       <p:sp>
         <p:nvSpPr>
-          <p:cNvPr id="43" name="Text 41"/>
-          <p:cNvSpPr/>
-          <p:nvPr/>
-        </p:nvSpPr>
-        <p:spPr>
-          <a:xfrm>
-            <a:off x="365760" y="4178808"/>
+          <p:cNvPr id="46" name="Text 44"/>
+          <p:cNvSpPr/>
+          <p:nvPr/>
+        </p:nvSpPr>
+        <p:spPr>
+          <a:xfrm>
+            <a:off x="365760" y="4636008"/>
             <a:ext cx="1097280" cy="420624"/>
           </a:xfrm>
           <a:prstGeom prst="rect">
@@ -40539,13 +41652,13 @@
       </p:sp>
       <p:sp>
         <p:nvSpPr>
-          <p:cNvPr id="44" name="Shape 42"/>
-          <p:cNvSpPr/>
-          <p:nvPr/>
-        </p:nvSpPr>
-        <p:spPr>
-          <a:xfrm>
-            <a:off x="1508760" y="4178808"/>
+          <p:cNvPr id="47" name="Shape 45"/>
+          <p:cNvSpPr/>
+          <p:nvPr/>
+        </p:nvSpPr>
+        <p:spPr>
+          <a:xfrm>
+            <a:off x="1508760" y="4636008"/>
             <a:ext cx="822960" cy="420624"/>
           </a:xfrm>
           <a:prstGeom prst="rect">
@@ -40573,13 +41686,13 @@
       </p:sp>
       <p:sp>
         <p:nvSpPr>
-          <p:cNvPr id="45" name="Text 43"/>
-          <p:cNvSpPr/>
-          <p:nvPr/>
-        </p:nvSpPr>
-        <p:spPr>
-          <a:xfrm>
-            <a:off x="1508760" y="4178808"/>
+          <p:cNvPr id="48" name="Text 46"/>
+          <p:cNvSpPr/>
+          <p:nvPr/>
+        </p:nvSpPr>
+        <p:spPr>
+          <a:xfrm>
+            <a:off x="1508760" y="4636008"/>
             <a:ext cx="822960" cy="420624"/>
           </a:xfrm>
           <a:prstGeom prst="rect">
@@ -40604,7 +41717,7 @@
                 <a:ea typeface="Trebuchet MS" pitchFamily="34" charset="-122"/>
                 <a:cs typeface="Trebuchet MS" pitchFamily="34" charset="-120"/>
               </a:rPr>
-              <a:t>de-</a:t>
+              <a:t>a-</a:t>
             </a:r>
             <a:endParaRPr lang="en-US" sz="1300" dirty="0"/>
           </a:p>
@@ -40612,13 +41725,13 @@
       </p:sp>
       <p:sp>
         <p:nvSpPr>
-          <p:cNvPr id="46" name="Text 44"/>
-          <p:cNvSpPr/>
-          <p:nvPr/>
-        </p:nvSpPr>
-        <p:spPr>
-          <a:xfrm>
-            <a:off x="2359152" y="4178808"/>
+          <p:cNvPr id="49" name="Text 47"/>
+          <p:cNvSpPr/>
+          <p:nvPr/>
+        </p:nvSpPr>
+        <p:spPr>
+          <a:xfrm>
+            <a:off x="2359152" y="4636008"/>
             <a:ext cx="320040" cy="420624"/>
           </a:xfrm>
           <a:prstGeom prst="rect">
@@ -40651,13 +41764,13 @@
       </p:sp>
       <p:sp>
         <p:nvSpPr>
-          <p:cNvPr id="47" name="Shape 45"/>
-          <p:cNvSpPr/>
-          <p:nvPr/>
-        </p:nvSpPr>
-        <p:spPr>
-          <a:xfrm>
-            <a:off x="2706624" y="4178808"/>
+          <p:cNvPr id="50" name="Shape 48"/>
+          <p:cNvSpPr/>
+          <p:nvPr/>
+        </p:nvSpPr>
+        <p:spPr>
+          <a:xfrm>
+            <a:off x="2706624" y="4636008"/>
             <a:ext cx="1243584" cy="420624"/>
           </a:xfrm>
           <a:prstGeom prst="rect">
@@ -40685,13 +41798,13 @@
       </p:sp>
       <p:sp>
         <p:nvSpPr>
-          <p:cNvPr id="48" name="Text 46"/>
-          <p:cNvSpPr/>
-          <p:nvPr/>
-        </p:nvSpPr>
-        <p:spPr>
-          <a:xfrm>
-            <a:off x="2706624" y="4178808"/>
+          <p:cNvPr id="51" name="Text 49"/>
+          <p:cNvSpPr/>
+          <p:nvPr/>
+        </p:nvSpPr>
+        <p:spPr>
+          <a:xfrm>
+            <a:off x="2706624" y="4636008"/>
             <a:ext cx="1243584" cy="420624"/>
           </a:xfrm>
           <a:prstGeom prst="rect">
@@ -40724,13 +41837,13 @@
       </p:sp>
       <p:sp>
         <p:nvSpPr>
-          <p:cNvPr id="49" name="Text 47"/>
-          <p:cNvSpPr/>
-          <p:nvPr/>
-        </p:nvSpPr>
-        <p:spPr>
-          <a:xfrm>
-            <a:off x="3977640" y="4178808"/>
+          <p:cNvPr id="52" name="Text 50"/>
+          <p:cNvSpPr/>
+          <p:nvPr/>
+        </p:nvSpPr>
+        <p:spPr>
+          <a:xfrm>
+            <a:off x="3977640" y="4636008"/>
             <a:ext cx="320040" cy="420624"/>
           </a:xfrm>
           <a:prstGeom prst="rect">
@@ -40763,14 +41876,14 @@
       </p:sp>
       <p:sp>
         <p:nvSpPr>
-          <p:cNvPr id="50" name="Shape 48"/>
-          <p:cNvSpPr/>
-          <p:nvPr/>
-        </p:nvSpPr>
-        <p:spPr>
-          <a:xfrm>
-            <a:off x="4325112" y="4178808"/>
-            <a:ext cx="950976" cy="420624"/>
+          <p:cNvPr id="53" name="Shape 51"/>
+          <p:cNvSpPr/>
+          <p:nvPr/>
+        </p:nvSpPr>
+        <p:spPr>
+          <a:xfrm>
+            <a:off x="4325112" y="4636008"/>
+            <a:ext cx="1097280" cy="420624"/>
           </a:xfrm>
           <a:prstGeom prst="rect">
             <a:avLst>
@@ -40797,14 +41910,14 @@
       </p:sp>
       <p:sp>
         <p:nvSpPr>
-          <p:cNvPr id="51" name="Text 49"/>
-          <p:cNvSpPr/>
-          <p:nvPr/>
-        </p:nvSpPr>
-        <p:spPr>
-          <a:xfrm>
-            <a:off x="4325112" y="4178808"/>
-            <a:ext cx="950976" cy="420624"/>
+          <p:cNvPr id="54" name="Text 52"/>
+          <p:cNvSpPr/>
+          <p:nvPr/>
+        </p:nvSpPr>
+        <p:spPr>
+          <a:xfrm>
+            <a:off x="4325112" y="4636008"/>
+            <a:ext cx="1097280" cy="420624"/>
           </a:xfrm>
           <a:prstGeom prst="rect">
             <a:avLst/>
@@ -40828,7 +41941,7 @@
                 <a:ea typeface="Trebuchet MS" pitchFamily="34" charset="-122"/>
                 <a:cs typeface="Trebuchet MS" pitchFamily="34" charset="-120"/>
               </a:rPr>
-              <a:t>-ial</a:t>
+              <a:t>-ment</a:t>
             </a:r>
             <a:endParaRPr lang="en-US" sz="1300" dirty="0"/>
           </a:p>
@@ -40836,13 +41949,13 @@
       </p:sp>
       <p:sp>
         <p:nvSpPr>
-          <p:cNvPr id="52" name="Text 50"/>
-          <p:cNvSpPr/>
-          <p:nvPr/>
-        </p:nvSpPr>
-        <p:spPr>
-          <a:xfrm>
-            <a:off x="5349240" y="4178808"/>
+          <p:cNvPr id="55" name="Text 53"/>
+          <p:cNvSpPr/>
+          <p:nvPr/>
+        </p:nvSpPr>
+        <p:spPr>
+          <a:xfrm>
+            <a:off x="5495544" y="4636008"/>
             <a:ext cx="365760" cy="420624"/>
           </a:xfrm>
           <a:prstGeom prst="rect">
@@ -40875,13 +41988,13 @@
       </p:sp>
       <p:sp>
         <p:nvSpPr>
-          <p:cNvPr id="53" name="Shape 51"/>
-          <p:cNvSpPr/>
-          <p:nvPr/>
-        </p:nvSpPr>
-        <p:spPr>
-          <a:xfrm>
-            <a:off x="5760720" y="4178808"/>
+          <p:cNvPr id="56" name="Shape 54"/>
+          <p:cNvSpPr/>
+          <p:nvPr/>
+        </p:nvSpPr>
+        <p:spPr>
+          <a:xfrm>
+            <a:off x="5907024" y="4636008"/>
             <a:ext cx="2194560" cy="420624"/>
           </a:xfrm>
           <a:prstGeom prst="rect">
@@ -40902,13 +42015,13 @@
       </p:sp>
       <p:sp>
         <p:nvSpPr>
-          <p:cNvPr id="54" name="Text 52"/>
-          <p:cNvSpPr/>
-          <p:nvPr/>
-        </p:nvSpPr>
-        <p:spPr>
-          <a:xfrm>
-            <a:off x="5760720" y="4178808"/>
+          <p:cNvPr id="57" name="Text 55"/>
+          <p:cNvSpPr/>
+          <p:nvPr/>
+        </p:nvSpPr>
+        <p:spPr>
+          <a:xfrm>
+            <a:off x="5907024" y="4636008"/>
             <a:ext cx="2194560" cy="420624"/>
           </a:xfrm>
           <a:prstGeom prst="rect">
@@ -40933,7 +42046,7 @@
                 <a:ea typeface="Trebuchet MS" pitchFamily="34" charset="-122"/>
                 <a:cs typeface="Trebuchet MS" pitchFamily="34" charset="-120"/>
               </a:rPr>
-              <a:t>partial</a:t>
+              <a:t>part</a:t>
             </a:r>
             <a:endParaRPr lang="en-US" sz="1400" dirty="0"/>
           </a:p>
@@ -41225,7 +42338,7 @@
                 <a:ea typeface="Calibri" pitchFamily="34" charset="-122"/>
                 <a:cs typeface="Calibri" pitchFamily="34" charset="-120"/>
               </a:rPr>
-              <a:t>Word Labs  •  wordlabs.app  •  Root: 'part' = piece, share, divide</a:t>
+              <a:t>Word Labs  •  wordlabs.app  •  Root: 'part' = a piece of something; a section</a:t>
             </a:r>
             <a:endParaRPr lang="en-US" sz="800" dirty="0"/>
           </a:p>
@@ -41337,7 +42450,7 @@
                 <a:ea typeface="Trebuchet MS" pitchFamily="34" charset="-122"/>
                 <a:cs typeface="Trebuchet MS" pitchFamily="34" charset="-120"/>
               </a:rPr>
-              <a:t>partial</a:t>
+              <a:t>part</a:t>
             </a:r>
             <a:endParaRPr lang="en-US" sz="1200" dirty="0"/>
           </a:p>
@@ -41403,7 +42516,7 @@
                 <a:ea typeface="Calibri" pitchFamily="34" charset="-122"/>
                 <a:cs typeface="Calibri" pitchFamily="34" charset="-120"/>
               </a:rPr>
-              <a:t>A tiny piece or small part of something.</a:t>
+              <a:t>a social gathering held to celebrate something</a:t>
             </a:r>
             <a:endParaRPr lang="en-US" sz="1200" dirty="0"/>
           </a:p>
@@ -41476,7 +42589,7 @@
                 <a:ea typeface="Trebuchet MS" pitchFamily="34" charset="-122"/>
                 <a:cs typeface="Trebuchet MS" pitchFamily="34" charset="-120"/>
               </a:rPr>
-              <a:t>partition</a:t>
+              <a:t>parts</a:t>
             </a:r>
             <a:endParaRPr lang="en-US" sz="1200" dirty="0"/>
           </a:p>
@@ -41542,7 +42655,7 @@
                 <a:ea typeface="Calibri" pitchFamily="34" charset="-122"/>
                 <a:cs typeface="Calibri" pitchFamily="34" charset="-120"/>
               </a:rPr>
-              <a:t>To leave a place and go somewhere else.</a:t>
+              <a:t>separated or divided, or said goodbye and went different ways</a:t>
             </a:r>
             <a:endParaRPr lang="en-US" sz="1200" dirty="0"/>
           </a:p>
@@ -41615,7 +42728,7 @@
                 <a:ea typeface="Trebuchet MS" pitchFamily="34" charset="-122"/>
                 <a:cs typeface="Trebuchet MS" pitchFamily="34" charset="-120"/>
               </a:rPr>
-              <a:t>particle</a:t>
+              <a:t>party</a:t>
             </a:r>
             <a:endParaRPr lang="en-US" sz="1200" dirty="0"/>
           </a:p>
@@ -41681,7 +42794,7 @@
                 <a:ea typeface="Calibri" pitchFamily="34" charset="-122"/>
                 <a:cs typeface="Calibri" pitchFamily="34" charset="-120"/>
               </a:rPr>
-              <a:t>When something is not complete — only part of it is there or done.</a:t>
+              <a:t>a piece or section of something larger</a:t>
             </a:r>
             <a:endParaRPr lang="en-US" sz="1200" dirty="0"/>
           </a:p>
@@ -41754,7 +42867,7 @@
                 <a:ea typeface="Trebuchet MS" pitchFamily="34" charset="-122"/>
                 <a:cs typeface="Trebuchet MS" pitchFamily="34" charset="-120"/>
               </a:rPr>
-              <a:t>partner</a:t>
+              <a:t>depart</a:t>
             </a:r>
             <a:endParaRPr lang="en-US" sz="1200" dirty="0"/>
           </a:p>
@@ -41820,7 +42933,7 @@
                 <a:ea typeface="Calibri" pitchFamily="34" charset="-122"/>
                 <a:cs typeface="Calibri" pitchFamily="34" charset="-120"/>
               </a:rPr>
-              <a:t>Being fair and not taking sides — not favouring one part over another.</a:t>
+              <a:t>to some extent but not completely</a:t>
             </a:r>
             <a:endParaRPr lang="en-US" sz="1200" dirty="0"/>
           </a:p>
@@ -41893,7 +43006,7 @@
                 <a:ea typeface="Trebuchet MS" pitchFamily="34" charset="-122"/>
                 <a:cs typeface="Trebuchet MS" pitchFamily="34" charset="-120"/>
               </a:rPr>
-              <a:t>depart</a:t>
+              <a:t>parted</a:t>
             </a:r>
             <a:endParaRPr lang="en-US" sz="1200" dirty="0"/>
           </a:p>
@@ -41959,7 +43072,7 @@
                 <a:ea typeface="Calibri" pitchFamily="34" charset="-122"/>
                 <a:cs typeface="Calibri" pitchFamily="34" charset="-120"/>
               </a:rPr>
-              <a:t>A separate section or divided part inside something, like a bag or train carriage.</a:t>
+              <a:t>social gatherings held for enjoyment or celebration</a:t>
             </a:r>
             <a:endParaRPr lang="en-US" sz="1200" dirty="0"/>
           </a:p>
@@ -42032,7 +43145,7 @@
                 <a:ea typeface="Trebuchet MS" pitchFamily="34" charset="-122"/>
                 <a:cs typeface="Trebuchet MS" pitchFamily="34" charset="-120"/>
               </a:rPr>
-              <a:t>impartial</a:t>
+              <a:t>partly</a:t>
             </a:r>
             <a:endParaRPr lang="en-US" sz="1200" dirty="0"/>
           </a:p>
@@ -42098,7 +43211,7 @@
                 <a:ea typeface="Calibri" pitchFamily="34" charset="-122"/>
                 <a:cs typeface="Calibri" pitchFamily="34" charset="-120"/>
               </a:rPr>
-              <a:t>Someone who shares a part in an activity or work with you.</a:t>
+              <a:t>to leave a place, especially to start a journey</a:t>
             </a:r>
             <a:endParaRPr lang="en-US" sz="1200" dirty="0"/>
           </a:p>
@@ -42171,7 +43284,7 @@
                 <a:ea typeface="Trebuchet MS" pitchFamily="34" charset="-122"/>
                 <a:cs typeface="Trebuchet MS" pitchFamily="34" charset="-120"/>
               </a:rPr>
-              <a:t>compartment</a:t>
+              <a:t>parties</a:t>
             </a:r>
             <a:endParaRPr lang="en-US" sz="1200" dirty="0"/>
           </a:p>
@@ -42237,7 +43350,7 @@
                 <a:ea typeface="Calibri" pitchFamily="34" charset="-122"/>
                 <a:cs typeface="Calibri" pitchFamily="34" charset="-120"/>
               </a:rPr>
-              <a:t>A wall or divider that separates one space into parts.</a:t>
+              <a:t>pieces or components that make up something bigger</a:t>
             </a:r>
             <a:endParaRPr lang="en-US" sz="1200" dirty="0"/>
           </a:p>
@@ -42529,7 +43642,7 @@
                 <a:ea typeface="Calibri" pitchFamily="34" charset="-122"/>
                 <a:cs typeface="Calibri" pitchFamily="34" charset="-120"/>
               </a:rPr>
-              <a:t>Word Labs  •  wordlabs.app  •  Root: 'part' = piece, share, divide</a:t>
+              <a:t>Word Labs  •  wordlabs.app  •  Root: 'part' = a piece of something; a section</a:t>
             </a:r>
             <a:endParaRPr lang="en-US" sz="800" dirty="0"/>
           </a:p>
@@ -42732,7 +43845,7 @@
                 <a:ea typeface="Calibri" pitchFamily="34" charset="-122"/>
                 <a:cs typeface="Calibri" pitchFamily="34" charset="-120"/>
               </a:rPr>
-              <a:t>Each student will play a part in our school concert next week.</a:t>
+              <a:t>She read the first part of the story before dinner.</a:t>
             </a:r>
             <a:endParaRPr lang="en-US" sz="1500" dirty="0"/>
           </a:p>
@@ -42896,7 +44009,7 @@
                 <a:ea typeface="Calibri" pitchFamily="34" charset="-122"/>
                 <a:cs typeface="Calibri" pitchFamily="34" charset="-120"/>
               </a:rPr>
-              <a:t>The scientist studied tiny particles of dust floating in the air.</a:t>
+              <a:t>We took the engine apart to see all its parts.</a:t>
             </a:r>
             <a:endParaRPr lang="en-US" sz="1500" dirty="0"/>
           </a:p>
@@ -43060,7 +44173,7 @@
                 <a:ea typeface="Calibri" pitchFamily="34" charset="-122"/>
                 <a:cs typeface="Calibri" pitchFamily="34" charset="-120"/>
               </a:rPr>
-              <a:t>We had to depart early because the train was leaving at six o'clock.</a:t>
+              <a:t>We are having a party to celebrate my birthday on Saturday.</a:t>
             </a:r>
             <a:endParaRPr lang="en-US" sz="1500" dirty="0"/>
           </a:p>
